--- a/decks/backup-restore/backup-restore.pptx
+++ b/decks/backup-restore/backup-restore.pptx
@@ -1210,6 +1210,13 @@
 <file path=ppt/slides/slide1.xml><?xml version="1.0" encoding="utf-8"?>
 <p:sld xmlns:a="http://schemas.openxmlformats.org/drawingml/2006/main" xmlns:r="http://schemas.openxmlformats.org/officeDocument/2006/relationships" xmlns:p="http://schemas.openxmlformats.org/presentationml/2006/main">
   <p:cSld name="Slide 1">
+    <p:bg>
+      <p:bgPr>
+        <a:solidFill>
+          <a:srgbClr val="EDE6D6"/>
+        </a:solidFill>
+      </p:bgPr>
+    </p:bg>
     <p:spTree>
       <p:nvGrpSpPr>
         <p:cNvPr id="1" name=""/>
@@ -1224,30 +1231,299 @@
           <a:chExt cx="0" cy="0"/>
         </a:xfrm>
       </p:grpSpPr>
-      <p:pic>
-        <p:nvPicPr>
-          <p:cNvPr id="2" name="Image 0" descr="/tmp/slide-1787840604496-vo8a21p2sxe.png">    </p:cNvPr>
-          <p:cNvPicPr>
-            <a:picLocks noChangeAspect="1"/>
-          </p:cNvPicPr>
-          <p:nvPr/>
-        </p:nvPicPr>
-        <p:blipFill>
-          <a:blip r:embed="rId1"/>
-          <a:stretch>
-            <a:fillRect/>
-          </a:stretch>
-        </p:blipFill>
-        <p:spPr>
-          <a:xfrm>
-            <a:off x="0" y="0"/>
-            <a:ext cx="12188952" cy="6858000"/>
-          </a:xfrm>
-          <a:prstGeom prst="rect">
-            <a:avLst/>
-          </a:prstGeom>
-        </p:spPr>
-      </p:pic>
+      <p:sp>
+        <p:nvSpPr>
+          <p:cNvPr id="2" name="Text 0"/>
+          <p:cNvSpPr/>
+          <p:nvPr/>
+        </p:nvSpPr>
+        <p:spPr>
+          <a:xfrm>
+            <a:off x="3896086" y="703659"/>
+            <a:ext cx="4396581" cy="279400"/>
+          </a:xfrm>
+          <a:prstGeom prst="rect">
+            <a:avLst/>
+          </a:prstGeom>
+          <a:noFill/>
+          <a:ln/>
+        </p:spPr>
+        <p:txBody>
+          <a:bodyPr wrap="square" lIns="0" tIns="0" rIns="0" bIns="0" rtlCol="0" anchor="t"/>
+          <a:lstStyle/>
+          <a:p>
+            <a:pPr algn="ctr" indent="0" marL="0">
+              <a:lnSpc>
+                <a:spcPts val="2200"/>
+              </a:lnSpc>
+              <a:buNone/>
+            </a:pPr>
+            <a:r>
+              <a:rPr lang="en-US" sz="1466" b="1" dirty="0">
+                <a:solidFill>
+                  <a:srgbClr val="6B5D46"/>
+                </a:solidFill>
+                <a:latin typeface="EBGaramond" pitchFamily="34" charset="0"/>
+                <a:ea typeface="EBGaramond" pitchFamily="34" charset="-122"/>
+                <a:cs typeface="EBGaramond" pitchFamily="34" charset="-120"/>
+              </a:rPr>
+              <a:t>RESTORE DRILL · A POSITION PAPER</a:t>
+            </a:r>
+            <a:endParaRPr lang="en-US" sz="1466" dirty="0"/>
+          </a:p>
+        </p:txBody>
+      </p:sp>
+      <p:sp>
+        <p:nvSpPr>
+          <p:cNvPr id="3" name="Text 1"/>
+          <p:cNvSpPr/>
+          <p:nvPr/>
+        </p:nvSpPr>
+        <p:spPr>
+          <a:xfrm>
+            <a:off x="5806615" y="1186259"/>
+            <a:ext cx="575523" cy="12700"/>
+          </a:xfrm>
+          <a:prstGeom prst="rect">
+            <a:avLst/>
+          </a:prstGeom>
+          <a:solidFill>
+            <a:srgbClr val="A8893E"/>
+          </a:solidFill>
+          <a:ln/>
+        </p:spPr>
+        <p:txBody>
+          <a:bodyPr wrap="square" rtlCol="0" anchor="ctr"/>
+          <a:lstStyle/>
+          <a:p>
+            <a:pPr indent="0" marL="0">
+              <a:buNone/>
+            </a:pPr>
+            <a:endParaRPr lang="en-US" dirty="0"/>
+          </a:p>
+        </p:txBody>
+      </p:sp>
+      <p:sp>
+        <p:nvSpPr>
+          <p:cNvPr id="4" name="Text 2"/>
+          <p:cNvSpPr/>
+          <p:nvPr/>
+        </p:nvSpPr>
+        <p:spPr>
+          <a:xfrm>
+            <a:off x="1848245" y="1571427"/>
+            <a:ext cx="8492462" cy="1937147"/>
+          </a:xfrm>
+          <a:prstGeom prst="rect">
+            <a:avLst/>
+          </a:prstGeom>
+          <a:noFill/>
+          <a:ln/>
+        </p:spPr>
+        <p:txBody>
+          <a:bodyPr wrap="square" lIns="0" tIns="0" rIns="0" bIns="0" rtlCol="0" anchor="t"/>
+          <a:lstStyle/>
+          <a:p>
+            <a:pPr algn="ctr" indent="0" marL="0">
+              <a:lnSpc>
+                <a:spcPts val="7626"/>
+              </a:lnSpc>
+              <a:buNone/>
+            </a:pPr>
+            <a:r>
+              <a:rPr lang="en-US" sz="5866" dirty="0">
+                <a:solidFill>
+                  <a:srgbClr val="3A2E1F"/>
+                </a:solidFill>
+                <a:latin typeface="PlayfairDisplay" pitchFamily="34" charset="0"/>
+                <a:ea typeface="PlayfairDisplay" pitchFamily="34" charset="-122"/>
+                <a:cs typeface="PlayfairDisplay" pitchFamily="34" charset="-120"/>
+              </a:rPr>
+              <a:t>A backup you have never</a:t>
+            </a:r>
+            <a:endParaRPr lang="en-US" sz="5866" dirty="0"/>
+          </a:p>
+          <a:p>
+            <a:pPr algn="ctr" indent="0" marL="0">
+              <a:lnSpc>
+                <a:spcPts val="7626"/>
+              </a:lnSpc>
+              <a:buNone/>
+            </a:pPr>
+            <a:r>
+              <a:rPr lang="en-US" sz="5866" dirty="0">
+                <a:solidFill>
+                  <a:srgbClr val="3A2E1F"/>
+                </a:solidFill>
+                <a:latin typeface="PlayfairDisplay" pitchFamily="34" charset="0"/>
+                <a:ea typeface="PlayfairDisplay" pitchFamily="34" charset="-122"/>
+                <a:cs typeface="PlayfairDisplay" pitchFamily="34" charset="-120"/>
+              </a:rPr>
+              <a:t>restored is not a backup.</a:t>
+            </a:r>
+            <a:endParaRPr lang="en-US" sz="5866" dirty="0"/>
+          </a:p>
+        </p:txBody>
+      </p:sp>
+      <p:sp>
+        <p:nvSpPr>
+          <p:cNvPr id="5" name="Text 3"/>
+          <p:cNvSpPr/>
+          <p:nvPr/>
+        </p:nvSpPr>
+        <p:spPr>
+          <a:xfrm>
+            <a:off x="4401632" y="3881041"/>
+            <a:ext cx="3385688" cy="12700"/>
+          </a:xfrm>
+          <a:prstGeom prst="rect">
+            <a:avLst/>
+          </a:prstGeom>
+          <a:solidFill>
+            <a:srgbClr val="A8893E"/>
+          </a:solidFill>
+          <a:ln/>
+        </p:spPr>
+        <p:txBody>
+          <a:bodyPr wrap="square" rtlCol="0" anchor="ctr"/>
+          <a:lstStyle/>
+          <a:p>
+            <a:pPr indent="0" marL="0">
+              <a:buNone/>
+            </a:pPr>
+            <a:endParaRPr lang="en-US" dirty="0"/>
+          </a:p>
+        </p:txBody>
+      </p:sp>
+      <p:sp>
+        <p:nvSpPr>
+          <p:cNvPr id="6" name="Text 4"/>
+          <p:cNvSpPr/>
+          <p:nvPr/>
+        </p:nvSpPr>
+        <p:spPr>
+          <a:xfrm>
+            <a:off x="2122844" y="4198541"/>
+            <a:ext cx="7943066" cy="812800"/>
+          </a:xfrm>
+          <a:prstGeom prst="rect">
+            <a:avLst/>
+          </a:prstGeom>
+          <a:noFill/>
+          <a:ln/>
+        </p:spPr>
+        <p:txBody>
+          <a:bodyPr wrap="square" lIns="0" tIns="0" rIns="0" bIns="0" rtlCol="0" anchor="t"/>
+          <a:lstStyle/>
+          <a:p>
+            <a:pPr algn="ctr" indent="0" marL="0">
+              <a:lnSpc>
+                <a:spcPts val="3200"/>
+              </a:lnSpc>
+              <a:buNone/>
+            </a:pPr>
+            <a:r>
+              <a:rPr lang="en-US" sz="2000" i="1" dirty="0">
+                <a:solidFill>
+                  <a:srgbClr val="3A2E1F"/>
+                </a:solidFill>
+                <a:latin typeface="EBGaramond" pitchFamily="34" charset="0"/>
+                <a:ea typeface="EBGaramond" pitchFamily="34" charset="-122"/>
+                <a:cs typeface="EBGaramond" pitchFamily="34" charset="-120"/>
+              </a:rPr>
+              <a:t>RPO and RTO written into a document are a claim. A restore drill is the only evidence — and the gap between them is where recovery plans die.</a:t>
+            </a:r>
+            <a:endParaRPr lang="en-US" sz="2000" dirty="0"/>
+          </a:p>
+        </p:txBody>
+      </p:sp>
+      <p:sp>
+        <p:nvSpPr>
+          <p:cNvPr id="7" name="Text 5"/>
+          <p:cNvSpPr/>
+          <p:nvPr/>
+        </p:nvSpPr>
+        <p:spPr>
+          <a:xfrm>
+            <a:off x="4953190" y="5417741"/>
+            <a:ext cx="2282572" cy="279400"/>
+          </a:xfrm>
+          <a:prstGeom prst="rect">
+            <a:avLst/>
+          </a:prstGeom>
+          <a:noFill/>
+          <a:ln/>
+        </p:spPr>
+        <p:txBody>
+          <a:bodyPr wrap="square" lIns="0" tIns="0" rIns="0" bIns="0" rtlCol="0" anchor="t"/>
+          <a:lstStyle/>
+          <a:p>
+            <a:pPr algn="ctr" indent="0" marL="0">
+              <a:lnSpc>
+                <a:spcPts val="2200"/>
+              </a:lnSpc>
+              <a:spcBef>
+                <a:spcPts val="3200"/>
+              </a:spcBef>
+              <a:buNone/>
+            </a:pPr>
+            <a:r>
+              <a:rPr lang="en-US" sz="1466" b="1" dirty="0">
+                <a:solidFill>
+                  <a:srgbClr val="6B5D46"/>
+                </a:solidFill>
+                <a:latin typeface="EBGaramond" pitchFamily="34" charset="0"/>
+                <a:ea typeface="EBGaramond" pitchFamily="34" charset="-122"/>
+                <a:cs typeface="EBGaramond" pitchFamily="34" charset="-120"/>
+              </a:rPr>
+              <a:t>PRESENTER · TEAM</a:t>
+            </a:r>
+            <a:endParaRPr lang="en-US" sz="1466" dirty="0"/>
+          </a:p>
+        </p:txBody>
+      </p:sp>
+      <p:sp>
+        <p:nvSpPr>
+          <p:cNvPr id="8" name="Text 6"/>
+          <p:cNvSpPr/>
+          <p:nvPr/>
+        </p:nvSpPr>
+        <p:spPr>
+          <a:xfrm>
+            <a:off x="847672" y="6096198"/>
+            <a:ext cx="10291808" cy="253802"/>
+          </a:xfrm>
+          <a:prstGeom prst="rect">
+            <a:avLst/>
+          </a:prstGeom>
+          <a:noFill/>
+          <a:ln/>
+        </p:spPr>
+        <p:txBody>
+          <a:bodyPr wrap="square" lIns="0" tIns="0" rIns="0" bIns="0" rtlCol="0" anchor="t"/>
+          <a:lstStyle/>
+          <a:p>
+            <a:pPr algn="r" indent="0" marL="0">
+              <a:lnSpc>
+                <a:spcPts val="2000"/>
+              </a:lnSpc>
+              <a:buNone/>
+            </a:pPr>
+            <a:r>
+              <a:rPr lang="en-US" sz="1333" i="1" dirty="0">
+                <a:solidFill>
+                  <a:srgbClr val="6B5D46"/>
+                </a:solidFill>
+                <a:latin typeface="EBGaramond" pitchFamily="34" charset="0"/>
+                <a:ea typeface="EBGaramond" pitchFamily="34" charset="-122"/>
+                <a:cs typeface="EBGaramond" pitchFamily="34" charset="-120"/>
+              </a:rPr>
+              <a:t>No RPO or RTO figures are asserted in this deck — those numbers are yours to set and to measure.</a:t>
+            </a:r>
+            <a:endParaRPr lang="en-US" sz="1333" dirty="0"/>
+          </a:p>
+        </p:txBody>
+      </p:sp>
     </p:spTree>
   </p:cSld>
   <p:clrMapOvr>
@@ -1259,6 +1535,13 @@
 <file path=ppt/slides/slide2.xml><?xml version="1.0" encoding="utf-8"?>
 <p:sld xmlns:a="http://schemas.openxmlformats.org/drawingml/2006/main" xmlns:r="http://schemas.openxmlformats.org/officeDocument/2006/relationships" xmlns:p="http://schemas.openxmlformats.org/presentationml/2006/main">
   <p:cSld name="Slide 2">
+    <p:bg>
+      <p:bgPr>
+        <a:solidFill>
+          <a:srgbClr val="EDE6D6"/>
+        </a:solidFill>
+      </p:bgPr>
+    </p:bg>
     <p:spTree>
       <p:nvGrpSpPr>
         <p:cNvPr id="1" name=""/>
@@ -1273,30 +1556,948 @@
           <a:chExt cx="0" cy="0"/>
         </a:xfrm>
       </p:grpSpPr>
-      <p:pic>
-        <p:nvPicPr>
-          <p:cNvPr id="2" name="Image 0" descr="/tmp/slide-1787840604796-m7ibzezu.png">    </p:cNvPr>
-          <p:cNvPicPr>
-            <a:picLocks noChangeAspect="1"/>
-          </p:cNvPicPr>
-          <p:nvPr/>
-        </p:nvPicPr>
-        <p:blipFill>
-          <a:blip r:embed="rId1"/>
-          <a:stretch>
-            <a:fillRect/>
-          </a:stretch>
-        </p:blipFill>
-        <p:spPr>
-          <a:xfrm>
-            <a:off x="0" y="0"/>
-            <a:ext cx="12188952" cy="6858000"/>
-          </a:xfrm>
-          <a:prstGeom prst="rect">
-            <a:avLst/>
-          </a:prstGeom>
-        </p:spPr>
-      </p:pic>
+      <p:sp>
+        <p:nvSpPr>
+          <p:cNvPr id="2" name="Text 0"/>
+          <p:cNvSpPr/>
+          <p:nvPr/>
+        </p:nvSpPr>
+        <p:spPr>
+          <a:xfrm>
+            <a:off x="948572" y="541734"/>
+            <a:ext cx="10291808" cy="279400"/>
+          </a:xfrm>
+          <a:prstGeom prst="rect">
+            <a:avLst/>
+          </a:prstGeom>
+          <a:noFill/>
+          <a:ln/>
+        </p:spPr>
+        <p:txBody>
+          <a:bodyPr wrap="square" lIns="0" tIns="0" rIns="0" bIns="0" rtlCol="0" anchor="t"/>
+          <a:lstStyle/>
+          <a:p>
+            <a:pPr algn="ctr" indent="0" marL="0">
+              <a:lnSpc>
+                <a:spcPts val="2200"/>
+              </a:lnSpc>
+              <a:buNone/>
+            </a:pPr>
+            <a:r>
+              <a:rPr lang="en-US" sz="1466" b="1" dirty="0">
+                <a:solidFill>
+                  <a:srgbClr val="6B5D46"/>
+                </a:solidFill>
+                <a:latin typeface="EBGaramond" pitchFamily="34" charset="0"/>
+                <a:ea typeface="EBGaramond" pitchFamily="34" charset="-122"/>
+                <a:cs typeface="EBGaramond" pitchFamily="34" charset="-120"/>
+              </a:rPr>
+              <a:t>THE SILENT FAILURES</a:t>
+            </a:r>
+            <a:endParaRPr lang="en-US" sz="1466" dirty="0"/>
+          </a:p>
+        </p:txBody>
+      </p:sp>
+      <p:sp>
+        <p:nvSpPr>
+          <p:cNvPr id="3" name="Text 1"/>
+          <p:cNvSpPr/>
+          <p:nvPr/>
+        </p:nvSpPr>
+        <p:spPr>
+          <a:xfrm>
+            <a:off x="948572" y="956469"/>
+            <a:ext cx="10291808" cy="594320"/>
+          </a:xfrm>
+          <a:prstGeom prst="rect">
+            <a:avLst/>
+          </a:prstGeom>
+          <a:noFill/>
+          <a:ln/>
+        </p:spPr>
+        <p:txBody>
+          <a:bodyPr wrap="square" lIns="0" tIns="0" rIns="0" bIns="0" rtlCol="0" anchor="t"/>
+          <a:lstStyle/>
+          <a:p>
+            <a:pPr algn="ctr" indent="0" marL="0">
+              <a:lnSpc>
+                <a:spcPts val="4679"/>
+              </a:lnSpc>
+              <a:spcBef>
+                <a:spcPts val="1067"/>
+              </a:spcBef>
+              <a:buNone/>
+            </a:pPr>
+            <a:r>
+              <a:rPr lang="en-US" sz="3466" dirty="0">
+                <a:solidFill>
+                  <a:srgbClr val="3A2E1F"/>
+                </a:solidFill>
+                <a:latin typeface="PlayfairDisplay" pitchFamily="34" charset="0"/>
+                <a:ea typeface="PlayfairDisplay" pitchFamily="34" charset="-122"/>
+                <a:cs typeface="PlayfairDisplay" pitchFamily="34" charset="-120"/>
+              </a:rPr>
+              <a:t>What a backup fails at, silently</a:t>
+            </a:r>
+            <a:endParaRPr lang="en-US" sz="3466" dirty="0"/>
+          </a:p>
+        </p:txBody>
+      </p:sp>
+      <p:sp>
+        <p:nvSpPr>
+          <p:cNvPr id="4" name="Text 2"/>
+          <p:cNvSpPr/>
+          <p:nvPr/>
+        </p:nvSpPr>
+        <p:spPr>
+          <a:xfrm>
+            <a:off x="5806615" y="1753989"/>
+            <a:ext cx="575523" cy="12700"/>
+          </a:xfrm>
+          <a:prstGeom prst="rect">
+            <a:avLst/>
+          </a:prstGeom>
+          <a:solidFill>
+            <a:srgbClr val="A8893E"/>
+          </a:solidFill>
+          <a:ln/>
+        </p:spPr>
+        <p:txBody>
+          <a:bodyPr wrap="square" rtlCol="0" anchor="ctr"/>
+          <a:lstStyle/>
+          <a:p>
+            <a:pPr indent="0" marL="0">
+              <a:buNone/>
+            </a:pPr>
+            <a:endParaRPr lang="en-US" dirty="0"/>
+          </a:p>
+        </p:txBody>
+      </p:sp>
+      <p:sp>
+        <p:nvSpPr>
+          <p:cNvPr id="5" name="Text 3"/>
+          <p:cNvSpPr/>
+          <p:nvPr/>
+        </p:nvSpPr>
+        <p:spPr>
+          <a:xfrm>
+            <a:off x="1049472" y="2105223"/>
+            <a:ext cx="10090008" cy="3081734"/>
+          </a:xfrm>
+          <a:prstGeom prst="rect">
+            <a:avLst/>
+          </a:prstGeom>
+          <a:noFill/>
+          <a:ln/>
+        </p:spPr>
+        <p:txBody>
+          <a:bodyPr wrap="square" lIns="0" tIns="0" rIns="0" bIns="0" rtlCol="0" anchor="t"/>
+          <a:lstStyle/>
+          <a:p>
+            <a:pPr algn="l" marL="342900" indent="-342900">
+              <a:buSzPct val="100000"/>
+              <a:buChar char="•"/>
+            </a:pPr>
+            <a:r>
+              <a:rPr lang="en-US" sz="1600" dirty="0">
+                <a:solidFill>
+                  <a:srgbClr val="3A2E1F"/>
+                </a:solidFill>
+                <a:latin typeface="EBGaramond" pitchFamily="34" charset="0"/>
+                <a:ea typeface="EBGaramond" pitchFamily="34" charset="-122"/>
+                <a:cs typeface="EBGaramond" pitchFamily="34" charset="-120"/>
+              </a:rPr>
+              <a:t>Media nobody has read back</a:t>
+            </a:r>
+            <a:pPr algn="l" indent="0" marL="0">
+              <a:buNone/>
+            </a:pPr>
+            <a:r>
+              <a:rPr lang="en-US" sz="1600" dirty="0">
+                <a:solidFill>
+                  <a:srgbClr val="3A2E1F"/>
+                </a:solidFill>
+                <a:latin typeface="EBGaramond" pitchFamily="34" charset="0"/>
+                <a:ea typeface="EBGaramond" pitchFamily="34" charset="-122"/>
+                <a:cs typeface="EBGaramond" pitchFamily="34" charset="-120"/>
+              </a:rPr>
+              <a:t> </a:t>
+            </a:r>
+            <a:pPr algn="l" indent="0" marL="0">
+              <a:buNone/>
+            </a:pPr>
+            <a:r>
+              <a:rPr lang="en-US" sz="1600" dirty="0">
+                <a:solidFill>
+                  <a:srgbClr val="3A2E1F"/>
+                </a:solidFill>
+                <a:latin typeface="EBGaramond" pitchFamily="34" charset="0"/>
+                <a:ea typeface="EBGaramond" pitchFamily="34" charset="-122"/>
+                <a:cs typeface="EBGaramond" pitchFamily="34" charset="-120"/>
+              </a:rPr>
+              <a:t>The job succeeded. The bytes never did.</a:t>
+            </a:r>
+            <a:endParaRPr lang="en-US" sz="1600" dirty="0"/>
+          </a:p>
+          <a:p>
+            <a:pPr algn="l" marL="342900" indent="-342900">
+              <a:buSzPct val="100000"/>
+              <a:buChar char="•"/>
+            </a:pPr>
+            <a:r>
+              <a:rPr lang="en-US" sz="1600" dirty="0">
+                <a:solidFill>
+                  <a:srgbClr val="3A2E1F"/>
+                </a:solidFill>
+                <a:latin typeface="EBGaramond" pitchFamily="34" charset="0"/>
+                <a:ea typeface="EBGaramond" pitchFamily="34" charset="-122"/>
+                <a:cs typeface="EBGaramond" pitchFamily="34" charset="-120"/>
+              </a:rPr>
+              <a:t>A schema left out of the dump</a:t>
+            </a:r>
+            <a:pPr algn="l" indent="0" marL="0">
+              <a:buNone/>
+            </a:pPr>
+            <a:r>
+              <a:rPr lang="en-US" sz="1600" dirty="0">
+                <a:solidFill>
+                  <a:srgbClr val="3A2E1F"/>
+                </a:solidFill>
+                <a:latin typeface="EBGaramond" pitchFamily="34" charset="0"/>
+                <a:ea typeface="EBGaramond" pitchFamily="34" charset="-122"/>
+                <a:cs typeface="EBGaramond" pitchFamily="34" charset="-120"/>
+              </a:rPr>
+              <a:t> </a:t>
+            </a:r>
+            <a:pPr algn="l" indent="0" marL="0">
+              <a:buNone/>
+            </a:pPr>
+            <a:r>
+              <a:rPr lang="en-US" sz="1600" dirty="0">
+                <a:solidFill>
+                  <a:srgbClr val="3A2E1F"/>
+                </a:solidFill>
+                <a:latin typeface="EBGaramond" pitchFamily="34" charset="0"/>
+                <a:ea typeface="EBGaramond" pitchFamily="34" charset="-122"/>
+                <a:cs typeface="EBGaramond" pitchFamily="34" charset="-120"/>
+              </a:rPr>
+              <a:t>Rows come back. The database does not.</a:t>
+            </a:r>
+            <a:endParaRPr lang="en-US" sz="1600" dirty="0"/>
+          </a:p>
+          <a:p>
+            <a:pPr algn="l" marL="342900" indent="-342900">
+              <a:buSzPct val="100000"/>
+              <a:buChar char="•"/>
+            </a:pPr>
+            <a:r>
+              <a:rPr lang="en-US" sz="1600" dirty="0">
+                <a:solidFill>
+                  <a:srgbClr val="3A2E1F"/>
+                </a:solidFill>
+                <a:latin typeface="EBGaramond" pitchFamily="34" charset="0"/>
+                <a:ea typeface="EBGaramond" pitchFamily="34" charset="-122"/>
+                <a:cs typeface="EBGaramond" pitchFamily="34" charset="-120"/>
+              </a:rPr>
+              <a:t>A dependency that is down too</a:t>
+            </a:r>
+            <a:pPr algn="l" indent="0" marL="0">
+              <a:buNone/>
+            </a:pPr>
+            <a:r>
+              <a:rPr lang="en-US" sz="1600" dirty="0">
+                <a:solidFill>
+                  <a:srgbClr val="3A2E1F"/>
+                </a:solidFill>
+                <a:latin typeface="EBGaramond" pitchFamily="34" charset="0"/>
+                <a:ea typeface="EBGaramond" pitchFamily="34" charset="-122"/>
+                <a:cs typeface="EBGaramond" pitchFamily="34" charset="-120"/>
+              </a:rPr>
+              <a:t> </a:t>
+            </a:r>
+            <a:pPr algn="l" indent="0" marL="0">
+              <a:buNone/>
+            </a:pPr>
+            <a:r>
+              <a:rPr lang="en-US" sz="1600" dirty="0">
+                <a:solidFill>
+                  <a:srgbClr val="3A2E1F"/>
+                </a:solidFill>
+                <a:latin typeface="EBGaramond" pitchFamily="34" charset="0"/>
+                <a:ea typeface="EBGaramond" pitchFamily="34" charset="-122"/>
+                <a:cs typeface="EBGaramond" pitchFamily="34" charset="-120"/>
+              </a:rPr>
+              <a:t>The restore needs what the outage took.</a:t>
+            </a:r>
+            <a:endParaRPr lang="en-US" sz="1600" dirty="0"/>
+          </a:p>
+          <a:p>
+            <a:pPr algn="l" marL="342900" indent="-342900">
+              <a:buSzPct val="100000"/>
+              <a:buChar char="•"/>
+            </a:pPr>
+            <a:r>
+              <a:rPr lang="en-US" sz="1600" dirty="0">
+                <a:solidFill>
+                  <a:srgbClr val="3A2E1F"/>
+                </a:solidFill>
+                <a:latin typeface="EBGaramond" pitchFamily="34" charset="0"/>
+                <a:ea typeface="EBGaramond" pitchFamily="34" charset="-122"/>
+                <a:cs typeface="EBGaramond" pitchFamily="34" charset="-120"/>
+              </a:rPr>
+              <a:t>Credentials nobody on shift has</a:t>
+            </a:r>
+            <a:pPr algn="l" indent="0" marL="0">
+              <a:buNone/>
+            </a:pPr>
+            <a:r>
+              <a:rPr lang="en-US" sz="1600" dirty="0">
+                <a:solidFill>
+                  <a:srgbClr val="3A2E1F"/>
+                </a:solidFill>
+                <a:latin typeface="EBGaramond" pitchFamily="34" charset="0"/>
+                <a:ea typeface="EBGaramond" pitchFamily="34" charset="-122"/>
+                <a:cs typeface="EBGaramond" pitchFamily="34" charset="-120"/>
+              </a:rPr>
+              <a:t> </a:t>
+            </a:r>
+            <a:pPr algn="l" indent="0" marL="0">
+              <a:buNone/>
+            </a:pPr>
+            <a:r>
+              <a:rPr lang="en-US" sz="1600" dirty="0">
+                <a:solidFill>
+                  <a:srgbClr val="3A2E1F"/>
+                </a:solidFill>
+                <a:latin typeface="EBGaramond" pitchFamily="34" charset="0"/>
+                <a:ea typeface="EBGaramond" pitchFamily="34" charset="-122"/>
+                <a:cs typeface="EBGaramond" pitchFamily="34" charset="-120"/>
+              </a:rPr>
+              <a:t>The path exists. Nobody can walk it.</a:t>
+            </a:r>
+            <a:endParaRPr lang="en-US" sz="1600" dirty="0"/>
+          </a:p>
+        </p:txBody>
+      </p:sp>
+      <p:sp>
+        <p:nvSpPr>
+          <p:cNvPr id="6" name="Shape 4"/>
+          <p:cNvSpPr/>
+          <p:nvPr/>
+        </p:nvSpPr>
+        <p:spPr>
+          <a:xfrm>
+            <a:off x="6088128" y="2105223"/>
+            <a:ext cx="0" cy="1540867"/>
+          </a:xfrm>
+          <a:prstGeom prst="line">
+            <a:avLst/>
+          </a:prstGeom>
+          <a:noFill/>
+          <a:ln w="12698">
+            <a:solidFill>
+              <a:srgbClr val="A8893E"/>
+            </a:solidFill>
+            <a:prstDash val="solid"/>
+          </a:ln>
+        </p:spPr>
+      </p:sp>
+      <p:sp>
+        <p:nvSpPr>
+          <p:cNvPr id="7" name="Shape 5"/>
+          <p:cNvSpPr/>
+          <p:nvPr/>
+        </p:nvSpPr>
+        <p:spPr>
+          <a:xfrm>
+            <a:off x="1049472" y="3639741"/>
+            <a:ext cx="5045004" cy="0"/>
+          </a:xfrm>
+          <a:prstGeom prst="line">
+            <a:avLst/>
+          </a:prstGeom>
+          <a:noFill/>
+          <a:ln w="12698">
+            <a:solidFill>
+              <a:srgbClr val="A8893E"/>
+            </a:solidFill>
+            <a:prstDash val="solid"/>
+          </a:ln>
+        </p:spPr>
+      </p:sp>
+      <p:sp>
+        <p:nvSpPr>
+          <p:cNvPr id="8" name="Text 6"/>
+          <p:cNvSpPr/>
+          <p:nvPr/>
+        </p:nvSpPr>
+        <p:spPr>
+          <a:xfrm>
+            <a:off x="1792788" y="2435027"/>
+            <a:ext cx="3545676" cy="365522"/>
+          </a:xfrm>
+          <a:prstGeom prst="rect">
+            <a:avLst/>
+          </a:prstGeom>
+          <a:noFill/>
+          <a:ln/>
+        </p:spPr>
+        <p:txBody>
+          <a:bodyPr wrap="square" lIns="0" tIns="0" rIns="0" bIns="0" rtlCol="0" anchor="t"/>
+          <a:lstStyle/>
+          <a:p>
+            <a:pPr algn="ctr" indent="0" marL="0">
+              <a:lnSpc>
+                <a:spcPts val="2880"/>
+              </a:lnSpc>
+              <a:buNone/>
+            </a:pPr>
+            <a:r>
+              <a:rPr lang="en-US" sz="2133" dirty="0">
+                <a:solidFill>
+                  <a:srgbClr val="3A2E1F"/>
+                </a:solidFill>
+                <a:latin typeface="PlayfairDisplay" pitchFamily="34" charset="0"/>
+                <a:ea typeface="PlayfairDisplay" pitchFamily="34" charset="-122"/>
+                <a:cs typeface="PlayfairDisplay" pitchFamily="34" charset="-120"/>
+              </a:rPr>
+              <a:t>Media nobody has read back</a:t>
+            </a:r>
+            <a:endParaRPr lang="en-US" sz="2133" dirty="0"/>
+          </a:p>
+        </p:txBody>
+      </p:sp>
+      <p:sp>
+        <p:nvSpPr>
+          <p:cNvPr id="9" name="Text 7"/>
+          <p:cNvSpPr/>
+          <p:nvPr/>
+        </p:nvSpPr>
+        <p:spPr>
+          <a:xfrm>
+            <a:off x="1726617" y="2935883"/>
+            <a:ext cx="3678016" cy="367506"/>
+          </a:xfrm>
+          <a:prstGeom prst="rect">
+            <a:avLst/>
+          </a:prstGeom>
+          <a:noFill/>
+          <a:ln/>
+        </p:spPr>
+        <p:txBody>
+          <a:bodyPr wrap="square" lIns="0" tIns="0" rIns="0" bIns="0" rtlCol="0" anchor="t"/>
+          <a:lstStyle/>
+          <a:p>
+            <a:pPr algn="ctr" indent="0" marL="0">
+              <a:lnSpc>
+                <a:spcPts val="2893"/>
+              </a:lnSpc>
+              <a:spcBef>
+                <a:spcPts val="1067"/>
+              </a:spcBef>
+              <a:buNone/>
+            </a:pPr>
+            <a:r>
+              <a:rPr lang="en-US" sz="1866" dirty="0">
+                <a:solidFill>
+                  <a:srgbClr val="3A2E1F"/>
+                </a:solidFill>
+                <a:latin typeface="EBGaramond" pitchFamily="34" charset="0"/>
+                <a:ea typeface="EBGaramond" pitchFamily="34" charset="-122"/>
+                <a:cs typeface="EBGaramond" pitchFamily="34" charset="-120"/>
+              </a:rPr>
+              <a:t>The job succeeded. The bytes never did.</a:t>
+            </a:r>
+            <a:endParaRPr lang="en-US" sz="1866" dirty="0"/>
+          </a:p>
+        </p:txBody>
+      </p:sp>
+      <p:sp>
+        <p:nvSpPr>
+          <p:cNvPr id="10" name="Shape 8"/>
+          <p:cNvSpPr/>
+          <p:nvPr/>
+        </p:nvSpPr>
+        <p:spPr>
+          <a:xfrm>
+            <a:off x="11133132" y="2105223"/>
+            <a:ext cx="0" cy="1540867"/>
+          </a:xfrm>
+          <a:prstGeom prst="line">
+            <a:avLst/>
+          </a:prstGeom>
+          <a:noFill/>
+          <a:ln w="12698">
+            <a:solidFill>
+              <a:srgbClr val="FFFFFF"/>
+            </a:solidFill>
+            <a:prstDash val="solid"/>
+          </a:ln>
+        </p:spPr>
+      </p:sp>
+      <p:sp>
+        <p:nvSpPr>
+          <p:cNvPr id="11" name="Shape 9"/>
+          <p:cNvSpPr/>
+          <p:nvPr/>
+        </p:nvSpPr>
+        <p:spPr>
+          <a:xfrm>
+            <a:off x="6094476" y="3639741"/>
+            <a:ext cx="5045004" cy="0"/>
+          </a:xfrm>
+          <a:prstGeom prst="line">
+            <a:avLst/>
+          </a:prstGeom>
+          <a:noFill/>
+          <a:ln w="12698">
+            <a:solidFill>
+              <a:srgbClr val="A8893E"/>
+            </a:solidFill>
+            <a:prstDash val="solid"/>
+          </a:ln>
+        </p:spPr>
+      </p:sp>
+      <p:sp>
+        <p:nvSpPr>
+          <p:cNvPr id="12" name="Text 10"/>
+          <p:cNvSpPr/>
+          <p:nvPr/>
+        </p:nvSpPr>
+        <p:spPr>
+          <a:xfrm>
+            <a:off x="6738638" y="2435027"/>
+            <a:ext cx="3743984" cy="365522"/>
+          </a:xfrm>
+          <a:prstGeom prst="rect">
+            <a:avLst/>
+          </a:prstGeom>
+          <a:noFill/>
+          <a:ln/>
+        </p:spPr>
+        <p:txBody>
+          <a:bodyPr wrap="square" lIns="0" tIns="0" rIns="0" bIns="0" rtlCol="0" anchor="t"/>
+          <a:lstStyle/>
+          <a:p>
+            <a:pPr algn="ctr" indent="0" marL="0">
+              <a:lnSpc>
+                <a:spcPts val="2880"/>
+              </a:lnSpc>
+              <a:buNone/>
+            </a:pPr>
+            <a:r>
+              <a:rPr lang="en-US" sz="2133" dirty="0">
+                <a:solidFill>
+                  <a:srgbClr val="3A2E1F"/>
+                </a:solidFill>
+                <a:latin typeface="PlayfairDisplay" pitchFamily="34" charset="0"/>
+                <a:ea typeface="PlayfairDisplay" pitchFamily="34" charset="-122"/>
+                <a:cs typeface="PlayfairDisplay" pitchFamily="34" charset="-120"/>
+              </a:rPr>
+              <a:t>A schema left out of the dump</a:t>
+            </a:r>
+            <a:endParaRPr lang="en-US" sz="2133" dirty="0"/>
+          </a:p>
+        </p:txBody>
+      </p:sp>
+      <p:sp>
+        <p:nvSpPr>
+          <p:cNvPr id="13" name="Text 11"/>
+          <p:cNvSpPr/>
+          <p:nvPr/>
+        </p:nvSpPr>
+        <p:spPr>
+          <a:xfrm>
+            <a:off x="6726294" y="2935883"/>
+            <a:ext cx="3768672" cy="367506"/>
+          </a:xfrm>
+          <a:prstGeom prst="rect">
+            <a:avLst/>
+          </a:prstGeom>
+          <a:noFill/>
+          <a:ln/>
+        </p:spPr>
+        <p:txBody>
+          <a:bodyPr wrap="square" lIns="0" tIns="0" rIns="0" bIns="0" rtlCol="0" anchor="t"/>
+          <a:lstStyle/>
+          <a:p>
+            <a:pPr algn="ctr" indent="0" marL="0">
+              <a:lnSpc>
+                <a:spcPts val="2893"/>
+              </a:lnSpc>
+              <a:spcBef>
+                <a:spcPts val="1067"/>
+              </a:spcBef>
+              <a:buNone/>
+            </a:pPr>
+            <a:r>
+              <a:rPr lang="en-US" sz="1866" dirty="0">
+                <a:solidFill>
+                  <a:srgbClr val="3A2E1F"/>
+                </a:solidFill>
+                <a:latin typeface="EBGaramond" pitchFamily="34" charset="0"/>
+                <a:ea typeface="EBGaramond" pitchFamily="34" charset="-122"/>
+                <a:cs typeface="EBGaramond" pitchFamily="34" charset="-120"/>
+              </a:rPr>
+              <a:t>Rows come back. The database does not.</a:t>
+            </a:r>
+            <a:endParaRPr lang="en-US" sz="1866" dirty="0"/>
+          </a:p>
+        </p:txBody>
+      </p:sp>
+      <p:sp>
+        <p:nvSpPr>
+          <p:cNvPr id="14" name="Shape 12"/>
+          <p:cNvSpPr/>
+          <p:nvPr/>
+        </p:nvSpPr>
+        <p:spPr>
+          <a:xfrm>
+            <a:off x="6088128" y="3646091"/>
+            <a:ext cx="0" cy="1540867"/>
+          </a:xfrm>
+          <a:prstGeom prst="line">
+            <a:avLst/>
+          </a:prstGeom>
+          <a:noFill/>
+          <a:ln w="12698">
+            <a:solidFill>
+              <a:srgbClr val="A8893E"/>
+            </a:solidFill>
+            <a:prstDash val="solid"/>
+          </a:ln>
+        </p:spPr>
+      </p:sp>
+      <p:sp>
+        <p:nvSpPr>
+          <p:cNvPr id="15" name="Shape 13"/>
+          <p:cNvSpPr/>
+          <p:nvPr/>
+        </p:nvSpPr>
+        <p:spPr>
+          <a:xfrm>
+            <a:off x="1049472" y="5180608"/>
+            <a:ext cx="5045004" cy="0"/>
+          </a:xfrm>
+          <a:prstGeom prst="line">
+            <a:avLst/>
+          </a:prstGeom>
+          <a:noFill/>
+          <a:ln w="12698">
+            <a:solidFill>
+              <a:srgbClr val="FFFFFF"/>
+            </a:solidFill>
+            <a:prstDash val="solid"/>
+          </a:ln>
+        </p:spPr>
+      </p:sp>
+      <p:sp>
+        <p:nvSpPr>
+          <p:cNvPr id="16" name="Text 14"/>
+          <p:cNvSpPr/>
+          <p:nvPr/>
+        </p:nvSpPr>
+        <p:spPr>
+          <a:xfrm>
+            <a:off x="1641830" y="3975894"/>
+            <a:ext cx="3847590" cy="365522"/>
+          </a:xfrm>
+          <a:prstGeom prst="rect">
+            <a:avLst/>
+          </a:prstGeom>
+          <a:noFill/>
+          <a:ln/>
+        </p:spPr>
+        <p:txBody>
+          <a:bodyPr wrap="square" lIns="0" tIns="0" rIns="0" bIns="0" rtlCol="0" anchor="t"/>
+          <a:lstStyle/>
+          <a:p>
+            <a:pPr algn="ctr" indent="0" marL="0">
+              <a:lnSpc>
+                <a:spcPts val="2880"/>
+              </a:lnSpc>
+              <a:buNone/>
+            </a:pPr>
+            <a:r>
+              <a:rPr lang="en-US" sz="2133" dirty="0">
+                <a:solidFill>
+                  <a:srgbClr val="3A2E1F"/>
+                </a:solidFill>
+                <a:latin typeface="PlayfairDisplay" pitchFamily="34" charset="0"/>
+                <a:ea typeface="PlayfairDisplay" pitchFamily="34" charset="-122"/>
+                <a:cs typeface="PlayfairDisplay" pitchFamily="34" charset="-120"/>
+              </a:rPr>
+              <a:t>A dependency that is down too</a:t>
+            </a:r>
+            <a:endParaRPr lang="en-US" sz="2133" dirty="0"/>
+          </a:p>
+        </p:txBody>
+      </p:sp>
+      <p:sp>
+        <p:nvSpPr>
+          <p:cNvPr id="17" name="Text 15"/>
+          <p:cNvSpPr/>
+          <p:nvPr/>
+        </p:nvSpPr>
+        <p:spPr>
+          <a:xfrm>
+            <a:off x="1733093" y="4476750"/>
+            <a:ext cx="3665066" cy="367506"/>
+          </a:xfrm>
+          <a:prstGeom prst="rect">
+            <a:avLst/>
+          </a:prstGeom>
+          <a:noFill/>
+          <a:ln/>
+        </p:spPr>
+        <p:txBody>
+          <a:bodyPr wrap="square" lIns="0" tIns="0" rIns="0" bIns="0" rtlCol="0" anchor="t"/>
+          <a:lstStyle/>
+          <a:p>
+            <a:pPr algn="ctr" indent="0" marL="0">
+              <a:lnSpc>
+                <a:spcPts val="2893"/>
+              </a:lnSpc>
+              <a:spcBef>
+                <a:spcPts val="1067"/>
+              </a:spcBef>
+              <a:buNone/>
+            </a:pPr>
+            <a:r>
+              <a:rPr lang="en-US" sz="1866" dirty="0">
+                <a:solidFill>
+                  <a:srgbClr val="3A2E1F"/>
+                </a:solidFill>
+                <a:latin typeface="EBGaramond" pitchFamily="34" charset="0"/>
+                <a:ea typeface="EBGaramond" pitchFamily="34" charset="-122"/>
+                <a:cs typeface="EBGaramond" pitchFamily="34" charset="-120"/>
+              </a:rPr>
+              <a:t>The restore needs what the outage took.</a:t>
+            </a:r>
+            <a:endParaRPr lang="en-US" sz="1866" dirty="0"/>
+          </a:p>
+        </p:txBody>
+      </p:sp>
+      <p:sp>
+        <p:nvSpPr>
+          <p:cNvPr id="18" name="Shape 16"/>
+          <p:cNvSpPr/>
+          <p:nvPr/>
+        </p:nvSpPr>
+        <p:spPr>
+          <a:xfrm>
+            <a:off x="11133132" y="3646091"/>
+            <a:ext cx="0" cy="1540867"/>
+          </a:xfrm>
+          <a:prstGeom prst="line">
+            <a:avLst/>
+          </a:prstGeom>
+          <a:noFill/>
+          <a:ln w="12698">
+            <a:solidFill>
+              <a:srgbClr val="FFFFFF"/>
+            </a:solidFill>
+            <a:prstDash val="solid"/>
+          </a:ln>
+        </p:spPr>
+      </p:sp>
+      <p:sp>
+        <p:nvSpPr>
+          <p:cNvPr id="19" name="Shape 17"/>
+          <p:cNvSpPr/>
+          <p:nvPr/>
+        </p:nvSpPr>
+        <p:spPr>
+          <a:xfrm>
+            <a:off x="6094476" y="5180608"/>
+            <a:ext cx="5045004" cy="0"/>
+          </a:xfrm>
+          <a:prstGeom prst="line">
+            <a:avLst/>
+          </a:prstGeom>
+          <a:noFill/>
+          <a:ln w="12698">
+            <a:solidFill>
+              <a:srgbClr val="FFFFFF"/>
+            </a:solidFill>
+            <a:prstDash val="solid"/>
+          </a:ln>
+        </p:spPr>
+      </p:sp>
+      <p:sp>
+        <p:nvSpPr>
+          <p:cNvPr id="20" name="Text 18"/>
+          <p:cNvSpPr/>
+          <p:nvPr/>
+        </p:nvSpPr>
+        <p:spPr>
+          <a:xfrm>
+            <a:off x="6614189" y="3975894"/>
+            <a:ext cx="3992882" cy="365522"/>
+          </a:xfrm>
+          <a:prstGeom prst="rect">
+            <a:avLst/>
+          </a:prstGeom>
+          <a:noFill/>
+          <a:ln/>
+        </p:spPr>
+        <p:txBody>
+          <a:bodyPr wrap="square" lIns="0" tIns="0" rIns="0" bIns="0" rtlCol="0" anchor="t"/>
+          <a:lstStyle/>
+          <a:p>
+            <a:pPr algn="ctr" indent="0" marL="0">
+              <a:lnSpc>
+                <a:spcPts val="2880"/>
+              </a:lnSpc>
+              <a:buNone/>
+            </a:pPr>
+            <a:r>
+              <a:rPr lang="en-US" sz="2133" dirty="0">
+                <a:solidFill>
+                  <a:srgbClr val="3A2E1F"/>
+                </a:solidFill>
+                <a:latin typeface="PlayfairDisplay" pitchFamily="34" charset="0"/>
+                <a:ea typeface="PlayfairDisplay" pitchFamily="34" charset="-122"/>
+                <a:cs typeface="PlayfairDisplay" pitchFamily="34" charset="-120"/>
+              </a:rPr>
+              <a:t>Credentials nobody on shift has</a:t>
+            </a:r>
+            <a:endParaRPr lang="en-US" sz="2133" dirty="0"/>
+          </a:p>
+        </p:txBody>
+      </p:sp>
+      <p:sp>
+        <p:nvSpPr>
+          <p:cNvPr id="21" name="Text 19"/>
+          <p:cNvSpPr/>
+          <p:nvPr/>
+        </p:nvSpPr>
+        <p:spPr>
+          <a:xfrm>
+            <a:off x="6914080" y="4476750"/>
+            <a:ext cx="3393100" cy="367506"/>
+          </a:xfrm>
+          <a:prstGeom prst="rect">
+            <a:avLst/>
+          </a:prstGeom>
+          <a:noFill/>
+          <a:ln/>
+        </p:spPr>
+        <p:txBody>
+          <a:bodyPr wrap="square" lIns="0" tIns="0" rIns="0" bIns="0" rtlCol="0" anchor="t"/>
+          <a:lstStyle/>
+          <a:p>
+            <a:pPr algn="ctr" indent="0" marL="0">
+              <a:lnSpc>
+                <a:spcPts val="2893"/>
+              </a:lnSpc>
+              <a:spcBef>
+                <a:spcPts val="1067"/>
+              </a:spcBef>
+              <a:buNone/>
+            </a:pPr>
+            <a:r>
+              <a:rPr lang="en-US" sz="1866" dirty="0">
+                <a:solidFill>
+                  <a:srgbClr val="3A2E1F"/>
+                </a:solidFill>
+                <a:latin typeface="EBGaramond" pitchFamily="34" charset="0"/>
+                <a:ea typeface="EBGaramond" pitchFamily="34" charset="-122"/>
+                <a:cs typeface="EBGaramond" pitchFamily="34" charset="-120"/>
+              </a:rPr>
+              <a:t>The path exists. Nobody can walk it.</a:t>
+            </a:r>
+            <a:endParaRPr lang="en-US" sz="1866" dirty="0"/>
+          </a:p>
+        </p:txBody>
+      </p:sp>
+      <p:sp>
+        <p:nvSpPr>
+          <p:cNvPr id="22" name="Text 20"/>
+          <p:cNvSpPr/>
+          <p:nvPr/>
+        </p:nvSpPr>
+        <p:spPr>
+          <a:xfrm>
+            <a:off x="948572" y="5491758"/>
+            <a:ext cx="10291808" cy="367506"/>
+          </a:xfrm>
+          <a:prstGeom prst="rect">
+            <a:avLst/>
+          </a:prstGeom>
+          <a:noFill/>
+          <a:ln/>
+        </p:spPr>
+        <p:txBody>
+          <a:bodyPr wrap="square" lIns="0" tIns="0" rIns="0" bIns="0" rtlCol="0" anchor="t"/>
+          <a:lstStyle/>
+          <a:p>
+            <a:pPr algn="ctr" indent="0" marL="0">
+              <a:lnSpc>
+                <a:spcPts val="2893"/>
+              </a:lnSpc>
+              <a:spcBef>
+                <a:spcPts val="2400"/>
+              </a:spcBef>
+              <a:buNone/>
+            </a:pPr>
+            <a:r>
+              <a:rPr lang="en-US" sz="1866" i="1" dirty="0">
+                <a:solidFill>
+                  <a:srgbClr val="3A2E1F"/>
+                </a:solidFill>
+                <a:latin typeface="EBGaramond" pitchFamily="34" charset="0"/>
+                <a:ea typeface="EBGaramond" pitchFamily="34" charset="-122"/>
+                <a:cs typeface="EBGaramond" pitchFamily="34" charset="-120"/>
+              </a:rPr>
+              <a:t>None of these announce themselves. All of them wait.</a:t>
+            </a:r>
+            <a:endParaRPr lang="en-US" sz="1866" dirty="0"/>
+          </a:p>
+        </p:txBody>
+      </p:sp>
+      <p:sp>
+        <p:nvSpPr>
+          <p:cNvPr id="23" name="Text 21"/>
+          <p:cNvSpPr/>
+          <p:nvPr/>
+        </p:nvSpPr>
+        <p:spPr>
+          <a:xfrm>
+            <a:off x="847672" y="6096198"/>
+            <a:ext cx="10291808" cy="253802"/>
+          </a:xfrm>
+          <a:prstGeom prst="rect">
+            <a:avLst/>
+          </a:prstGeom>
+          <a:noFill/>
+          <a:ln/>
+        </p:spPr>
+        <p:txBody>
+          <a:bodyPr wrap="square" lIns="0" tIns="0" rIns="0" bIns="0" rtlCol="0" anchor="t"/>
+          <a:lstStyle/>
+          <a:p>
+            <a:pPr algn="r" indent="0" marL="0">
+              <a:lnSpc>
+                <a:spcPts val="2000"/>
+              </a:lnSpc>
+              <a:buNone/>
+            </a:pPr>
+            <a:r>
+              <a:rPr lang="en-US" sz="1333" i="1" dirty="0">
+                <a:solidFill>
+                  <a:srgbClr val="6B5D46"/>
+                </a:solidFill>
+                <a:latin typeface="EBGaramond" pitchFamily="34" charset="0"/>
+                <a:ea typeface="EBGaramond" pitchFamily="34" charset="-122"/>
+                <a:cs typeface="EBGaramond" pitchFamily="34" charset="-120"/>
+              </a:rPr>
+              <a:t>No RPO or RTO figures are asserted in this deck — those numbers are yours to set and to measure.</a:t>
+            </a:r>
+            <a:endParaRPr lang="en-US" sz="1333" dirty="0"/>
+          </a:p>
+        </p:txBody>
+      </p:sp>
     </p:spTree>
   </p:cSld>
   <p:clrMapOvr>
@@ -1308,6 +2509,13 @@
 <file path=ppt/slides/slide3.xml><?xml version="1.0" encoding="utf-8"?>
 <p:sld xmlns:a="http://schemas.openxmlformats.org/drawingml/2006/main" xmlns:r="http://schemas.openxmlformats.org/officeDocument/2006/relationships" xmlns:p="http://schemas.openxmlformats.org/presentationml/2006/main">
   <p:cSld name="Slide 3">
+    <p:bg>
+      <p:bgPr>
+        <a:solidFill>
+          <a:srgbClr val="EDE6D6"/>
+        </a:solidFill>
+      </p:bgPr>
+    </p:bg>
     <p:spTree>
       <p:nvGrpSpPr>
         <p:cNvPr id="1" name=""/>
@@ -1322,30 +2530,558 @@
           <a:chExt cx="0" cy="0"/>
         </a:xfrm>
       </p:grpSpPr>
-      <p:pic>
-        <p:nvPicPr>
-          <p:cNvPr id="2" name="Image 0" descr="/tmp/slide-1787840605075-5w8oazliu6i.png">    </p:cNvPr>
-          <p:cNvPicPr>
-            <a:picLocks noChangeAspect="1"/>
-          </p:cNvPicPr>
-          <p:nvPr/>
-        </p:nvPicPr>
-        <p:blipFill>
-          <a:blip r:embed="rId1"/>
-          <a:stretch>
-            <a:fillRect/>
-          </a:stretch>
-        </p:blipFill>
-        <p:spPr>
-          <a:xfrm>
-            <a:off x="0" y="0"/>
-            <a:ext cx="12188952" cy="6858000"/>
-          </a:xfrm>
-          <a:prstGeom prst="rect">
-            <a:avLst/>
-          </a:prstGeom>
-        </p:spPr>
-      </p:pic>
+      <p:sp>
+        <p:nvSpPr>
+          <p:cNvPr id="2" name="Text 0"/>
+          <p:cNvSpPr/>
+          <p:nvPr/>
+        </p:nvSpPr>
+        <p:spPr>
+          <a:xfrm>
+            <a:off x="948572" y="541734"/>
+            <a:ext cx="10291808" cy="279400"/>
+          </a:xfrm>
+          <a:prstGeom prst="rect">
+            <a:avLst/>
+          </a:prstGeom>
+          <a:noFill/>
+          <a:ln/>
+        </p:spPr>
+        <p:txBody>
+          <a:bodyPr wrap="square" lIns="0" tIns="0" rIns="0" bIns="0" rtlCol="0" anchor="t"/>
+          <a:lstStyle/>
+          <a:p>
+            <a:pPr algn="ctr" indent="0" marL="0">
+              <a:lnSpc>
+                <a:spcPts val="2200"/>
+              </a:lnSpc>
+              <a:buNone/>
+            </a:pPr>
+            <a:r>
+              <a:rPr lang="en-US" sz="1466" b="1" dirty="0">
+                <a:solidFill>
+                  <a:srgbClr val="6B5D46"/>
+                </a:solidFill>
+                <a:latin typeface="EBGaramond" pitchFamily="34" charset="0"/>
+                <a:ea typeface="EBGaramond" pitchFamily="34" charset="-122"/>
+                <a:cs typeface="EBGaramond" pitchFamily="34" charset="-120"/>
+              </a:rPr>
+              <a:t>THE SHAPE OF THE DATA</a:t>
+            </a:r>
+            <a:endParaRPr lang="en-US" sz="1466" dirty="0"/>
+          </a:p>
+        </p:txBody>
+      </p:sp>
+      <p:sp>
+        <p:nvSpPr>
+          <p:cNvPr id="3" name="Text 1"/>
+          <p:cNvSpPr/>
+          <p:nvPr/>
+        </p:nvSpPr>
+        <p:spPr>
+          <a:xfrm>
+            <a:off x="948572" y="956469"/>
+            <a:ext cx="10291808" cy="594320"/>
+          </a:xfrm>
+          <a:prstGeom prst="rect">
+            <a:avLst/>
+          </a:prstGeom>
+          <a:noFill/>
+          <a:ln/>
+        </p:spPr>
+        <p:txBody>
+          <a:bodyPr wrap="square" lIns="0" tIns="0" rIns="0" bIns="0" rtlCol="0" anchor="t"/>
+          <a:lstStyle/>
+          <a:p>
+            <a:pPr algn="ctr" indent="0" marL="0">
+              <a:lnSpc>
+                <a:spcPts val="4679"/>
+              </a:lnSpc>
+              <a:spcBef>
+                <a:spcPts val="1067"/>
+              </a:spcBef>
+              <a:buNone/>
+            </a:pPr>
+            <a:r>
+              <a:rPr lang="en-US" sz="3466" dirty="0">
+                <a:solidFill>
+                  <a:srgbClr val="3A2E1F"/>
+                </a:solidFill>
+                <a:latin typeface="PlayfairDisplay" pitchFamily="34" charset="0"/>
+                <a:ea typeface="PlayfairDisplay" pitchFamily="34" charset="-122"/>
+                <a:cs typeface="PlayfairDisplay" pitchFamily="34" charset="-120"/>
+              </a:rPr>
+              <a:t>A drill proves nothing against a toy dataset</a:t>
+            </a:r>
+            <a:endParaRPr lang="en-US" sz="3466" dirty="0"/>
+          </a:p>
+        </p:txBody>
+      </p:sp>
+      <p:sp>
+        <p:nvSpPr>
+          <p:cNvPr id="4" name="Text 2"/>
+          <p:cNvSpPr/>
+          <p:nvPr/>
+        </p:nvSpPr>
+        <p:spPr>
+          <a:xfrm>
+            <a:off x="5806615" y="1753989"/>
+            <a:ext cx="575523" cy="12700"/>
+          </a:xfrm>
+          <a:prstGeom prst="rect">
+            <a:avLst/>
+          </a:prstGeom>
+          <a:solidFill>
+            <a:srgbClr val="A8893E"/>
+          </a:solidFill>
+          <a:ln/>
+        </p:spPr>
+        <p:txBody>
+          <a:bodyPr wrap="square" rtlCol="0" anchor="ctr"/>
+          <a:lstStyle/>
+          <a:p>
+            <a:pPr indent="0" marL="0">
+              <a:buNone/>
+            </a:pPr>
+            <a:endParaRPr lang="en-US" dirty="0"/>
+          </a:p>
+        </p:txBody>
+      </p:sp>
+      <p:sp>
+        <p:nvSpPr>
+          <p:cNvPr id="5" name="Text 3"/>
+          <p:cNvSpPr/>
+          <p:nvPr/>
+        </p:nvSpPr>
+        <p:spPr>
+          <a:xfrm>
+            <a:off x="1004164" y="2443361"/>
+            <a:ext cx="4621398" cy="279400"/>
+          </a:xfrm>
+          <a:prstGeom prst="rect">
+            <a:avLst/>
+          </a:prstGeom>
+          <a:noFill/>
+          <a:ln/>
+        </p:spPr>
+        <p:txBody>
+          <a:bodyPr wrap="square" lIns="0" tIns="0" rIns="0" bIns="0" rtlCol="0" anchor="t"/>
+          <a:lstStyle/>
+          <a:p>
+            <a:pPr algn="ctr" indent="0" marL="0">
+              <a:lnSpc>
+                <a:spcPts val="2200"/>
+              </a:lnSpc>
+              <a:buNone/>
+            </a:pPr>
+            <a:r>
+              <a:rPr lang="en-US" sz="1466" b="1" dirty="0">
+                <a:solidFill>
+                  <a:srgbClr val="6B5D46"/>
+                </a:solidFill>
+                <a:latin typeface="EBGaramond" pitchFamily="34" charset="0"/>
+                <a:ea typeface="EBGaramond" pitchFamily="34" charset="-122"/>
+                <a:cs typeface="EBGaramond" pitchFamily="34" charset="-120"/>
+              </a:rPr>
+              <a:t>A SAMPLE RESTORE</a:t>
+            </a:r>
+            <a:endParaRPr lang="en-US" sz="1466" dirty="0"/>
+          </a:p>
+        </p:txBody>
+      </p:sp>
+      <p:sp>
+        <p:nvSpPr>
+          <p:cNvPr id="6" name="Text 4"/>
+          <p:cNvSpPr/>
+          <p:nvPr/>
+        </p:nvSpPr>
+        <p:spPr>
+          <a:xfrm>
+            <a:off x="3027002" y="2892028"/>
+            <a:ext cx="575523" cy="12700"/>
+          </a:xfrm>
+          <a:prstGeom prst="rect">
+            <a:avLst/>
+          </a:prstGeom>
+          <a:solidFill>
+            <a:srgbClr val="A8893E"/>
+          </a:solidFill>
+          <a:ln/>
+        </p:spPr>
+        <p:txBody>
+          <a:bodyPr wrap="square" rtlCol="0" anchor="ctr"/>
+          <a:lstStyle/>
+          <a:p>
+            <a:pPr indent="0" marL="0">
+              <a:buNone/>
+            </a:pPr>
+            <a:endParaRPr lang="en-US" dirty="0"/>
+          </a:p>
+        </p:txBody>
+      </p:sp>
+      <p:sp>
+        <p:nvSpPr>
+          <p:cNvPr id="7" name="Text 5"/>
+          <p:cNvSpPr/>
+          <p:nvPr/>
+        </p:nvSpPr>
+        <p:spPr>
+          <a:xfrm>
+            <a:off x="1004164" y="3141662"/>
+            <a:ext cx="4621398" cy="367506"/>
+          </a:xfrm>
+          <a:prstGeom prst="rect">
+            <a:avLst/>
+          </a:prstGeom>
+          <a:noFill/>
+          <a:ln/>
+        </p:spPr>
+        <p:txBody>
+          <a:bodyPr wrap="square" lIns="0" tIns="0" rIns="0" bIns="0" rtlCol="0" anchor="t"/>
+          <a:lstStyle/>
+          <a:p>
+            <a:pPr algn="ctr" indent="0" marL="0">
+              <a:lnSpc>
+                <a:spcPts val="2893"/>
+              </a:lnSpc>
+              <a:buNone/>
+            </a:pPr>
+            <a:r>
+              <a:rPr lang="en-US" sz="1866" dirty="0">
+                <a:solidFill>
+                  <a:srgbClr val="3A2E1F"/>
+                </a:solidFill>
+                <a:latin typeface="EBGaramond" pitchFamily="34" charset="0"/>
+                <a:ea typeface="EBGaramond" pitchFamily="34" charset="-122"/>
+                <a:cs typeface="EBGaramond" pitchFamily="34" charset="-120"/>
+              </a:rPr>
+              <a:t>It proves the command exists.</a:t>
+            </a:r>
+            <a:endParaRPr lang="en-US" sz="1866" dirty="0"/>
+          </a:p>
+        </p:txBody>
+      </p:sp>
+      <p:sp>
+        <p:nvSpPr>
+          <p:cNvPr id="8" name="Text 6"/>
+          <p:cNvSpPr/>
+          <p:nvPr/>
+        </p:nvSpPr>
+        <p:spPr>
+          <a:xfrm>
+            <a:off x="1004164" y="3712369"/>
+            <a:ext cx="4621398" cy="367506"/>
+          </a:xfrm>
+          <a:prstGeom prst="rect">
+            <a:avLst/>
+          </a:prstGeom>
+          <a:noFill/>
+          <a:ln/>
+        </p:spPr>
+        <p:txBody>
+          <a:bodyPr wrap="square" lIns="0" tIns="0" rIns="0" bIns="0" rtlCol="0" anchor="t"/>
+          <a:lstStyle/>
+          <a:p>
+            <a:pPr algn="ctr" indent="0" marL="0">
+              <a:lnSpc>
+                <a:spcPts val="2893"/>
+              </a:lnSpc>
+              <a:spcBef>
+                <a:spcPts val="1600"/>
+              </a:spcBef>
+              <a:buNone/>
+            </a:pPr>
+            <a:r>
+              <a:rPr lang="en-US" sz="1866" dirty="0">
+                <a:solidFill>
+                  <a:srgbClr val="3A2E1F"/>
+                </a:solidFill>
+                <a:latin typeface="EBGaramond" pitchFamily="34" charset="0"/>
+                <a:ea typeface="EBGaramond" pitchFamily="34" charset="-122"/>
+                <a:cs typeface="EBGaramond" pitchFamily="34" charset="-120"/>
+              </a:rPr>
+              <a:t>It proves someone on the team can type it.</a:t>
+            </a:r>
+            <a:endParaRPr lang="en-US" sz="1866" dirty="0"/>
+          </a:p>
+        </p:txBody>
+      </p:sp>
+      <p:sp>
+        <p:nvSpPr>
+          <p:cNvPr id="9" name="Text 7"/>
+          <p:cNvSpPr/>
+          <p:nvPr/>
+        </p:nvSpPr>
+        <p:spPr>
+          <a:xfrm>
+            <a:off x="6088128" y="2443361"/>
+            <a:ext cx="12697" cy="2371527"/>
+          </a:xfrm>
+          <a:prstGeom prst="rect">
+            <a:avLst/>
+          </a:prstGeom>
+          <a:solidFill>
+            <a:srgbClr val="A8893E"/>
+          </a:solidFill>
+          <a:ln/>
+        </p:spPr>
+        <p:txBody>
+          <a:bodyPr wrap="square" rtlCol="0" anchor="ctr"/>
+          <a:lstStyle/>
+          <a:p>
+            <a:pPr indent="0" marL="0">
+              <a:buNone/>
+            </a:pPr>
+            <a:endParaRPr lang="en-US" dirty="0"/>
+          </a:p>
+        </p:txBody>
+      </p:sp>
+      <p:sp>
+        <p:nvSpPr>
+          <p:cNvPr id="10" name="Text 8"/>
+          <p:cNvSpPr/>
+          <p:nvPr/>
+        </p:nvSpPr>
+        <p:spPr>
+          <a:xfrm>
+            <a:off x="6563390" y="2443361"/>
+            <a:ext cx="4621398" cy="279400"/>
+          </a:xfrm>
+          <a:prstGeom prst="rect">
+            <a:avLst/>
+          </a:prstGeom>
+          <a:noFill/>
+          <a:ln/>
+        </p:spPr>
+        <p:txBody>
+          <a:bodyPr wrap="square" lIns="0" tIns="0" rIns="0" bIns="0" rtlCol="0" anchor="t"/>
+          <a:lstStyle/>
+          <a:p>
+            <a:pPr algn="ctr" indent="0" marL="0">
+              <a:lnSpc>
+                <a:spcPts val="2200"/>
+              </a:lnSpc>
+              <a:buNone/>
+            </a:pPr>
+            <a:r>
+              <a:rPr lang="en-US" sz="1466" b="1" dirty="0">
+                <a:solidFill>
+                  <a:srgbClr val="6B5D46"/>
+                </a:solidFill>
+                <a:latin typeface="EBGaramond" pitchFamily="34" charset="0"/>
+                <a:ea typeface="EBGaramond" pitchFamily="34" charset="-122"/>
+                <a:cs typeface="EBGaramond" pitchFamily="34" charset="-120"/>
+              </a:rPr>
+              <a:t>A PRODUCTION-SHAPED RESTORE</a:t>
+            </a:r>
+            <a:endParaRPr lang="en-US" sz="1466" dirty="0"/>
+          </a:p>
+        </p:txBody>
+      </p:sp>
+      <p:sp>
+        <p:nvSpPr>
+          <p:cNvPr id="11" name="Text 9"/>
+          <p:cNvSpPr/>
+          <p:nvPr/>
+        </p:nvSpPr>
+        <p:spPr>
+          <a:xfrm>
+            <a:off x="8586228" y="2892028"/>
+            <a:ext cx="575523" cy="12700"/>
+          </a:xfrm>
+          <a:prstGeom prst="rect">
+            <a:avLst/>
+          </a:prstGeom>
+          <a:solidFill>
+            <a:srgbClr val="A8893E"/>
+          </a:solidFill>
+          <a:ln/>
+        </p:spPr>
+        <p:txBody>
+          <a:bodyPr wrap="square" rtlCol="0" anchor="ctr"/>
+          <a:lstStyle/>
+          <a:p>
+            <a:pPr indent="0" marL="0">
+              <a:buNone/>
+            </a:pPr>
+            <a:endParaRPr lang="en-US" dirty="0"/>
+          </a:p>
+        </p:txBody>
+      </p:sp>
+      <p:sp>
+        <p:nvSpPr>
+          <p:cNvPr id="12" name="Text 10"/>
+          <p:cNvSpPr/>
+          <p:nvPr/>
+        </p:nvSpPr>
+        <p:spPr>
+          <a:xfrm>
+            <a:off x="6563390" y="3141662"/>
+            <a:ext cx="4621398" cy="735013"/>
+          </a:xfrm>
+          <a:prstGeom prst="rect">
+            <a:avLst/>
+          </a:prstGeom>
+          <a:noFill/>
+          <a:ln/>
+        </p:spPr>
+        <p:txBody>
+          <a:bodyPr wrap="square" lIns="0" tIns="0" rIns="0" bIns="0" rtlCol="0" anchor="t"/>
+          <a:lstStyle/>
+          <a:p>
+            <a:pPr algn="ctr" indent="0" marL="0">
+              <a:lnSpc>
+                <a:spcPts val="2893"/>
+              </a:lnSpc>
+              <a:buNone/>
+            </a:pPr>
+            <a:r>
+              <a:rPr lang="en-US" sz="1866" dirty="0">
+                <a:solidFill>
+                  <a:srgbClr val="3A2E1F"/>
+                </a:solidFill>
+                <a:latin typeface="EBGaramond" pitchFamily="34" charset="0"/>
+                <a:ea typeface="EBGaramond" pitchFamily="34" charset="-122"/>
+                <a:cs typeface="EBGaramond" pitchFamily="34" charset="-120"/>
+              </a:rPr>
+              <a:t>It proves the volume moves in the time you promised.</a:t>
+            </a:r>
+            <a:endParaRPr lang="en-US" sz="1866" dirty="0"/>
+          </a:p>
+        </p:txBody>
+      </p:sp>
+      <p:sp>
+        <p:nvSpPr>
+          <p:cNvPr id="13" name="Text 11"/>
+          <p:cNvSpPr/>
+          <p:nvPr/>
+        </p:nvSpPr>
+        <p:spPr>
+          <a:xfrm>
+            <a:off x="6563390" y="4079875"/>
+            <a:ext cx="4621398" cy="735013"/>
+          </a:xfrm>
+          <a:prstGeom prst="rect">
+            <a:avLst/>
+          </a:prstGeom>
+          <a:noFill/>
+          <a:ln/>
+        </p:spPr>
+        <p:txBody>
+          <a:bodyPr wrap="square" lIns="0" tIns="0" rIns="0" bIns="0" rtlCol="0" anchor="t"/>
+          <a:lstStyle/>
+          <a:p>
+            <a:pPr algn="ctr" indent="0" marL="0">
+              <a:lnSpc>
+                <a:spcPts val="2893"/>
+              </a:lnSpc>
+              <a:spcBef>
+                <a:spcPts val="1600"/>
+              </a:spcBef>
+              <a:buNone/>
+            </a:pPr>
+            <a:r>
+              <a:rPr lang="en-US" sz="1866" dirty="0">
+                <a:solidFill>
+                  <a:srgbClr val="3A2E1F"/>
+                </a:solidFill>
+                <a:latin typeface="EBGaramond" pitchFamily="34" charset="0"/>
+                <a:ea typeface="EBGaramond" pitchFamily="34" charset="-122"/>
+                <a:cs typeface="EBGaramond" pitchFamily="34" charset="-120"/>
+              </a:rPr>
+              <a:t>It proves the schema, the permissions and the dependencies come back with it.</a:t>
+            </a:r>
+            <a:endParaRPr lang="en-US" sz="1866" dirty="0"/>
+          </a:p>
+        </p:txBody>
+      </p:sp>
+      <p:sp>
+        <p:nvSpPr>
+          <p:cNvPr id="14" name="Text 12"/>
+          <p:cNvSpPr/>
+          <p:nvPr/>
+        </p:nvSpPr>
+        <p:spPr>
+          <a:xfrm>
+            <a:off x="948572" y="5491758"/>
+            <a:ext cx="10291808" cy="367506"/>
+          </a:xfrm>
+          <a:prstGeom prst="rect">
+            <a:avLst/>
+          </a:prstGeom>
+          <a:noFill/>
+          <a:ln/>
+        </p:spPr>
+        <p:txBody>
+          <a:bodyPr wrap="square" lIns="0" tIns="0" rIns="0" bIns="0" rtlCol="0" anchor="t"/>
+          <a:lstStyle/>
+          <a:p>
+            <a:pPr algn="ctr" indent="0" marL="0">
+              <a:lnSpc>
+                <a:spcPts val="2893"/>
+              </a:lnSpc>
+              <a:spcBef>
+                <a:spcPts val="2400"/>
+              </a:spcBef>
+              <a:buNone/>
+            </a:pPr>
+            <a:r>
+              <a:rPr lang="en-US" sz="1866" i="1" dirty="0">
+                <a:solidFill>
+                  <a:srgbClr val="3A2E1F"/>
+                </a:solidFill>
+                <a:latin typeface="EBGaramond" pitchFamily="34" charset="0"/>
+                <a:ea typeface="EBGaramond" pitchFamily="34" charset="-122"/>
+                <a:cs typeface="EBGaramond" pitchFamily="34" charset="-120"/>
+              </a:rPr>
+              <a:t>Everything that breaks at real size is invisible at sample size.</a:t>
+            </a:r>
+            <a:endParaRPr lang="en-US" sz="1866" dirty="0"/>
+          </a:p>
+        </p:txBody>
+      </p:sp>
+      <p:sp>
+        <p:nvSpPr>
+          <p:cNvPr id="15" name="Text 13"/>
+          <p:cNvSpPr/>
+          <p:nvPr/>
+        </p:nvSpPr>
+        <p:spPr>
+          <a:xfrm>
+            <a:off x="847672" y="6096198"/>
+            <a:ext cx="10291808" cy="253802"/>
+          </a:xfrm>
+          <a:prstGeom prst="rect">
+            <a:avLst/>
+          </a:prstGeom>
+          <a:noFill/>
+          <a:ln/>
+        </p:spPr>
+        <p:txBody>
+          <a:bodyPr wrap="square" lIns="0" tIns="0" rIns="0" bIns="0" rtlCol="0" anchor="t"/>
+          <a:lstStyle/>
+          <a:p>
+            <a:pPr algn="r" indent="0" marL="0">
+              <a:lnSpc>
+                <a:spcPts val="2000"/>
+              </a:lnSpc>
+              <a:buNone/>
+            </a:pPr>
+            <a:r>
+              <a:rPr lang="en-US" sz="1333" i="1" dirty="0">
+                <a:solidFill>
+                  <a:srgbClr val="6B5D46"/>
+                </a:solidFill>
+                <a:latin typeface="EBGaramond" pitchFamily="34" charset="0"/>
+                <a:ea typeface="EBGaramond" pitchFamily="34" charset="-122"/>
+                <a:cs typeface="EBGaramond" pitchFamily="34" charset="-120"/>
+              </a:rPr>
+              <a:t>No RPO or RTO figures are asserted in this deck — those numbers are yours to set and to measure.</a:t>
+            </a:r>
+            <a:endParaRPr lang="en-US" sz="1333" dirty="0"/>
+          </a:p>
+        </p:txBody>
+      </p:sp>
     </p:spTree>
   </p:cSld>
   <p:clrMapOvr>
@@ -1357,6 +3093,13 @@
 <file path=ppt/slides/slide4.xml><?xml version="1.0" encoding="utf-8"?>
 <p:sld xmlns:a="http://schemas.openxmlformats.org/drawingml/2006/main" xmlns:r="http://schemas.openxmlformats.org/officeDocument/2006/relationships" xmlns:p="http://schemas.openxmlformats.org/presentationml/2006/main">
   <p:cSld name="Slide 4">
+    <p:bg>
+      <p:bgPr>
+        <a:solidFill>
+          <a:srgbClr val="EDE6D6"/>
+        </a:solidFill>
+      </p:bgPr>
+    </p:bg>
     <p:spTree>
       <p:nvGrpSpPr>
         <p:cNvPr id="1" name=""/>
@@ -1371,30 +3114,1412 @@
           <a:chExt cx="0" cy="0"/>
         </a:xfrm>
       </p:grpSpPr>
+      <p:sp>
+        <p:nvSpPr>
+          <p:cNvPr id="2" name="Text 0"/>
+          <p:cNvSpPr/>
+          <p:nvPr/>
+        </p:nvSpPr>
+        <p:spPr>
+          <a:xfrm>
+            <a:off x="948572" y="541734"/>
+            <a:ext cx="10291808" cy="279400"/>
+          </a:xfrm>
+          <a:prstGeom prst="rect">
+            <a:avLst/>
+          </a:prstGeom>
+          <a:noFill/>
+          <a:ln/>
+        </p:spPr>
+        <p:txBody>
+          <a:bodyPr wrap="square" lIns="0" tIns="0" rIns="0" bIns="0" rtlCol="0" anchor="t"/>
+          <a:lstStyle/>
+          <a:p>
+            <a:pPr algn="ctr" indent="0" marL="0">
+              <a:lnSpc>
+                <a:spcPts val="2200"/>
+              </a:lnSpc>
+              <a:buNone/>
+            </a:pPr>
+            <a:r>
+              <a:rPr lang="en-US" sz="1466" b="1" dirty="0">
+                <a:solidFill>
+                  <a:srgbClr val="6B5D46"/>
+                </a:solidFill>
+                <a:latin typeface="EBGaramond" pitchFamily="34" charset="0"/>
+                <a:ea typeface="EBGaramond" pitchFamily="34" charset="-122"/>
+                <a:cs typeface="EBGaramond" pitchFamily="34" charset="-120"/>
+              </a:rPr>
+              <a:t>WHAT THE DRILL PRODUCES</a:t>
+            </a:r>
+            <a:endParaRPr lang="en-US" sz="1466" dirty="0"/>
+          </a:p>
+        </p:txBody>
+      </p:sp>
+      <p:sp>
+        <p:nvSpPr>
+          <p:cNvPr id="3" name="Text 1"/>
+          <p:cNvSpPr/>
+          <p:nvPr/>
+        </p:nvSpPr>
+        <p:spPr>
+          <a:xfrm>
+            <a:off x="948572" y="956469"/>
+            <a:ext cx="10291808" cy="594320"/>
+          </a:xfrm>
+          <a:prstGeom prst="rect">
+            <a:avLst/>
+          </a:prstGeom>
+          <a:noFill/>
+          <a:ln/>
+        </p:spPr>
+        <p:txBody>
+          <a:bodyPr wrap="square" lIns="0" tIns="0" rIns="0" bIns="0" rtlCol="0" anchor="t"/>
+          <a:lstStyle/>
+          <a:p>
+            <a:pPr algn="ctr" indent="0" marL="0">
+              <a:lnSpc>
+                <a:spcPts val="4679"/>
+              </a:lnSpc>
+              <a:spcBef>
+                <a:spcPts val="1067"/>
+              </a:spcBef>
+              <a:buNone/>
+            </a:pPr>
+            <a:r>
+              <a:rPr lang="en-US" sz="3466" dirty="0">
+                <a:solidFill>
+                  <a:srgbClr val="3A2E1F"/>
+                </a:solidFill>
+                <a:latin typeface="PlayfairDisplay" pitchFamily="34" charset="0"/>
+                <a:ea typeface="PlayfairDisplay" pitchFamily="34" charset="-122"/>
+                <a:cs typeface="PlayfairDisplay" pitchFamily="34" charset="-120"/>
+              </a:rPr>
+              <a:t>The drill’s product is a corrected runbook</a:t>
+            </a:r>
+            <a:endParaRPr lang="en-US" sz="3466" dirty="0"/>
+          </a:p>
+        </p:txBody>
+      </p:sp>
+      <p:sp>
+        <p:nvSpPr>
+          <p:cNvPr id="4" name="Text 2"/>
+          <p:cNvSpPr/>
+          <p:nvPr/>
+        </p:nvSpPr>
+        <p:spPr>
+          <a:xfrm>
+            <a:off x="5806615" y="1753989"/>
+            <a:ext cx="575523" cy="12700"/>
+          </a:xfrm>
+          <a:prstGeom prst="rect">
+            <a:avLst/>
+          </a:prstGeom>
+          <a:solidFill>
+            <a:srgbClr val="A8893E"/>
+          </a:solidFill>
+          <a:ln/>
+        </p:spPr>
+        <p:txBody>
+          <a:bodyPr wrap="square" rtlCol="0" anchor="ctr"/>
+          <a:lstStyle/>
+          <a:p>
+            <a:pPr indent="0" marL="0">
+              <a:buNone/>
+            </a:pPr>
+            <a:endParaRPr lang="en-US" dirty="0"/>
+          </a:p>
+        </p:txBody>
+      </p:sp>
+      <p:sp>
+        <p:nvSpPr>
+          <p:cNvPr id="5" name="Text 3"/>
+          <p:cNvSpPr/>
+          <p:nvPr/>
+        </p:nvSpPr>
+        <p:spPr>
+          <a:xfrm>
+            <a:off x="1049472" y="2105223"/>
+            <a:ext cx="10090008" cy="3081734"/>
+          </a:xfrm>
+          <a:prstGeom prst="rect">
+            <a:avLst/>
+          </a:prstGeom>
+          <a:noFill/>
+          <a:ln/>
+        </p:spPr>
+        <p:txBody>
+          <a:bodyPr wrap="square" lIns="0" tIns="0" rIns="0" bIns="0" rtlCol="0" anchor="t"/>
+          <a:lstStyle/>
+          <a:p>
+            <a:pPr algn="l" marL="342900" indent="-342900">
+              <a:buSzPct val="100000"/>
+              <a:buChar char="•"/>
+            </a:pPr>
+            <a:r>
+              <a:rPr lang="en-US" sz="1600" dirty="0">
+                <a:solidFill>
+                  <a:srgbClr val="3A2E1F"/>
+                </a:solidFill>
+                <a:latin typeface="EBGaramond" pitchFamily="34" charset="0"/>
+                <a:ea typeface="EBGaramond" pitchFamily="34" charset="-122"/>
+                <a:cs typeface="EBGaramond" pitchFamily="34" charset="-120"/>
+              </a:rPr>
+              <a:t>I</a:t>
+            </a:r>
+            <a:pPr algn="l" indent="0" marL="0">
+              <a:buNone/>
+            </a:pPr>
+            <a:r>
+              <a:rPr lang="en-US" sz="1600" dirty="0">
+                <a:solidFill>
+                  <a:srgbClr val="3A2E1F"/>
+                </a:solidFill>
+                <a:latin typeface="EBGaramond" pitchFamily="34" charset="0"/>
+                <a:ea typeface="EBGaramond" pitchFamily="34" charset="-122"/>
+                <a:cs typeface="EBGaramond" pitchFamily="34" charset="-120"/>
+              </a:rPr>
+              <a:t> </a:t>
+            </a:r>
+            <a:pPr algn="l" indent="0" marL="0">
+              <a:buNone/>
+            </a:pPr>
+            <a:r>
+              <a:rPr lang="en-US" sz="1600" dirty="0">
+                <a:solidFill>
+                  <a:srgbClr val="3A2E1F"/>
+                </a:solidFill>
+                <a:latin typeface="EBGaramond" pitchFamily="34" charset="0"/>
+                <a:ea typeface="EBGaramond" pitchFamily="34" charset="-122"/>
+                <a:cs typeface="EBGaramond" pitchFamily="34" charset="-120"/>
+              </a:rPr>
+              <a:t>DECLARE</a:t>
+            </a:r>
+            <a:pPr algn="l" indent="0" marL="0">
+              <a:buNone/>
+            </a:pPr>
+            <a:r>
+              <a:rPr lang="en-US" sz="1600" dirty="0">
+                <a:solidFill>
+                  <a:srgbClr val="3A2E1F"/>
+                </a:solidFill>
+                <a:latin typeface="EBGaramond" pitchFamily="34" charset="0"/>
+                <a:ea typeface="EBGaramond" pitchFamily="34" charset="-122"/>
+                <a:cs typeface="EBGaramond" pitchFamily="34" charset="-120"/>
+              </a:rPr>
+              <a:t> </a:t>
+            </a:r>
+            <a:pPr algn="l" indent="0" marL="0">
+              <a:buNone/>
+            </a:pPr>
+            <a:r>
+              <a:rPr lang="en-US" sz="1600" dirty="0">
+                <a:solidFill>
+                  <a:srgbClr val="6B5D46"/>
+                </a:solidFill>
+                <a:latin typeface="EBGaramond" pitchFamily="34" charset="0"/>
+                <a:ea typeface="EBGaramond" pitchFamily="34" charset="-122"/>
+                <a:cs typeface="EBGaramond" pitchFamily="34" charset="-120"/>
+              </a:rPr>
+              <a:t>The restore you claim you can do.</a:t>
+            </a:r>
+            <a:endParaRPr lang="en-US" sz="1600" dirty="0"/>
+          </a:p>
+          <a:p>
+            <a:pPr algn="l" marL="342900" indent="-342900">
+              <a:buSzPct val="100000"/>
+              <a:buChar char="•"/>
+            </a:pPr>
+            <a:r>
+              <a:rPr lang="en-US" sz="1600" dirty="0">
+                <a:solidFill>
+                  <a:srgbClr val="3A2E1F"/>
+                </a:solidFill>
+                <a:latin typeface="EBGaramond" pitchFamily="34" charset="0"/>
+                <a:ea typeface="EBGaramond" pitchFamily="34" charset="-122"/>
+                <a:cs typeface="EBGaramond" pitchFamily="34" charset="-120"/>
+              </a:rPr>
+              <a:t>II</a:t>
+            </a:r>
+            <a:pPr algn="l" indent="0" marL="0">
+              <a:buNone/>
+            </a:pPr>
+            <a:r>
+              <a:rPr lang="en-US" sz="1600" dirty="0">
+                <a:solidFill>
+                  <a:srgbClr val="3A2E1F"/>
+                </a:solidFill>
+                <a:latin typeface="EBGaramond" pitchFamily="34" charset="0"/>
+                <a:ea typeface="EBGaramond" pitchFamily="34" charset="-122"/>
+                <a:cs typeface="EBGaramond" pitchFamily="34" charset="-120"/>
+              </a:rPr>
+              <a:t> </a:t>
+            </a:r>
+            <a:pPr algn="l" indent="0" marL="0">
+              <a:buNone/>
+            </a:pPr>
+            <a:r>
+              <a:rPr lang="en-US" sz="1600" dirty="0">
+                <a:solidFill>
+                  <a:srgbClr val="3A2E1F"/>
+                </a:solidFill>
+                <a:latin typeface="EBGaramond" pitchFamily="34" charset="0"/>
+                <a:ea typeface="EBGaramond" pitchFamily="34" charset="-122"/>
+                <a:cs typeface="EBGaramond" pitchFamily="34" charset="-120"/>
+              </a:rPr>
+              <a:t>RUN</a:t>
+            </a:r>
+            <a:pPr algn="l" indent="0" marL="0">
+              <a:buNone/>
+            </a:pPr>
+            <a:r>
+              <a:rPr lang="en-US" sz="1600" dirty="0">
+                <a:solidFill>
+                  <a:srgbClr val="3A2E1F"/>
+                </a:solidFill>
+                <a:latin typeface="EBGaramond" pitchFamily="34" charset="0"/>
+                <a:ea typeface="EBGaramond" pitchFamily="34" charset="-122"/>
+                <a:cs typeface="EBGaramond" pitchFamily="34" charset="-120"/>
+              </a:rPr>
+              <a:t> </a:t>
+            </a:r>
+            <a:pPr algn="l" indent="0" marL="0">
+              <a:buNone/>
+            </a:pPr>
+            <a:r>
+              <a:rPr lang="en-US" sz="1600" dirty="0">
+                <a:solidFill>
+                  <a:srgbClr val="6B5D46"/>
+                </a:solidFill>
+                <a:latin typeface="EBGaramond" pitchFamily="34" charset="0"/>
+                <a:ea typeface="EBGaramond" pitchFamily="34" charset="-122"/>
+                <a:cs typeface="EBGaramond" pitchFamily="34" charset="-120"/>
+              </a:rPr>
+              <a:t>Timed, by the shift that would really do it.</a:t>
+            </a:r>
+            <a:endParaRPr lang="en-US" sz="1600" dirty="0"/>
+          </a:p>
+          <a:p>
+            <a:pPr algn="l" marL="342900" indent="-342900">
+              <a:buSzPct val="100000"/>
+              <a:buChar char="•"/>
+            </a:pPr>
+            <a:r>
+              <a:rPr lang="en-US" sz="1600" dirty="0">
+                <a:solidFill>
+                  <a:srgbClr val="3A2E1F"/>
+                </a:solidFill>
+                <a:latin typeface="EBGaramond" pitchFamily="34" charset="0"/>
+                <a:ea typeface="EBGaramond" pitchFamily="34" charset="-122"/>
+                <a:cs typeface="EBGaramond" pitchFamily="34" charset="-120"/>
+              </a:rPr>
+              <a:t>III</a:t>
+            </a:r>
+            <a:pPr algn="l" indent="0" marL="0">
+              <a:buNone/>
+            </a:pPr>
+            <a:r>
+              <a:rPr lang="en-US" sz="1600" dirty="0">
+                <a:solidFill>
+                  <a:srgbClr val="3A2E1F"/>
+                </a:solidFill>
+                <a:latin typeface="EBGaramond" pitchFamily="34" charset="0"/>
+                <a:ea typeface="EBGaramond" pitchFamily="34" charset="-122"/>
+                <a:cs typeface="EBGaramond" pitchFamily="34" charset="-120"/>
+              </a:rPr>
+              <a:t> </a:t>
+            </a:r>
+            <a:pPr algn="l" indent="0" marL="0">
+              <a:buNone/>
+            </a:pPr>
+            <a:r>
+              <a:rPr lang="en-US" sz="1600" dirty="0">
+                <a:solidFill>
+                  <a:srgbClr val="3A2E1F"/>
+                </a:solidFill>
+                <a:latin typeface="EBGaramond" pitchFamily="34" charset="0"/>
+                <a:ea typeface="EBGaramond" pitchFamily="34" charset="-122"/>
+                <a:cs typeface="EBGaramond" pitchFamily="34" charset="-120"/>
+              </a:rPr>
+              <a:t>RECORD</a:t>
+            </a:r>
+            <a:pPr algn="l" indent="0" marL="0">
+              <a:buNone/>
+            </a:pPr>
+            <a:r>
+              <a:rPr lang="en-US" sz="1600" dirty="0">
+                <a:solidFill>
+                  <a:srgbClr val="3A2E1F"/>
+                </a:solidFill>
+                <a:latin typeface="EBGaramond" pitchFamily="34" charset="0"/>
+                <a:ea typeface="EBGaramond" pitchFamily="34" charset="-122"/>
+                <a:cs typeface="EBGaramond" pitchFamily="34" charset="-120"/>
+              </a:rPr>
+              <a:t> </a:t>
+            </a:r>
+            <a:pPr algn="l" indent="0" marL="0">
+              <a:buNone/>
+            </a:pPr>
+            <a:r>
+              <a:rPr lang="en-US" sz="1600" dirty="0">
+                <a:solidFill>
+                  <a:srgbClr val="6B5D46"/>
+                </a:solidFill>
+                <a:latin typeface="EBGaramond" pitchFamily="34" charset="0"/>
+                <a:ea typeface="EBGaramond" pitchFamily="34" charset="-122"/>
+                <a:cs typeface="EBGaramond" pitchFamily="34" charset="-120"/>
+              </a:rPr>
+              <a:t>What the runbook said, and what happened.</a:t>
+            </a:r>
+            <a:endParaRPr lang="en-US" sz="1600" dirty="0"/>
+          </a:p>
+          <a:p>
+            <a:pPr algn="l" marL="342900" indent="-342900">
+              <a:buSzPct val="100000"/>
+              <a:buChar char="•"/>
+            </a:pPr>
+            <a:r>
+              <a:rPr lang="en-US" sz="1600" dirty="0">
+                <a:solidFill>
+                  <a:srgbClr val="3A2E1F"/>
+                </a:solidFill>
+                <a:latin typeface="EBGaramond" pitchFamily="34" charset="0"/>
+                <a:ea typeface="EBGaramond" pitchFamily="34" charset="-122"/>
+                <a:cs typeface="EBGaramond" pitchFamily="34" charset="-120"/>
+              </a:rPr>
+              <a:t>IV</a:t>
+            </a:r>
+            <a:pPr algn="l" indent="0" marL="0">
+              <a:buNone/>
+            </a:pPr>
+            <a:r>
+              <a:rPr lang="en-US" sz="1600" dirty="0">
+                <a:solidFill>
+                  <a:srgbClr val="3A2E1F"/>
+                </a:solidFill>
+                <a:latin typeface="EBGaramond" pitchFamily="34" charset="0"/>
+                <a:ea typeface="EBGaramond" pitchFamily="34" charset="-122"/>
+                <a:cs typeface="EBGaramond" pitchFamily="34" charset="-120"/>
+              </a:rPr>
+              <a:t> </a:t>
+            </a:r>
+            <a:pPr algn="l" indent="0" marL="0">
+              <a:buNone/>
+            </a:pPr>
+            <a:r>
+              <a:rPr lang="en-US" sz="1600" dirty="0">
+                <a:solidFill>
+                  <a:srgbClr val="3A2E1F"/>
+                </a:solidFill>
+                <a:latin typeface="EBGaramond" pitchFamily="34" charset="0"/>
+                <a:ea typeface="EBGaramond" pitchFamily="34" charset="-122"/>
+                <a:cs typeface="EBGaramond" pitchFamily="34" charset="-120"/>
+              </a:rPr>
+              <a:t>CORRECT</a:t>
+            </a:r>
+            <a:pPr algn="l" indent="0" marL="0">
+              <a:buNone/>
+            </a:pPr>
+            <a:r>
+              <a:rPr lang="en-US" sz="1600" dirty="0">
+                <a:solidFill>
+                  <a:srgbClr val="3A2E1F"/>
+                </a:solidFill>
+                <a:latin typeface="EBGaramond" pitchFamily="34" charset="0"/>
+                <a:ea typeface="EBGaramond" pitchFamily="34" charset="-122"/>
+                <a:cs typeface="EBGaramond" pitchFamily="34" charset="-120"/>
+              </a:rPr>
+              <a:t> </a:t>
+            </a:r>
+            <a:pPr algn="l" indent="0" marL="0">
+              <a:buNone/>
+            </a:pPr>
+            <a:r>
+              <a:rPr lang="en-US" sz="1600" dirty="0">
+                <a:solidFill>
+                  <a:srgbClr val="6B5D46"/>
+                </a:solidFill>
+                <a:latin typeface="EBGaramond" pitchFamily="34" charset="0"/>
+                <a:ea typeface="EBGaramond" pitchFamily="34" charset="-122"/>
+                <a:cs typeface="EBGaramond" pitchFamily="34" charset="-120"/>
+              </a:rPr>
+              <a:t>Edit the runbook before the drill is closed.</a:t>
+            </a:r>
+            <a:endParaRPr lang="en-US" sz="1600" dirty="0"/>
+          </a:p>
+        </p:txBody>
+      </p:sp>
+      <p:sp>
+        <p:nvSpPr>
+          <p:cNvPr id="6" name="Text 4"/>
+          <p:cNvSpPr/>
+          <p:nvPr/>
+        </p:nvSpPr>
+        <p:spPr>
+          <a:xfrm>
+            <a:off x="1049274" y="2545358"/>
+            <a:ext cx="2268764" cy="2201267"/>
+          </a:xfrm>
+          <a:prstGeom prst="rect">
+            <a:avLst/>
+          </a:prstGeom>
+          <a:noFill/>
+          <a:ln w="12698">
+            <a:solidFill>
+              <a:srgbClr val="A8893E"/>
+            </a:solidFill>
+          </a:ln>
+        </p:spPr>
+        <p:txBody>
+          <a:bodyPr wrap="square" rtlCol="0" anchor="ctr"/>
+          <a:lstStyle/>
+          <a:p>
+            <a:pPr indent="0" marL="0">
+              <a:buNone/>
+            </a:pPr>
+            <a:endParaRPr lang="en-US" dirty="0"/>
+          </a:p>
+        </p:txBody>
+      </p:sp>
+      <p:sp>
+        <p:nvSpPr>
+          <p:cNvPr id="7" name="Text 5"/>
+          <p:cNvSpPr/>
+          <p:nvPr/>
+        </p:nvSpPr>
+        <p:spPr>
+          <a:xfrm>
+            <a:off x="1997369" y="2836664"/>
+            <a:ext cx="372374" cy="372467"/>
+          </a:xfrm>
+          <a:prstGeom prst="roundRect">
+            <a:avLst>
+              <a:gd name="adj" fmla="val 327372"/>
+            </a:avLst>
+          </a:prstGeom>
+          <a:noFill/>
+          <a:ln w="12698">
+            <a:solidFill>
+              <a:srgbClr val="A8893E"/>
+            </a:solidFill>
+          </a:ln>
+        </p:spPr>
+        <p:txBody>
+          <a:bodyPr wrap="square" rtlCol="0" anchor="ctr"/>
+          <a:lstStyle/>
+          <a:p>
+            <a:pPr indent="0" marL="0">
+              <a:buNone/>
+            </a:pPr>
+            <a:endParaRPr lang="en-US" dirty="0"/>
+          </a:p>
+        </p:txBody>
+      </p:sp>
+      <p:sp>
+        <p:nvSpPr>
+          <p:cNvPr id="8" name="Text 6"/>
+          <p:cNvSpPr/>
+          <p:nvPr/>
+        </p:nvSpPr>
+        <p:spPr>
+          <a:xfrm>
+            <a:off x="2151080" y="2880717"/>
+            <a:ext cx="64754" cy="284361"/>
+          </a:xfrm>
+          <a:prstGeom prst="rect">
+            <a:avLst/>
+          </a:prstGeom>
+          <a:noFill/>
+          <a:ln/>
+        </p:spPr>
+        <p:txBody>
+          <a:bodyPr wrap="square" lIns="0" tIns="0" rIns="0" bIns="0" rtlCol="0" anchor="t"/>
+          <a:lstStyle/>
+          <a:p>
+            <a:pPr algn="ctr" indent="0" marL="0">
+              <a:lnSpc>
+                <a:spcPts val="2240"/>
+              </a:lnSpc>
+              <a:buNone/>
+            </a:pPr>
+            <a:r>
+              <a:rPr lang="en-US" sz="1600" dirty="0">
+                <a:solidFill>
+                  <a:srgbClr val="3A2E1F"/>
+                </a:solidFill>
+                <a:latin typeface="PlayfairDisplay" pitchFamily="34" charset="0"/>
+                <a:ea typeface="PlayfairDisplay" pitchFamily="34" charset="-122"/>
+                <a:cs typeface="PlayfairDisplay" pitchFamily="34" charset="-120"/>
+              </a:rPr>
+              <a:t>I</a:t>
+            </a:r>
+            <a:endParaRPr lang="en-US" sz="1600" dirty="0"/>
+          </a:p>
+        </p:txBody>
+      </p:sp>
+      <p:sp>
+        <p:nvSpPr>
+          <p:cNvPr id="9" name="Text 7"/>
+          <p:cNvSpPr/>
+          <p:nvPr/>
+        </p:nvSpPr>
+        <p:spPr>
+          <a:xfrm>
+            <a:off x="1535512" y="3378398"/>
+            <a:ext cx="1296088" cy="331986"/>
+          </a:xfrm>
+          <a:prstGeom prst="rect">
+            <a:avLst/>
+          </a:prstGeom>
+          <a:noFill/>
+          <a:ln/>
+        </p:spPr>
+        <p:txBody>
+          <a:bodyPr wrap="square" lIns="0" tIns="0" rIns="0" bIns="0" rtlCol="0" anchor="t"/>
+          <a:lstStyle/>
+          <a:p>
+            <a:pPr algn="ctr" indent="0" marL="0">
+              <a:lnSpc>
+                <a:spcPts val="2613"/>
+              </a:lnSpc>
+              <a:spcBef>
+                <a:spcPts val="1333"/>
+              </a:spcBef>
+              <a:buNone/>
+            </a:pPr>
+            <a:r>
+              <a:rPr lang="en-US" sz="1866" b="1" dirty="0">
+                <a:solidFill>
+                  <a:srgbClr val="3A2E1F"/>
+                </a:solidFill>
+                <a:latin typeface="EBGaramond" pitchFamily="34" charset="0"/>
+                <a:ea typeface="EBGaramond" pitchFamily="34" charset="-122"/>
+                <a:cs typeface="EBGaramond" pitchFamily="34" charset="-120"/>
+              </a:rPr>
+              <a:t>DECLARE</a:t>
+            </a:r>
+            <a:endParaRPr lang="en-US" sz="1866" dirty="0"/>
+          </a:p>
+        </p:txBody>
+      </p:sp>
+      <p:sp>
+        <p:nvSpPr>
+          <p:cNvPr id="10" name="Text 8"/>
+          <p:cNvSpPr/>
+          <p:nvPr/>
+        </p:nvSpPr>
+        <p:spPr>
+          <a:xfrm>
+            <a:off x="1229346" y="3845719"/>
+            <a:ext cx="1908618" cy="609600"/>
+          </a:xfrm>
+          <a:prstGeom prst="rect">
+            <a:avLst/>
+          </a:prstGeom>
+          <a:noFill/>
+          <a:ln/>
+        </p:spPr>
+        <p:txBody>
+          <a:bodyPr wrap="square" lIns="0" tIns="0" rIns="0" bIns="0" rtlCol="0" anchor="t"/>
+          <a:lstStyle/>
+          <a:p>
+            <a:pPr algn="ctr" indent="0" marL="0">
+              <a:lnSpc>
+                <a:spcPts val="2400"/>
+              </a:lnSpc>
+              <a:spcBef>
+                <a:spcPts val="1067"/>
+              </a:spcBef>
+              <a:buNone/>
+            </a:pPr>
+            <a:r>
+              <a:rPr lang="en-US" sz="1600" dirty="0">
+                <a:solidFill>
+                  <a:srgbClr val="6B5D46"/>
+                </a:solidFill>
+                <a:latin typeface="EBGaramond" pitchFamily="34" charset="0"/>
+                <a:ea typeface="EBGaramond" pitchFamily="34" charset="-122"/>
+                <a:cs typeface="EBGaramond" pitchFamily="34" charset="-120"/>
+              </a:rPr>
+              <a:t>The restore you claim you can do.</a:t>
+            </a:r>
+            <a:endParaRPr lang="en-US" sz="1600" dirty="0"/>
+          </a:p>
+        </p:txBody>
+      </p:sp>
       <p:pic>
         <p:nvPicPr>
-          <p:cNvPr id="2" name="Image 0" descr="/tmp/slide-1787840605350-2c4aorzdx39.png">    </p:cNvPr>
+          <p:cNvPr id="11" name="Image 0" descr="preencoded.png">    </p:cNvPr>
           <p:cNvPicPr>
             <a:picLocks noChangeAspect="1"/>
           </p:cNvPicPr>
           <p:nvPr/>
         </p:nvPicPr>
         <p:blipFill>
-          <a:blip r:embed="rId1"/>
+          <a:blip r:embed="rId1">
+            <a:extLst>
+              <a:ext uri="{96DAC541-7B7A-43D3-8B79-37D633B846F1}">
+                <asvg:svgBlip xmlns:asvg="http://schemas.microsoft.com/office/drawing/2016/SVG/main" r:embed="rId2"/>
+              </a:ext>
+            </a:extLst>
+          </a:blip>
           <a:stretch>
             <a:fillRect/>
           </a:stretch>
         </p:blipFill>
         <p:spPr>
           <a:xfrm>
-            <a:off x="0" y="0"/>
-            <a:ext cx="12188952" cy="6858000"/>
+            <a:off x="3318037" y="3578423"/>
+            <a:ext cx="338450" cy="135334"/>
           </a:xfrm>
           <a:prstGeom prst="rect">
             <a:avLst/>
           </a:prstGeom>
         </p:spPr>
       </p:pic>
+      <p:sp>
+        <p:nvSpPr>
+          <p:cNvPr id="12" name="Text 9"/>
+          <p:cNvSpPr/>
+          <p:nvPr/>
+        </p:nvSpPr>
+        <p:spPr>
+          <a:xfrm>
+            <a:off x="3656487" y="2545358"/>
+            <a:ext cx="2268764" cy="2201267"/>
+          </a:xfrm>
+          <a:prstGeom prst="rect">
+            <a:avLst/>
+          </a:prstGeom>
+          <a:noFill/>
+          <a:ln w="12698">
+            <a:solidFill>
+              <a:srgbClr val="A8893E"/>
+            </a:solidFill>
+          </a:ln>
+        </p:spPr>
+        <p:txBody>
+          <a:bodyPr wrap="square" rtlCol="0" anchor="ctr"/>
+          <a:lstStyle/>
+          <a:p>
+            <a:pPr indent="0" marL="0">
+              <a:buNone/>
+            </a:pPr>
+            <a:endParaRPr lang="en-US" dirty="0"/>
+          </a:p>
+        </p:txBody>
+      </p:sp>
+      <p:sp>
+        <p:nvSpPr>
+          <p:cNvPr id="13" name="Text 10"/>
+          <p:cNvSpPr/>
+          <p:nvPr/>
+        </p:nvSpPr>
+        <p:spPr>
+          <a:xfrm>
+            <a:off x="4604583" y="2836664"/>
+            <a:ext cx="372374" cy="372467"/>
+          </a:xfrm>
+          <a:prstGeom prst="roundRect">
+            <a:avLst>
+              <a:gd name="adj" fmla="val 327372"/>
+            </a:avLst>
+          </a:prstGeom>
+          <a:noFill/>
+          <a:ln w="12698">
+            <a:solidFill>
+              <a:srgbClr val="A8893E"/>
+            </a:solidFill>
+          </a:ln>
+        </p:spPr>
+        <p:txBody>
+          <a:bodyPr wrap="square" rtlCol="0" anchor="ctr"/>
+          <a:lstStyle/>
+          <a:p>
+            <a:pPr indent="0" marL="0">
+              <a:buNone/>
+            </a:pPr>
+            <a:endParaRPr lang="en-US" dirty="0"/>
+          </a:p>
+        </p:txBody>
+      </p:sp>
+      <p:sp>
+        <p:nvSpPr>
+          <p:cNvPr id="14" name="Text 11"/>
+          <p:cNvSpPr/>
+          <p:nvPr/>
+        </p:nvSpPr>
+        <p:spPr>
+          <a:xfrm>
+            <a:off x="4725917" y="2880717"/>
+            <a:ext cx="129508" cy="284361"/>
+          </a:xfrm>
+          <a:prstGeom prst="rect">
+            <a:avLst/>
+          </a:prstGeom>
+          <a:noFill/>
+          <a:ln/>
+        </p:spPr>
+        <p:txBody>
+          <a:bodyPr wrap="square" lIns="0" tIns="0" rIns="0" bIns="0" rtlCol="0" anchor="t"/>
+          <a:lstStyle/>
+          <a:p>
+            <a:pPr algn="ctr" indent="0" marL="0">
+              <a:lnSpc>
+                <a:spcPts val="2240"/>
+              </a:lnSpc>
+              <a:buNone/>
+            </a:pPr>
+            <a:r>
+              <a:rPr lang="en-US" sz="1600" dirty="0">
+                <a:solidFill>
+                  <a:srgbClr val="3A2E1F"/>
+                </a:solidFill>
+                <a:latin typeface="PlayfairDisplay" pitchFamily="34" charset="0"/>
+                <a:ea typeface="PlayfairDisplay" pitchFamily="34" charset="-122"/>
+                <a:cs typeface="PlayfairDisplay" pitchFamily="34" charset="-120"/>
+              </a:rPr>
+              <a:t>II</a:t>
+            </a:r>
+            <a:endParaRPr lang="en-US" sz="1600" dirty="0"/>
+          </a:p>
+        </p:txBody>
+      </p:sp>
+      <p:sp>
+        <p:nvSpPr>
+          <p:cNvPr id="15" name="Text 12"/>
+          <p:cNvSpPr/>
+          <p:nvPr/>
+        </p:nvSpPr>
+        <p:spPr>
+          <a:xfrm>
+            <a:off x="4476006" y="3378398"/>
+            <a:ext cx="629528" cy="331986"/>
+          </a:xfrm>
+          <a:prstGeom prst="rect">
+            <a:avLst/>
+          </a:prstGeom>
+          <a:noFill/>
+          <a:ln/>
+        </p:spPr>
+        <p:txBody>
+          <a:bodyPr wrap="square" lIns="0" tIns="0" rIns="0" bIns="0" rtlCol="0" anchor="t"/>
+          <a:lstStyle/>
+          <a:p>
+            <a:pPr algn="ctr" indent="0" marL="0">
+              <a:lnSpc>
+                <a:spcPts val="2613"/>
+              </a:lnSpc>
+              <a:spcBef>
+                <a:spcPts val="1333"/>
+              </a:spcBef>
+              <a:buNone/>
+            </a:pPr>
+            <a:r>
+              <a:rPr lang="en-US" sz="1866" b="1" dirty="0">
+                <a:solidFill>
+                  <a:srgbClr val="3A2E1F"/>
+                </a:solidFill>
+                <a:latin typeface="EBGaramond" pitchFamily="34" charset="0"/>
+                <a:ea typeface="EBGaramond" pitchFamily="34" charset="-122"/>
+                <a:cs typeface="EBGaramond" pitchFamily="34" charset="-120"/>
+              </a:rPr>
+              <a:t>RUN</a:t>
+            </a:r>
+            <a:endParaRPr lang="en-US" sz="1866" dirty="0"/>
+          </a:p>
+        </p:txBody>
+      </p:sp>
+      <p:sp>
+        <p:nvSpPr>
+          <p:cNvPr id="16" name="Text 13"/>
+          <p:cNvSpPr/>
+          <p:nvPr/>
+        </p:nvSpPr>
+        <p:spPr>
+          <a:xfrm>
+            <a:off x="3836560" y="3845719"/>
+            <a:ext cx="1908618" cy="609600"/>
+          </a:xfrm>
+          <a:prstGeom prst="rect">
+            <a:avLst/>
+          </a:prstGeom>
+          <a:noFill/>
+          <a:ln/>
+        </p:spPr>
+        <p:txBody>
+          <a:bodyPr wrap="square" lIns="0" tIns="0" rIns="0" bIns="0" rtlCol="0" anchor="t"/>
+          <a:lstStyle/>
+          <a:p>
+            <a:pPr algn="ctr" indent="0" marL="0">
+              <a:lnSpc>
+                <a:spcPts val="2400"/>
+              </a:lnSpc>
+              <a:spcBef>
+                <a:spcPts val="1067"/>
+              </a:spcBef>
+              <a:buNone/>
+            </a:pPr>
+            <a:r>
+              <a:rPr lang="en-US" sz="1600" dirty="0">
+                <a:solidFill>
+                  <a:srgbClr val="6B5D46"/>
+                </a:solidFill>
+                <a:latin typeface="EBGaramond" pitchFamily="34" charset="0"/>
+                <a:ea typeface="EBGaramond" pitchFamily="34" charset="-122"/>
+                <a:cs typeface="EBGaramond" pitchFamily="34" charset="-120"/>
+              </a:rPr>
+              <a:t>Timed, by the shift that would really do it.</a:t>
+            </a:r>
+            <a:endParaRPr lang="en-US" sz="1600" dirty="0"/>
+          </a:p>
+        </p:txBody>
+      </p:sp>
+      <p:pic>
+        <p:nvPicPr>
+          <p:cNvPr id="17" name="Image 1" descr="preencoded.png">    </p:cNvPr>
+          <p:cNvPicPr>
+            <a:picLocks noChangeAspect="1"/>
+          </p:cNvPicPr>
+          <p:nvPr/>
+        </p:nvPicPr>
+        <p:blipFill>
+          <a:blip r:embed="rId3">
+            <a:extLst>
+              <a:ext uri="{96DAC541-7B7A-43D3-8B79-37D633B846F1}">
+                <asvg:svgBlip xmlns:asvg="http://schemas.microsoft.com/office/drawing/2016/SVG/main" r:embed="rId4"/>
+              </a:ext>
+            </a:extLst>
+          </a:blip>
+          <a:stretch>
+            <a:fillRect/>
+          </a:stretch>
+        </p:blipFill>
+        <p:spPr>
+          <a:xfrm>
+            <a:off x="5925251" y="3578423"/>
+            <a:ext cx="338450" cy="135334"/>
+          </a:xfrm>
+          <a:prstGeom prst="rect">
+            <a:avLst/>
+          </a:prstGeom>
+        </p:spPr>
+      </p:pic>
+      <p:sp>
+        <p:nvSpPr>
+          <p:cNvPr id="18" name="Text 14"/>
+          <p:cNvSpPr/>
+          <p:nvPr/>
+        </p:nvSpPr>
+        <p:spPr>
+          <a:xfrm>
+            <a:off x="6263701" y="2545358"/>
+            <a:ext cx="2268764" cy="2201267"/>
+          </a:xfrm>
+          <a:prstGeom prst="rect">
+            <a:avLst/>
+          </a:prstGeom>
+          <a:noFill/>
+          <a:ln w="12698">
+            <a:solidFill>
+              <a:srgbClr val="A8893E"/>
+            </a:solidFill>
+          </a:ln>
+        </p:spPr>
+        <p:txBody>
+          <a:bodyPr wrap="square" rtlCol="0" anchor="ctr"/>
+          <a:lstStyle/>
+          <a:p>
+            <a:pPr indent="0" marL="0">
+              <a:buNone/>
+            </a:pPr>
+            <a:endParaRPr lang="en-US" dirty="0"/>
+          </a:p>
+        </p:txBody>
+      </p:sp>
+      <p:sp>
+        <p:nvSpPr>
+          <p:cNvPr id="19" name="Text 15"/>
+          <p:cNvSpPr/>
+          <p:nvPr/>
+        </p:nvSpPr>
+        <p:spPr>
+          <a:xfrm>
+            <a:off x="7211797" y="2836664"/>
+            <a:ext cx="372374" cy="372467"/>
+          </a:xfrm>
+          <a:prstGeom prst="roundRect">
+            <a:avLst>
+              <a:gd name="adj" fmla="val 327372"/>
+            </a:avLst>
+          </a:prstGeom>
+          <a:noFill/>
+          <a:ln w="12698">
+            <a:solidFill>
+              <a:srgbClr val="A8893E"/>
+            </a:solidFill>
+          </a:ln>
+        </p:spPr>
+        <p:txBody>
+          <a:bodyPr wrap="square" rtlCol="0" anchor="ctr"/>
+          <a:lstStyle/>
+          <a:p>
+            <a:pPr indent="0" marL="0">
+              <a:buNone/>
+            </a:pPr>
+            <a:endParaRPr lang="en-US" dirty="0"/>
+          </a:p>
+        </p:txBody>
+      </p:sp>
+      <p:sp>
+        <p:nvSpPr>
+          <p:cNvPr id="20" name="Text 16"/>
+          <p:cNvSpPr/>
+          <p:nvPr/>
+        </p:nvSpPr>
+        <p:spPr>
+          <a:xfrm>
+            <a:off x="7300754" y="2880717"/>
+            <a:ext cx="194261" cy="284361"/>
+          </a:xfrm>
+          <a:prstGeom prst="rect">
+            <a:avLst/>
+          </a:prstGeom>
+          <a:noFill/>
+          <a:ln/>
+        </p:spPr>
+        <p:txBody>
+          <a:bodyPr wrap="square" lIns="0" tIns="0" rIns="0" bIns="0" rtlCol="0" anchor="t"/>
+          <a:lstStyle/>
+          <a:p>
+            <a:pPr algn="ctr" indent="0" marL="0">
+              <a:lnSpc>
+                <a:spcPts val="2240"/>
+              </a:lnSpc>
+              <a:buNone/>
+            </a:pPr>
+            <a:r>
+              <a:rPr lang="en-US" sz="1600" dirty="0">
+                <a:solidFill>
+                  <a:srgbClr val="3A2E1F"/>
+                </a:solidFill>
+                <a:latin typeface="PlayfairDisplay" pitchFamily="34" charset="0"/>
+                <a:ea typeface="PlayfairDisplay" pitchFamily="34" charset="-122"/>
+                <a:cs typeface="PlayfairDisplay" pitchFamily="34" charset="-120"/>
+              </a:rPr>
+              <a:t>III</a:t>
+            </a:r>
+            <a:endParaRPr lang="en-US" sz="1600" dirty="0"/>
+          </a:p>
+        </p:txBody>
+      </p:sp>
+      <p:sp>
+        <p:nvSpPr>
+          <p:cNvPr id="21" name="Text 17"/>
+          <p:cNvSpPr/>
+          <p:nvPr/>
+        </p:nvSpPr>
+        <p:spPr>
+          <a:xfrm>
+            <a:off x="6807409" y="3378398"/>
+            <a:ext cx="1181150" cy="331986"/>
+          </a:xfrm>
+          <a:prstGeom prst="rect">
+            <a:avLst/>
+          </a:prstGeom>
+          <a:noFill/>
+          <a:ln/>
+        </p:spPr>
+        <p:txBody>
+          <a:bodyPr wrap="square" lIns="0" tIns="0" rIns="0" bIns="0" rtlCol="0" anchor="t"/>
+          <a:lstStyle/>
+          <a:p>
+            <a:pPr algn="ctr" indent="0" marL="0">
+              <a:lnSpc>
+                <a:spcPts val="2613"/>
+              </a:lnSpc>
+              <a:spcBef>
+                <a:spcPts val="1333"/>
+              </a:spcBef>
+              <a:buNone/>
+            </a:pPr>
+            <a:r>
+              <a:rPr lang="en-US" sz="1866" b="1" dirty="0">
+                <a:solidFill>
+                  <a:srgbClr val="3A2E1F"/>
+                </a:solidFill>
+                <a:latin typeface="EBGaramond" pitchFamily="34" charset="0"/>
+                <a:ea typeface="EBGaramond" pitchFamily="34" charset="-122"/>
+                <a:cs typeface="EBGaramond" pitchFamily="34" charset="-120"/>
+              </a:rPr>
+              <a:t>RECORD</a:t>
+            </a:r>
+            <a:endParaRPr lang="en-US" sz="1866" dirty="0"/>
+          </a:p>
+        </p:txBody>
+      </p:sp>
+      <p:sp>
+        <p:nvSpPr>
+          <p:cNvPr id="22" name="Text 18"/>
+          <p:cNvSpPr/>
+          <p:nvPr/>
+        </p:nvSpPr>
+        <p:spPr>
+          <a:xfrm>
+            <a:off x="6443774" y="3845719"/>
+            <a:ext cx="1908618" cy="609600"/>
+          </a:xfrm>
+          <a:prstGeom prst="rect">
+            <a:avLst/>
+          </a:prstGeom>
+          <a:noFill/>
+          <a:ln/>
+        </p:spPr>
+        <p:txBody>
+          <a:bodyPr wrap="square" lIns="0" tIns="0" rIns="0" bIns="0" rtlCol="0" anchor="t"/>
+          <a:lstStyle/>
+          <a:p>
+            <a:pPr algn="ctr" indent="0" marL="0">
+              <a:lnSpc>
+                <a:spcPts val="2400"/>
+              </a:lnSpc>
+              <a:spcBef>
+                <a:spcPts val="1067"/>
+              </a:spcBef>
+              <a:buNone/>
+            </a:pPr>
+            <a:r>
+              <a:rPr lang="en-US" sz="1600" dirty="0">
+                <a:solidFill>
+                  <a:srgbClr val="6B5D46"/>
+                </a:solidFill>
+                <a:latin typeface="EBGaramond" pitchFamily="34" charset="0"/>
+                <a:ea typeface="EBGaramond" pitchFamily="34" charset="-122"/>
+                <a:cs typeface="EBGaramond" pitchFamily="34" charset="-120"/>
+              </a:rPr>
+              <a:t>What the runbook said, and what happened.</a:t>
+            </a:r>
+            <a:endParaRPr lang="en-US" sz="1600" dirty="0"/>
+          </a:p>
+        </p:txBody>
+      </p:sp>
+      <p:pic>
+        <p:nvPicPr>
+          <p:cNvPr id="23" name="Image 2" descr="preencoded.png">    </p:cNvPr>
+          <p:cNvPicPr>
+            <a:picLocks noChangeAspect="1"/>
+          </p:cNvPicPr>
+          <p:nvPr/>
+        </p:nvPicPr>
+        <p:blipFill>
+          <a:blip r:embed="rId5">
+            <a:extLst>
+              <a:ext uri="{96DAC541-7B7A-43D3-8B79-37D633B846F1}">
+                <asvg:svgBlip xmlns:asvg="http://schemas.microsoft.com/office/drawing/2016/SVG/main" r:embed="rId6"/>
+              </a:ext>
+            </a:extLst>
+          </a:blip>
+          <a:stretch>
+            <a:fillRect/>
+          </a:stretch>
+        </p:blipFill>
+        <p:spPr>
+          <a:xfrm>
+            <a:off x="8532465" y="3578423"/>
+            <a:ext cx="338450" cy="135334"/>
+          </a:xfrm>
+          <a:prstGeom prst="rect">
+            <a:avLst/>
+          </a:prstGeom>
+        </p:spPr>
+      </p:pic>
+      <p:sp>
+        <p:nvSpPr>
+          <p:cNvPr id="24" name="Text 19"/>
+          <p:cNvSpPr/>
+          <p:nvPr/>
+        </p:nvSpPr>
+        <p:spPr>
+          <a:xfrm>
+            <a:off x="8870915" y="2545358"/>
+            <a:ext cx="2268764" cy="2201267"/>
+          </a:xfrm>
+          <a:prstGeom prst="rect">
+            <a:avLst/>
+          </a:prstGeom>
+          <a:solidFill>
+            <a:srgbClr val="F4EFE3"/>
+          </a:solidFill>
+          <a:ln w="12698">
+            <a:solidFill>
+              <a:srgbClr val="A8893E"/>
+            </a:solidFill>
+          </a:ln>
+        </p:spPr>
+        <p:txBody>
+          <a:bodyPr wrap="square" rtlCol="0" anchor="ctr"/>
+          <a:lstStyle/>
+          <a:p>
+            <a:pPr indent="0" marL="0">
+              <a:buNone/>
+            </a:pPr>
+            <a:endParaRPr lang="en-US" dirty="0"/>
+          </a:p>
+        </p:txBody>
+      </p:sp>
+      <p:sp>
+        <p:nvSpPr>
+          <p:cNvPr id="25" name="Text 20"/>
+          <p:cNvSpPr/>
+          <p:nvPr/>
+        </p:nvSpPr>
+        <p:spPr>
+          <a:xfrm>
+            <a:off x="9819010" y="2836664"/>
+            <a:ext cx="372374" cy="372467"/>
+          </a:xfrm>
+          <a:prstGeom prst="roundRect">
+            <a:avLst>
+              <a:gd name="adj" fmla="val 327372"/>
+            </a:avLst>
+          </a:prstGeom>
+          <a:noFill/>
+          <a:ln w="12698">
+            <a:solidFill>
+              <a:srgbClr val="A8893E"/>
+            </a:solidFill>
+          </a:ln>
+        </p:spPr>
+        <p:txBody>
+          <a:bodyPr wrap="square" rtlCol="0" anchor="ctr"/>
+          <a:lstStyle/>
+          <a:p>
+            <a:pPr indent="0" marL="0">
+              <a:buNone/>
+            </a:pPr>
+            <a:endParaRPr lang="en-US" dirty="0"/>
+          </a:p>
+        </p:txBody>
+      </p:sp>
+      <p:sp>
+        <p:nvSpPr>
+          <p:cNvPr id="26" name="Text 21"/>
+          <p:cNvSpPr/>
+          <p:nvPr/>
+        </p:nvSpPr>
+        <p:spPr>
+          <a:xfrm>
+            <a:off x="9907967" y="2880717"/>
+            <a:ext cx="194261" cy="284361"/>
+          </a:xfrm>
+          <a:prstGeom prst="rect">
+            <a:avLst/>
+          </a:prstGeom>
+          <a:noFill/>
+          <a:ln/>
+        </p:spPr>
+        <p:txBody>
+          <a:bodyPr wrap="square" lIns="0" tIns="0" rIns="0" bIns="0" rtlCol="0" anchor="t"/>
+          <a:lstStyle/>
+          <a:p>
+            <a:pPr algn="ctr" indent="0" marL="0">
+              <a:lnSpc>
+                <a:spcPts val="2240"/>
+              </a:lnSpc>
+              <a:buNone/>
+            </a:pPr>
+            <a:r>
+              <a:rPr lang="en-US" sz="1600" dirty="0">
+                <a:solidFill>
+                  <a:srgbClr val="3A2E1F"/>
+                </a:solidFill>
+                <a:latin typeface="PlayfairDisplay" pitchFamily="34" charset="0"/>
+                <a:ea typeface="PlayfairDisplay" pitchFamily="34" charset="-122"/>
+                <a:cs typeface="PlayfairDisplay" pitchFamily="34" charset="-120"/>
+              </a:rPr>
+              <a:t>IV</a:t>
+            </a:r>
+            <a:endParaRPr lang="en-US" sz="1600" dirty="0"/>
+          </a:p>
+        </p:txBody>
+      </p:sp>
+      <p:sp>
+        <p:nvSpPr>
+          <p:cNvPr id="27" name="Text 22"/>
+          <p:cNvSpPr/>
+          <p:nvPr/>
+        </p:nvSpPr>
+        <p:spPr>
+          <a:xfrm>
+            <a:off x="9324776" y="3378398"/>
+            <a:ext cx="1360842" cy="331986"/>
+          </a:xfrm>
+          <a:prstGeom prst="rect">
+            <a:avLst/>
+          </a:prstGeom>
+          <a:noFill/>
+          <a:ln/>
+        </p:spPr>
+        <p:txBody>
+          <a:bodyPr wrap="square" lIns="0" tIns="0" rIns="0" bIns="0" rtlCol="0" anchor="t"/>
+          <a:lstStyle/>
+          <a:p>
+            <a:pPr algn="ctr" indent="0" marL="0">
+              <a:lnSpc>
+                <a:spcPts val="2613"/>
+              </a:lnSpc>
+              <a:spcBef>
+                <a:spcPts val="1333"/>
+              </a:spcBef>
+              <a:buNone/>
+            </a:pPr>
+            <a:r>
+              <a:rPr lang="en-US" sz="1866" b="1" dirty="0">
+                <a:solidFill>
+                  <a:srgbClr val="3A2E1F"/>
+                </a:solidFill>
+                <a:latin typeface="EBGaramond" pitchFamily="34" charset="0"/>
+                <a:ea typeface="EBGaramond" pitchFamily="34" charset="-122"/>
+                <a:cs typeface="EBGaramond" pitchFamily="34" charset="-120"/>
+              </a:rPr>
+              <a:t>CORRECT</a:t>
+            </a:r>
+            <a:endParaRPr lang="en-US" sz="1866" dirty="0"/>
+          </a:p>
+        </p:txBody>
+      </p:sp>
+      <p:sp>
+        <p:nvSpPr>
+          <p:cNvPr id="28" name="Text 23"/>
+          <p:cNvSpPr/>
+          <p:nvPr/>
+        </p:nvSpPr>
+        <p:spPr>
+          <a:xfrm>
+            <a:off x="9050987" y="3845719"/>
+            <a:ext cx="1908618" cy="609600"/>
+          </a:xfrm>
+          <a:prstGeom prst="rect">
+            <a:avLst/>
+          </a:prstGeom>
+          <a:noFill/>
+          <a:ln/>
+        </p:spPr>
+        <p:txBody>
+          <a:bodyPr wrap="square" lIns="0" tIns="0" rIns="0" bIns="0" rtlCol="0" anchor="t"/>
+          <a:lstStyle/>
+          <a:p>
+            <a:pPr algn="ctr" indent="0" marL="0">
+              <a:lnSpc>
+                <a:spcPts val="2400"/>
+              </a:lnSpc>
+              <a:spcBef>
+                <a:spcPts val="1067"/>
+              </a:spcBef>
+              <a:buNone/>
+            </a:pPr>
+            <a:r>
+              <a:rPr lang="en-US" sz="1600" dirty="0">
+                <a:solidFill>
+                  <a:srgbClr val="6B5D46"/>
+                </a:solidFill>
+                <a:latin typeface="EBGaramond" pitchFamily="34" charset="0"/>
+                <a:ea typeface="EBGaramond" pitchFamily="34" charset="-122"/>
+                <a:cs typeface="EBGaramond" pitchFamily="34" charset="-120"/>
+              </a:rPr>
+              <a:t>Edit the runbook before the drill is closed.</a:t>
+            </a:r>
+            <a:endParaRPr lang="en-US" sz="1600" dirty="0"/>
+          </a:p>
+        </p:txBody>
+      </p:sp>
+      <p:sp>
+        <p:nvSpPr>
+          <p:cNvPr id="29" name="Text 24"/>
+          <p:cNvSpPr/>
+          <p:nvPr/>
+        </p:nvSpPr>
+        <p:spPr>
+          <a:xfrm>
+            <a:off x="948572" y="5491758"/>
+            <a:ext cx="10291808" cy="367506"/>
+          </a:xfrm>
+          <a:prstGeom prst="rect">
+            <a:avLst/>
+          </a:prstGeom>
+          <a:noFill/>
+          <a:ln/>
+        </p:spPr>
+        <p:txBody>
+          <a:bodyPr wrap="square" lIns="0" tIns="0" rIns="0" bIns="0" rtlCol="0" anchor="t"/>
+          <a:lstStyle/>
+          <a:p>
+            <a:pPr algn="ctr" indent="0" marL="0">
+              <a:lnSpc>
+                <a:spcPts val="2893"/>
+              </a:lnSpc>
+              <a:spcBef>
+                <a:spcPts val="2400"/>
+              </a:spcBef>
+              <a:buNone/>
+            </a:pPr>
+            <a:r>
+              <a:rPr lang="en-US" sz="1866" i="1" dirty="0">
+                <a:solidFill>
+                  <a:srgbClr val="3A2E1F"/>
+                </a:solidFill>
+                <a:latin typeface="EBGaramond" pitchFamily="34" charset="0"/>
+                <a:ea typeface="EBGaramond" pitchFamily="34" charset="-122"/>
+                <a:cs typeface="EBGaramond" pitchFamily="34" charset="-120"/>
+              </a:rPr>
+              <a:t>A drill that ends in a pass has thrown away its only output.</a:t>
+            </a:r>
+            <a:endParaRPr lang="en-US" sz="1866" dirty="0"/>
+          </a:p>
+        </p:txBody>
+      </p:sp>
+      <p:sp>
+        <p:nvSpPr>
+          <p:cNvPr id="30" name="Text 25"/>
+          <p:cNvSpPr/>
+          <p:nvPr/>
+        </p:nvSpPr>
+        <p:spPr>
+          <a:xfrm>
+            <a:off x="847672" y="6096198"/>
+            <a:ext cx="10291808" cy="253802"/>
+          </a:xfrm>
+          <a:prstGeom prst="rect">
+            <a:avLst/>
+          </a:prstGeom>
+          <a:noFill/>
+          <a:ln/>
+        </p:spPr>
+        <p:txBody>
+          <a:bodyPr wrap="square" lIns="0" tIns="0" rIns="0" bIns="0" rtlCol="0" anchor="t"/>
+          <a:lstStyle/>
+          <a:p>
+            <a:pPr algn="r" indent="0" marL="0">
+              <a:lnSpc>
+                <a:spcPts val="2000"/>
+              </a:lnSpc>
+              <a:buNone/>
+            </a:pPr>
+            <a:r>
+              <a:rPr lang="en-US" sz="1333" i="1" dirty="0">
+                <a:solidFill>
+                  <a:srgbClr val="6B5D46"/>
+                </a:solidFill>
+                <a:latin typeface="EBGaramond" pitchFamily="34" charset="0"/>
+                <a:ea typeface="EBGaramond" pitchFamily="34" charset="-122"/>
+                <a:cs typeface="EBGaramond" pitchFamily="34" charset="-120"/>
+              </a:rPr>
+              <a:t>No RPO or RTO figures are asserted in this deck — those numbers are yours to set and to measure.</a:t>
+            </a:r>
+            <a:endParaRPr lang="en-US" sz="1333" dirty="0"/>
+          </a:p>
+        </p:txBody>
+      </p:sp>
     </p:spTree>
   </p:cSld>
   <p:clrMapOvr>
@@ -1406,6 +4531,13 @@
 <file path=ppt/slides/slide5.xml><?xml version="1.0" encoding="utf-8"?>
 <p:sld xmlns:a="http://schemas.openxmlformats.org/drawingml/2006/main" xmlns:r="http://schemas.openxmlformats.org/officeDocument/2006/relationships" xmlns:p="http://schemas.openxmlformats.org/presentationml/2006/main">
   <p:cSld name="Slide 5">
+    <p:bg>
+      <p:bgPr>
+        <a:solidFill>
+          <a:srgbClr val="EDE6D6"/>
+        </a:solidFill>
+      </p:bgPr>
+    </p:bg>
     <p:spTree>
       <p:nvGrpSpPr>
         <p:cNvPr id="1" name=""/>
@@ -1420,30 +4552,805 @@
           <a:chExt cx="0" cy="0"/>
         </a:xfrm>
       </p:grpSpPr>
-      <p:pic>
-        <p:nvPicPr>
-          <p:cNvPr id="2" name="Image 0" descr="/tmp/slide-1787840605604-zdt2igogvyf.png">    </p:cNvPr>
-          <p:cNvPicPr>
-            <a:picLocks noChangeAspect="1"/>
-          </p:cNvPicPr>
-          <p:nvPr/>
-        </p:nvPicPr>
-        <p:blipFill>
-          <a:blip r:embed="rId1"/>
-          <a:stretch>
-            <a:fillRect/>
-          </a:stretch>
-        </p:blipFill>
-        <p:spPr>
-          <a:xfrm>
-            <a:off x="0" y="0"/>
-            <a:ext cx="12188952" cy="6858000"/>
-          </a:xfrm>
-          <a:prstGeom prst="rect">
-            <a:avLst/>
-          </a:prstGeom>
-        </p:spPr>
-      </p:pic>
+      <p:sp>
+        <p:nvSpPr>
+          <p:cNvPr id="2" name="Text 0"/>
+          <p:cNvSpPr/>
+          <p:nvPr/>
+        </p:nvSpPr>
+        <p:spPr>
+          <a:xfrm>
+            <a:off x="948572" y="541734"/>
+            <a:ext cx="10291808" cy="279400"/>
+          </a:xfrm>
+          <a:prstGeom prst="rect">
+            <a:avLst/>
+          </a:prstGeom>
+          <a:noFill/>
+          <a:ln/>
+        </p:spPr>
+        <p:txBody>
+          <a:bodyPr wrap="square" lIns="0" tIns="0" rIns="0" bIns="0" rtlCol="0" anchor="t"/>
+          <a:lstStyle/>
+          <a:p>
+            <a:pPr algn="ctr" indent="0" marL="0">
+              <a:lnSpc>
+                <a:spcPts val="2200"/>
+              </a:lnSpc>
+              <a:buNone/>
+            </a:pPr>
+            <a:r>
+              <a:rPr lang="en-US" sz="1466" b="1" dirty="0">
+                <a:solidFill>
+                  <a:srgbClr val="6B5D46"/>
+                </a:solidFill>
+                <a:latin typeface="EBGaramond" pitchFamily="34" charset="0"/>
+                <a:ea typeface="EBGaramond" pitchFamily="34" charset="-122"/>
+                <a:cs typeface="EBGaramond" pitchFamily="34" charset="-120"/>
+              </a:rPr>
+              <a:t>DECISIONS</a:t>
+            </a:r>
+            <a:endParaRPr lang="en-US" sz="1466" dirty="0"/>
+          </a:p>
+        </p:txBody>
+      </p:sp>
+      <p:sp>
+        <p:nvSpPr>
+          <p:cNvPr id="3" name="Text 1"/>
+          <p:cNvSpPr/>
+          <p:nvPr/>
+        </p:nvSpPr>
+        <p:spPr>
+          <a:xfrm>
+            <a:off x="948572" y="922734"/>
+            <a:ext cx="10291808" cy="594320"/>
+          </a:xfrm>
+          <a:prstGeom prst="rect">
+            <a:avLst/>
+          </a:prstGeom>
+          <a:noFill/>
+          <a:ln/>
+        </p:spPr>
+        <p:txBody>
+          <a:bodyPr wrap="square" lIns="0" tIns="0" rIns="0" bIns="0" rtlCol="0" anchor="t"/>
+          <a:lstStyle/>
+          <a:p>
+            <a:pPr algn="ctr" indent="0" marL="0">
+              <a:lnSpc>
+                <a:spcPts val="4679"/>
+              </a:lnSpc>
+              <a:spcBef>
+                <a:spcPts val="800"/>
+              </a:spcBef>
+              <a:buNone/>
+            </a:pPr>
+            <a:r>
+              <a:rPr lang="en-US" sz="3466" dirty="0">
+                <a:solidFill>
+                  <a:srgbClr val="3A2E1F"/>
+                </a:solidFill>
+                <a:latin typeface="PlayfairDisplay" pitchFamily="34" charset="0"/>
+                <a:ea typeface="PlayfairDisplay" pitchFamily="34" charset="-122"/>
+                <a:cs typeface="PlayfairDisplay" pitchFamily="34" charset="-120"/>
+              </a:rPr>
+              <a:t>What we need to decide</a:t>
+            </a:r>
+            <a:endParaRPr lang="en-US" sz="3466" dirty="0"/>
+          </a:p>
+        </p:txBody>
+      </p:sp>
+      <p:sp>
+        <p:nvSpPr>
+          <p:cNvPr id="4" name="Text 2"/>
+          <p:cNvSpPr/>
+          <p:nvPr/>
+        </p:nvSpPr>
+        <p:spPr>
+          <a:xfrm>
+            <a:off x="5806615" y="1686322"/>
+            <a:ext cx="575523" cy="12700"/>
+          </a:xfrm>
+          <a:prstGeom prst="rect">
+            <a:avLst/>
+          </a:prstGeom>
+          <a:solidFill>
+            <a:srgbClr val="A8893E"/>
+          </a:solidFill>
+          <a:ln/>
+        </p:spPr>
+        <p:txBody>
+          <a:bodyPr wrap="square" rtlCol="0" anchor="ctr"/>
+          <a:lstStyle/>
+          <a:p>
+            <a:pPr indent="0" marL="0">
+              <a:buNone/>
+            </a:pPr>
+            <a:endParaRPr lang="en-US" dirty="0"/>
+          </a:p>
+        </p:txBody>
+      </p:sp>
+      <p:sp>
+        <p:nvSpPr>
+          <p:cNvPr id="5" name="Text 3"/>
+          <p:cNvSpPr/>
+          <p:nvPr/>
+        </p:nvSpPr>
+        <p:spPr>
+          <a:xfrm>
+            <a:off x="1049472" y="2003822"/>
+            <a:ext cx="10090008" cy="3855442"/>
+          </a:xfrm>
+          <a:prstGeom prst="rect">
+            <a:avLst/>
+          </a:prstGeom>
+          <a:noFill/>
+          <a:ln/>
+        </p:spPr>
+        <p:txBody>
+          <a:bodyPr wrap="square" lIns="0" tIns="0" rIns="0" bIns="0" rtlCol="0" anchor="t"/>
+          <a:lstStyle/>
+          <a:p>
+            <a:pPr algn="ctr" marL="342900" indent="-342900">
+              <a:buSzPct val="100000"/>
+              <a:buChar char="•"/>
+            </a:pPr>
+            <a:r>
+              <a:rPr lang="en-US" sz="1600" dirty="0">
+                <a:solidFill>
+                  <a:srgbClr val="6B5D46"/>
+                </a:solidFill>
+                <a:latin typeface="EBGaramond" pitchFamily="34" charset="0"/>
+                <a:ea typeface="EBGaramond" pitchFamily="34" charset="-122"/>
+                <a:cs typeface="EBGaramond" pitchFamily="34" charset="-120"/>
+              </a:rPr>
+              <a:t>I</a:t>
+            </a:r>
+            <a:pPr algn="ctr" indent="0" marL="0">
+              <a:buNone/>
+            </a:pPr>
+            <a:r>
+              <a:rPr lang="en-US" sz="1600" dirty="0">
+                <a:solidFill>
+                  <a:srgbClr val="3A2E1F"/>
+                </a:solidFill>
+                <a:latin typeface="EBGaramond" pitchFamily="34" charset="0"/>
+                <a:ea typeface="EBGaramond" pitchFamily="34" charset="-122"/>
+                <a:cs typeface="EBGaramond" pitchFamily="34" charset="-120"/>
+              </a:rPr>
+              <a:t> </a:t>
+            </a:r>
+            <a:pPr algn="ctr" indent="0" marL="0">
+              <a:buNone/>
+            </a:pPr>
+            <a:r>
+              <a:rPr lang="en-US" sz="1600" dirty="0">
+                <a:solidFill>
+                  <a:srgbClr val="3A2E1F"/>
+                </a:solidFill>
+                <a:latin typeface="EBGaramond" pitchFamily="34" charset="0"/>
+                <a:ea typeface="EBGaramond" pitchFamily="34" charset="-122"/>
+                <a:cs typeface="EBGaramond" pitchFamily="34" charset="-120"/>
+              </a:rPr>
+              <a:t>Does the drill go on the calendar?</a:t>
+            </a:r>
+            <a:pPr algn="ctr" indent="0" marL="0">
+              <a:buNone/>
+            </a:pPr>
+            <a:r>
+              <a:rPr lang="en-US" sz="1600" dirty="0">
+                <a:solidFill>
+                  <a:srgbClr val="3A2E1F"/>
+                </a:solidFill>
+                <a:latin typeface="EBGaramond" pitchFamily="34" charset="0"/>
+                <a:ea typeface="EBGaramond" pitchFamily="34" charset="-122"/>
+                <a:cs typeface="EBGaramond" pitchFamily="34" charset="-120"/>
+              </a:rPr>
+              <a:t> </a:t>
+            </a:r>
+            <a:pPr algn="ctr" indent="0" marL="0">
+              <a:buNone/>
+            </a:pPr>
+            <a:r>
+              <a:rPr lang="en-US" sz="1600" dirty="0">
+                <a:solidFill>
+                  <a:srgbClr val="6B5D46"/>
+                </a:solidFill>
+                <a:latin typeface="EBGaramond" pitchFamily="34" charset="0"/>
+                <a:ea typeface="EBGaramond" pitchFamily="34" charset="-122"/>
+                <a:cs typeface="EBGaramond" pitchFamily="34" charset="-120"/>
+              </a:rPr>
+              <a:t>A date and an owner, or it stays an intention.</a:t>
+            </a:r>
+            <a:endParaRPr lang="en-US" sz="1600" dirty="0"/>
+          </a:p>
+          <a:p>
+            <a:pPr algn="ctr" marL="342900" indent="-342900">
+              <a:buSzPct val="100000"/>
+              <a:buChar char="•"/>
+            </a:pPr>
+            <a:r>
+              <a:rPr lang="en-US" sz="1600" dirty="0">
+                <a:solidFill>
+                  <a:srgbClr val="6B5D46"/>
+                </a:solidFill>
+                <a:latin typeface="EBGaramond" pitchFamily="34" charset="0"/>
+                <a:ea typeface="EBGaramond" pitchFamily="34" charset="-122"/>
+                <a:cs typeface="EBGaramond" pitchFamily="34" charset="-120"/>
+              </a:rPr>
+              <a:t>II</a:t>
+            </a:r>
+            <a:pPr algn="ctr" indent="0" marL="0">
+              <a:buNone/>
+            </a:pPr>
+            <a:r>
+              <a:rPr lang="en-US" sz="1600" dirty="0">
+                <a:solidFill>
+                  <a:srgbClr val="3A2E1F"/>
+                </a:solidFill>
+                <a:latin typeface="EBGaramond" pitchFamily="34" charset="0"/>
+                <a:ea typeface="EBGaramond" pitchFamily="34" charset="-122"/>
+                <a:cs typeface="EBGaramond" pitchFamily="34" charset="-120"/>
+              </a:rPr>
+              <a:t> </a:t>
+            </a:r>
+            <a:pPr algn="ctr" indent="0" marL="0">
+              <a:buNone/>
+            </a:pPr>
+            <a:r>
+              <a:rPr lang="en-US" sz="1600" dirty="0">
+                <a:solidFill>
+                  <a:srgbClr val="3A2E1F"/>
+                </a:solidFill>
+                <a:latin typeface="EBGaramond" pitchFamily="34" charset="0"/>
+                <a:ea typeface="EBGaramond" pitchFamily="34" charset="-122"/>
+                <a:cs typeface="EBGaramond" pitchFamily="34" charset="-120"/>
+              </a:rPr>
+              <a:t>What stops while the drill runs?</a:t>
+            </a:r>
+            <a:pPr algn="ctr" indent="0" marL="0">
+              <a:buNone/>
+            </a:pPr>
+            <a:r>
+              <a:rPr lang="en-US" sz="1600" dirty="0">
+                <a:solidFill>
+                  <a:srgbClr val="3A2E1F"/>
+                </a:solidFill>
+                <a:latin typeface="EBGaramond" pitchFamily="34" charset="0"/>
+                <a:ea typeface="EBGaramond" pitchFamily="34" charset="-122"/>
+                <a:cs typeface="EBGaramond" pitchFamily="34" charset="-120"/>
+              </a:rPr>
+              <a:t> </a:t>
+            </a:r>
+            <a:pPr algn="ctr" indent="0" marL="0">
+              <a:buNone/>
+            </a:pPr>
+            <a:r>
+              <a:rPr lang="en-US" sz="1600" dirty="0">
+                <a:solidFill>
+                  <a:srgbClr val="6B5D46"/>
+                </a:solidFill>
+                <a:latin typeface="EBGaramond" pitchFamily="34" charset="0"/>
+                <a:ea typeface="EBGaramond" pitchFamily="34" charset="-122"/>
+                <a:cs typeface="EBGaramond" pitchFamily="34" charset="-120"/>
+              </a:rPr>
+              <a:t>Name the service that goes quiet, and who is told before it does.</a:t>
+            </a:r>
+            <a:endParaRPr lang="en-US" sz="1600" dirty="0"/>
+          </a:p>
+          <a:p>
+            <a:pPr algn="ctr" marL="342900" indent="-342900">
+              <a:buSzPct val="100000"/>
+              <a:buChar char="•"/>
+            </a:pPr>
+            <a:r>
+              <a:rPr lang="en-US" sz="1600" dirty="0">
+                <a:solidFill>
+                  <a:srgbClr val="6B5D46"/>
+                </a:solidFill>
+                <a:latin typeface="EBGaramond" pitchFamily="34" charset="0"/>
+                <a:ea typeface="EBGaramond" pitchFamily="34" charset="-122"/>
+                <a:cs typeface="EBGaramond" pitchFamily="34" charset="-120"/>
+              </a:rPr>
+              <a:t>III</a:t>
+            </a:r>
+            <a:pPr algn="ctr" indent="0" marL="0">
+              <a:buNone/>
+            </a:pPr>
+            <a:r>
+              <a:rPr lang="en-US" sz="1600" dirty="0">
+                <a:solidFill>
+                  <a:srgbClr val="3A2E1F"/>
+                </a:solidFill>
+                <a:latin typeface="EBGaramond" pitchFamily="34" charset="0"/>
+                <a:ea typeface="EBGaramond" pitchFamily="34" charset="-122"/>
+                <a:cs typeface="EBGaramond" pitchFamily="34" charset="-120"/>
+              </a:rPr>
+              <a:t> </a:t>
+            </a:r>
+            <a:pPr algn="ctr" indent="0" marL="0">
+              <a:buNone/>
+            </a:pPr>
+            <a:r>
+              <a:rPr lang="en-US" sz="1600" dirty="0">
+                <a:solidFill>
+                  <a:srgbClr val="3A2E1F"/>
+                </a:solidFill>
+                <a:latin typeface="EBGaramond" pitchFamily="34" charset="0"/>
+                <a:ea typeface="EBGaramond" pitchFamily="34" charset="-122"/>
+                <a:cs typeface="EBGaramond" pitchFamily="34" charset="-120"/>
+              </a:rPr>
+              <a:t>Who signs the numbers we publish?</a:t>
+            </a:r>
+            <a:pPr algn="ctr" indent="0" marL="0">
+              <a:buNone/>
+            </a:pPr>
+            <a:r>
+              <a:rPr lang="en-US" sz="1600" dirty="0">
+                <a:solidFill>
+                  <a:srgbClr val="3A2E1F"/>
+                </a:solidFill>
+                <a:latin typeface="EBGaramond" pitchFamily="34" charset="0"/>
+                <a:ea typeface="EBGaramond" pitchFamily="34" charset="-122"/>
+                <a:cs typeface="EBGaramond" pitchFamily="34" charset="-120"/>
+              </a:rPr>
+              <a:t> </a:t>
+            </a:r>
+            <a:pPr algn="ctr" indent="0" marL="0">
+              <a:buNone/>
+            </a:pPr>
+            <a:r>
+              <a:rPr lang="en-US" sz="1600" dirty="0">
+                <a:solidFill>
+                  <a:srgbClr val="6B5D46"/>
+                </a:solidFill>
+                <a:latin typeface="EBGaramond" pitchFamily="34" charset="0"/>
+                <a:ea typeface="EBGaramond" pitchFamily="34" charset="-122"/>
+                <a:cs typeface="EBGaramond" pitchFamily="34" charset="-120"/>
+              </a:rPr>
+              <a:t>The signature belongs to whoever watched them measured.</a:t>
+            </a:r>
+            <a:endParaRPr lang="en-US" sz="1600" dirty="0"/>
+          </a:p>
+        </p:txBody>
+      </p:sp>
+      <p:sp>
+        <p:nvSpPr>
+          <p:cNvPr id="6" name="Text 4"/>
+          <p:cNvSpPr/>
+          <p:nvPr/>
+        </p:nvSpPr>
+        <p:spPr>
+          <a:xfrm>
+            <a:off x="948572" y="2003822"/>
+            <a:ext cx="10291808" cy="253802"/>
+          </a:xfrm>
+          <a:prstGeom prst="rect">
+            <a:avLst/>
+          </a:prstGeom>
+          <a:noFill/>
+          <a:ln/>
+        </p:spPr>
+        <p:txBody>
+          <a:bodyPr wrap="square" lIns="0" tIns="0" rIns="0" bIns="0" rtlCol="0" anchor="t"/>
+          <a:lstStyle/>
+          <a:p>
+            <a:pPr algn="ctr" indent="0" marL="0">
+              <a:lnSpc>
+                <a:spcPts val="2000"/>
+              </a:lnSpc>
+              <a:buNone/>
+            </a:pPr>
+            <a:r>
+              <a:rPr lang="en-US" sz="1333" b="1" dirty="0">
+                <a:solidFill>
+                  <a:srgbClr val="6B5D46"/>
+                </a:solidFill>
+                <a:latin typeface="EBGaramond" pitchFamily="34" charset="0"/>
+                <a:ea typeface="EBGaramond" pitchFamily="34" charset="-122"/>
+                <a:cs typeface="EBGaramond" pitchFamily="34" charset="-120"/>
+              </a:rPr>
+              <a:t>I</a:t>
+            </a:r>
+            <a:endParaRPr lang="en-US" sz="1333" dirty="0"/>
+          </a:p>
+        </p:txBody>
+      </p:sp>
+      <p:sp>
+        <p:nvSpPr>
+          <p:cNvPr id="7" name="Text 5"/>
+          <p:cNvSpPr/>
+          <p:nvPr/>
+        </p:nvSpPr>
+        <p:spPr>
+          <a:xfrm>
+            <a:off x="948572" y="2325291"/>
+            <a:ext cx="10291808" cy="434181"/>
+          </a:xfrm>
+          <a:prstGeom prst="rect">
+            <a:avLst/>
+          </a:prstGeom>
+          <a:noFill/>
+          <a:ln/>
+        </p:spPr>
+        <p:txBody>
+          <a:bodyPr wrap="square" lIns="0" tIns="0" rIns="0" bIns="0" rtlCol="0" anchor="t"/>
+          <a:lstStyle/>
+          <a:p>
+            <a:pPr algn="ctr" indent="0" marL="0">
+              <a:lnSpc>
+                <a:spcPts val="3420"/>
+              </a:lnSpc>
+              <a:spcBef>
+                <a:spcPts val="533"/>
+              </a:spcBef>
+              <a:buNone/>
+            </a:pPr>
+            <a:r>
+              <a:rPr lang="en-US" sz="2533" dirty="0">
+                <a:solidFill>
+                  <a:srgbClr val="3A2E1F"/>
+                </a:solidFill>
+                <a:latin typeface="PlayfairDisplay" pitchFamily="34" charset="0"/>
+                <a:ea typeface="PlayfairDisplay" pitchFamily="34" charset="-122"/>
+                <a:cs typeface="PlayfairDisplay" pitchFamily="34" charset="-120"/>
+              </a:rPr>
+              <a:t>Does the drill go on the calendar?</a:t>
+            </a:r>
+            <a:endParaRPr lang="en-US" sz="2533" dirty="0"/>
+          </a:p>
+        </p:txBody>
+      </p:sp>
+      <p:sp>
+        <p:nvSpPr>
+          <p:cNvPr id="8" name="Text 6"/>
+          <p:cNvSpPr/>
+          <p:nvPr/>
+        </p:nvSpPr>
+        <p:spPr>
+          <a:xfrm>
+            <a:off x="2122844" y="2827139"/>
+            <a:ext cx="7943066" cy="304800"/>
+          </a:xfrm>
+          <a:prstGeom prst="rect">
+            <a:avLst/>
+          </a:prstGeom>
+          <a:noFill/>
+          <a:ln/>
+        </p:spPr>
+        <p:txBody>
+          <a:bodyPr wrap="square" lIns="0" tIns="0" rIns="0" bIns="0" rtlCol="0" anchor="t"/>
+          <a:lstStyle/>
+          <a:p>
+            <a:pPr algn="ctr" indent="0" marL="0">
+              <a:lnSpc>
+                <a:spcPts val="2400"/>
+              </a:lnSpc>
+              <a:spcBef>
+                <a:spcPts val="533"/>
+              </a:spcBef>
+              <a:buNone/>
+            </a:pPr>
+            <a:r>
+              <a:rPr lang="en-US" sz="1600" i="1" dirty="0">
+                <a:solidFill>
+                  <a:srgbClr val="6B5D46"/>
+                </a:solidFill>
+                <a:latin typeface="EBGaramond" pitchFamily="34" charset="0"/>
+                <a:ea typeface="EBGaramond" pitchFamily="34" charset="-122"/>
+                <a:cs typeface="EBGaramond" pitchFamily="34" charset="-120"/>
+              </a:rPr>
+              <a:t>A date and an owner, or it stays an intention.</a:t>
+            </a:r>
+            <a:endParaRPr lang="en-US" sz="1600" dirty="0"/>
+          </a:p>
+        </p:txBody>
+      </p:sp>
+      <p:sp>
+        <p:nvSpPr>
+          <p:cNvPr id="9" name="Text 7"/>
+          <p:cNvSpPr/>
+          <p:nvPr/>
+        </p:nvSpPr>
+        <p:spPr>
+          <a:xfrm>
+            <a:off x="948572" y="3367484"/>
+            <a:ext cx="10291808" cy="253802"/>
+          </a:xfrm>
+          <a:prstGeom prst="rect">
+            <a:avLst/>
+          </a:prstGeom>
+          <a:noFill/>
+          <a:ln/>
+        </p:spPr>
+        <p:txBody>
+          <a:bodyPr wrap="square" lIns="0" tIns="0" rIns="0" bIns="0" rtlCol="0" anchor="t"/>
+          <a:lstStyle/>
+          <a:p>
+            <a:pPr algn="ctr" indent="0" marL="0">
+              <a:lnSpc>
+                <a:spcPts val="2000"/>
+              </a:lnSpc>
+              <a:buNone/>
+            </a:pPr>
+            <a:r>
+              <a:rPr lang="en-US" sz="1333" b="1" dirty="0">
+                <a:solidFill>
+                  <a:srgbClr val="6B5D46"/>
+                </a:solidFill>
+                <a:latin typeface="EBGaramond" pitchFamily="34" charset="0"/>
+                <a:ea typeface="EBGaramond" pitchFamily="34" charset="-122"/>
+                <a:cs typeface="EBGaramond" pitchFamily="34" charset="-120"/>
+              </a:rPr>
+              <a:t>II</a:t>
+            </a:r>
+            <a:endParaRPr lang="en-US" sz="1333" dirty="0"/>
+          </a:p>
+        </p:txBody>
+      </p:sp>
+      <p:sp>
+        <p:nvSpPr>
+          <p:cNvPr id="10" name="Text 8"/>
+          <p:cNvSpPr/>
+          <p:nvPr/>
+        </p:nvSpPr>
+        <p:spPr>
+          <a:xfrm>
+            <a:off x="948572" y="3688953"/>
+            <a:ext cx="10291808" cy="434181"/>
+          </a:xfrm>
+          <a:prstGeom prst="rect">
+            <a:avLst/>
+          </a:prstGeom>
+          <a:noFill/>
+          <a:ln/>
+        </p:spPr>
+        <p:txBody>
+          <a:bodyPr wrap="square" lIns="0" tIns="0" rIns="0" bIns="0" rtlCol="0" anchor="t"/>
+          <a:lstStyle/>
+          <a:p>
+            <a:pPr algn="ctr" indent="0" marL="0">
+              <a:lnSpc>
+                <a:spcPts val="3420"/>
+              </a:lnSpc>
+              <a:spcBef>
+                <a:spcPts val="533"/>
+              </a:spcBef>
+              <a:buNone/>
+            </a:pPr>
+            <a:r>
+              <a:rPr lang="en-US" sz="2533" dirty="0">
+                <a:solidFill>
+                  <a:srgbClr val="3A2E1F"/>
+                </a:solidFill>
+                <a:latin typeface="PlayfairDisplay" pitchFamily="34" charset="0"/>
+                <a:ea typeface="PlayfairDisplay" pitchFamily="34" charset="-122"/>
+                <a:cs typeface="PlayfairDisplay" pitchFamily="34" charset="-120"/>
+              </a:rPr>
+              <a:t>What stops while the drill runs?</a:t>
+            </a:r>
+            <a:endParaRPr lang="en-US" sz="2533" dirty="0"/>
+          </a:p>
+        </p:txBody>
+      </p:sp>
+      <p:sp>
+        <p:nvSpPr>
+          <p:cNvPr id="11" name="Text 9"/>
+          <p:cNvSpPr/>
+          <p:nvPr/>
+        </p:nvSpPr>
+        <p:spPr>
+          <a:xfrm>
+            <a:off x="2122844" y="4190802"/>
+            <a:ext cx="7943066" cy="304800"/>
+          </a:xfrm>
+          <a:prstGeom prst="rect">
+            <a:avLst/>
+          </a:prstGeom>
+          <a:noFill/>
+          <a:ln/>
+        </p:spPr>
+        <p:txBody>
+          <a:bodyPr wrap="square" lIns="0" tIns="0" rIns="0" bIns="0" rtlCol="0" anchor="t"/>
+          <a:lstStyle/>
+          <a:p>
+            <a:pPr algn="ctr" indent="0" marL="0">
+              <a:lnSpc>
+                <a:spcPts val="2400"/>
+              </a:lnSpc>
+              <a:spcBef>
+                <a:spcPts val="533"/>
+              </a:spcBef>
+              <a:buNone/>
+            </a:pPr>
+            <a:r>
+              <a:rPr lang="en-US" sz="1600" i="1" dirty="0">
+                <a:solidFill>
+                  <a:srgbClr val="6B5D46"/>
+                </a:solidFill>
+                <a:latin typeface="EBGaramond" pitchFamily="34" charset="0"/>
+                <a:ea typeface="EBGaramond" pitchFamily="34" charset="-122"/>
+                <a:cs typeface="EBGaramond" pitchFamily="34" charset="-120"/>
+              </a:rPr>
+              <a:t>Name the service that goes quiet, and who is told before it does.</a:t>
+            </a:r>
+            <a:endParaRPr lang="en-US" sz="1600" dirty="0"/>
+          </a:p>
+        </p:txBody>
+      </p:sp>
+      <p:sp>
+        <p:nvSpPr>
+          <p:cNvPr id="12" name="Text 10"/>
+          <p:cNvSpPr/>
+          <p:nvPr/>
+        </p:nvSpPr>
+        <p:spPr>
+          <a:xfrm>
+            <a:off x="948572" y="4731147"/>
+            <a:ext cx="10291808" cy="253802"/>
+          </a:xfrm>
+          <a:prstGeom prst="rect">
+            <a:avLst/>
+          </a:prstGeom>
+          <a:noFill/>
+          <a:ln/>
+        </p:spPr>
+        <p:txBody>
+          <a:bodyPr wrap="square" lIns="0" tIns="0" rIns="0" bIns="0" rtlCol="0" anchor="t"/>
+          <a:lstStyle/>
+          <a:p>
+            <a:pPr algn="ctr" indent="0" marL="0">
+              <a:lnSpc>
+                <a:spcPts val="2000"/>
+              </a:lnSpc>
+              <a:buNone/>
+            </a:pPr>
+            <a:r>
+              <a:rPr lang="en-US" sz="1333" b="1" dirty="0">
+                <a:solidFill>
+                  <a:srgbClr val="6B5D46"/>
+                </a:solidFill>
+                <a:latin typeface="EBGaramond" pitchFamily="34" charset="0"/>
+                <a:ea typeface="EBGaramond" pitchFamily="34" charset="-122"/>
+                <a:cs typeface="EBGaramond" pitchFamily="34" charset="-120"/>
+              </a:rPr>
+              <a:t>III</a:t>
+            </a:r>
+            <a:endParaRPr lang="en-US" sz="1333" dirty="0"/>
+          </a:p>
+        </p:txBody>
+      </p:sp>
+      <p:sp>
+        <p:nvSpPr>
+          <p:cNvPr id="13" name="Text 11"/>
+          <p:cNvSpPr/>
+          <p:nvPr/>
+        </p:nvSpPr>
+        <p:spPr>
+          <a:xfrm>
+            <a:off x="948572" y="5052616"/>
+            <a:ext cx="10291808" cy="434181"/>
+          </a:xfrm>
+          <a:prstGeom prst="rect">
+            <a:avLst/>
+          </a:prstGeom>
+          <a:noFill/>
+          <a:ln/>
+        </p:spPr>
+        <p:txBody>
+          <a:bodyPr wrap="square" lIns="0" tIns="0" rIns="0" bIns="0" rtlCol="0" anchor="t"/>
+          <a:lstStyle/>
+          <a:p>
+            <a:pPr algn="ctr" indent="0" marL="0">
+              <a:lnSpc>
+                <a:spcPts val="3420"/>
+              </a:lnSpc>
+              <a:spcBef>
+                <a:spcPts val="533"/>
+              </a:spcBef>
+              <a:buNone/>
+            </a:pPr>
+            <a:r>
+              <a:rPr lang="en-US" sz="2533" dirty="0">
+                <a:solidFill>
+                  <a:srgbClr val="3A2E1F"/>
+                </a:solidFill>
+                <a:latin typeface="PlayfairDisplay" pitchFamily="34" charset="0"/>
+                <a:ea typeface="PlayfairDisplay" pitchFamily="34" charset="-122"/>
+                <a:cs typeface="PlayfairDisplay" pitchFamily="34" charset="-120"/>
+              </a:rPr>
+              <a:t>Who signs the numbers we publish?</a:t>
+            </a:r>
+            <a:endParaRPr lang="en-US" sz="2533" dirty="0"/>
+          </a:p>
+        </p:txBody>
+      </p:sp>
+      <p:sp>
+        <p:nvSpPr>
+          <p:cNvPr id="14" name="Text 12"/>
+          <p:cNvSpPr/>
+          <p:nvPr/>
+        </p:nvSpPr>
+        <p:spPr>
+          <a:xfrm>
+            <a:off x="2122844" y="5554464"/>
+            <a:ext cx="7943066" cy="304800"/>
+          </a:xfrm>
+          <a:prstGeom prst="rect">
+            <a:avLst/>
+          </a:prstGeom>
+          <a:noFill/>
+          <a:ln/>
+        </p:spPr>
+        <p:txBody>
+          <a:bodyPr wrap="square" lIns="0" tIns="0" rIns="0" bIns="0" rtlCol="0" anchor="t"/>
+          <a:lstStyle/>
+          <a:p>
+            <a:pPr algn="ctr" indent="0" marL="0">
+              <a:lnSpc>
+                <a:spcPts val="2400"/>
+              </a:lnSpc>
+              <a:spcBef>
+                <a:spcPts val="533"/>
+              </a:spcBef>
+              <a:buNone/>
+            </a:pPr>
+            <a:r>
+              <a:rPr lang="en-US" sz="1600" i="1" dirty="0">
+                <a:solidFill>
+                  <a:srgbClr val="6B5D46"/>
+                </a:solidFill>
+                <a:latin typeface="EBGaramond" pitchFamily="34" charset="0"/>
+                <a:ea typeface="EBGaramond" pitchFamily="34" charset="-122"/>
+                <a:cs typeface="EBGaramond" pitchFamily="34" charset="-120"/>
+              </a:rPr>
+              <a:t>The signature belongs to whoever watched them measured.</a:t>
+            </a:r>
+            <a:endParaRPr lang="en-US" sz="1600" dirty="0"/>
+          </a:p>
+        </p:txBody>
+      </p:sp>
+      <p:sp>
+        <p:nvSpPr>
+          <p:cNvPr id="15" name="Text 13"/>
+          <p:cNvSpPr/>
+          <p:nvPr/>
+        </p:nvSpPr>
+        <p:spPr>
+          <a:xfrm>
+            <a:off x="847672" y="6096198"/>
+            <a:ext cx="10291808" cy="253802"/>
+          </a:xfrm>
+          <a:prstGeom prst="rect">
+            <a:avLst/>
+          </a:prstGeom>
+          <a:noFill/>
+          <a:ln/>
+        </p:spPr>
+        <p:txBody>
+          <a:bodyPr wrap="square" lIns="0" tIns="0" rIns="0" bIns="0" rtlCol="0" anchor="t"/>
+          <a:lstStyle/>
+          <a:p>
+            <a:pPr algn="r" indent="0" marL="0">
+              <a:lnSpc>
+                <a:spcPts val="2000"/>
+              </a:lnSpc>
+              <a:buNone/>
+            </a:pPr>
+            <a:r>
+              <a:rPr lang="en-US" sz="1333" i="1" dirty="0">
+                <a:solidFill>
+                  <a:srgbClr val="6B5D46"/>
+                </a:solidFill>
+                <a:latin typeface="EBGaramond" pitchFamily="34" charset="0"/>
+                <a:ea typeface="EBGaramond" pitchFamily="34" charset="-122"/>
+                <a:cs typeface="EBGaramond" pitchFamily="34" charset="-120"/>
+              </a:rPr>
+              <a:t>No RPO or RTO figures are asserted in this deck — those numbers are yours to set and to measure.</a:t>
+            </a:r>
+            <a:endParaRPr lang="en-US" sz="1333" dirty="0"/>
+          </a:p>
+        </p:txBody>
+      </p:sp>
     </p:spTree>
   </p:cSld>
   <p:clrMapOvr>

--- a/decks/backup-restore/backup-restore.pptx
+++ b/decks/backup-restore/backup-restore.pptx
@@ -1249,7 +1249,7 @@
           <a:ln/>
         </p:spPr>
         <p:txBody>
-          <a:bodyPr wrap="square" lIns="0" tIns="0" rIns="0" bIns="0" rtlCol="0" anchor="t"/>
+          <a:bodyPr wrap="none" lIns="0" tIns="0" rIns="0" bIns="0" rtlCol="0" anchor="t"/>
           <a:lstStyle/>
           <a:p>
             <a:pPr algn="ctr" indent="0" marL="0">
@@ -1321,7 +1321,9 @@
           <a:ln/>
         </p:spPr>
         <p:txBody>
-          <a:bodyPr wrap="square" lIns="0" tIns="0" rIns="0" bIns="0" rtlCol="0" anchor="t"/>
+          <a:bodyPr wrap="square" lIns="0" tIns="0" rIns="0" bIns="0" rtlCol="0" anchor="t">
+            <a:normAutofit/>
+          </a:bodyPr>
           <a:lstStyle/>
           <a:p>
             <a:pPr algn="ctr" indent="0" marL="0">
@@ -1413,7 +1415,9 @@
           <a:ln/>
         </p:spPr>
         <p:txBody>
-          <a:bodyPr wrap="square" lIns="0" tIns="0" rIns="0" bIns="0" rtlCol="0" anchor="t"/>
+          <a:bodyPr wrap="square" lIns="0" tIns="0" rIns="0" bIns="0" rtlCol="0" anchor="t">
+            <a:normAutofit/>
+          </a:bodyPr>
           <a:lstStyle/>
           <a:p>
             <a:pPr algn="ctr" indent="0" marL="0">
@@ -1455,7 +1459,7 @@
           <a:ln/>
         </p:spPr>
         <p:txBody>
-          <a:bodyPr wrap="square" lIns="0" tIns="0" rIns="0" bIns="0" rtlCol="0" anchor="t"/>
+          <a:bodyPr wrap="none" lIns="0" tIns="0" rIns="0" bIns="0" rtlCol="0" anchor="t"/>
           <a:lstStyle/>
           <a:p>
             <a:pPr algn="ctr" indent="0" marL="0">
@@ -1500,7 +1504,7 @@
           <a:ln/>
         </p:spPr>
         <p:txBody>
-          <a:bodyPr wrap="square" lIns="0" tIns="0" rIns="0" bIns="0" rtlCol="0" anchor="t"/>
+          <a:bodyPr wrap="none" lIns="0" tIns="0" rIns="0" bIns="0" rtlCol="0" anchor="t"/>
           <a:lstStyle/>
           <a:p>
             <a:pPr algn="r" indent="0" marL="0">
@@ -1574,7 +1578,7 @@
           <a:ln/>
         </p:spPr>
         <p:txBody>
-          <a:bodyPr wrap="square" lIns="0" tIns="0" rIns="0" bIns="0" rtlCol="0" anchor="t"/>
+          <a:bodyPr wrap="none" lIns="0" tIns="0" rIns="0" bIns="0" rtlCol="0" anchor="t"/>
           <a:lstStyle/>
           <a:p>
             <a:pPr algn="ctr" indent="0" marL="0">
@@ -1616,7 +1620,7 @@
           <a:ln/>
         </p:spPr>
         <p:txBody>
-          <a:bodyPr wrap="square" lIns="0" tIns="0" rIns="0" bIns="0" rtlCol="0" anchor="t"/>
+          <a:bodyPr wrap="none" lIns="0" tIns="0" rIns="0" bIns="0" rtlCol="0" anchor="t"/>
           <a:lstStyle/>
           <a:p>
             <a:pPr algn="ctr" indent="0" marL="0">
@@ -1675,213 +1679,7 @@
       </p:sp>
       <p:sp>
         <p:nvSpPr>
-          <p:cNvPr id="5" name="Text 3"/>
-          <p:cNvSpPr/>
-          <p:nvPr/>
-        </p:nvSpPr>
-        <p:spPr>
-          <a:xfrm>
-            <a:off x="1049472" y="2105223"/>
-            <a:ext cx="10090008" cy="3081734"/>
-          </a:xfrm>
-          <a:prstGeom prst="rect">
-            <a:avLst/>
-          </a:prstGeom>
-          <a:noFill/>
-          <a:ln/>
-        </p:spPr>
-        <p:txBody>
-          <a:bodyPr wrap="square" lIns="0" tIns="0" rIns="0" bIns="0" rtlCol="0" anchor="t"/>
-          <a:lstStyle/>
-          <a:p>
-            <a:pPr algn="l" marL="342900" indent="-342900">
-              <a:buSzPct val="100000"/>
-              <a:buChar char="•"/>
-            </a:pPr>
-            <a:r>
-              <a:rPr lang="en-US" sz="1600" dirty="0">
-                <a:solidFill>
-                  <a:srgbClr val="3A2E1F"/>
-                </a:solidFill>
-                <a:latin typeface="EBGaramond" pitchFamily="34" charset="0"/>
-                <a:ea typeface="EBGaramond" pitchFamily="34" charset="-122"/>
-                <a:cs typeface="EBGaramond" pitchFamily="34" charset="-120"/>
-              </a:rPr>
-              <a:t>Media nobody has read back</a:t>
-            </a:r>
-            <a:pPr algn="l" indent="0" marL="0">
-              <a:buNone/>
-            </a:pPr>
-            <a:r>
-              <a:rPr lang="en-US" sz="1600" dirty="0">
-                <a:solidFill>
-                  <a:srgbClr val="3A2E1F"/>
-                </a:solidFill>
-                <a:latin typeface="EBGaramond" pitchFamily="34" charset="0"/>
-                <a:ea typeface="EBGaramond" pitchFamily="34" charset="-122"/>
-                <a:cs typeface="EBGaramond" pitchFamily="34" charset="-120"/>
-              </a:rPr>
-              <a:t> </a:t>
-            </a:r>
-            <a:pPr algn="l" indent="0" marL="0">
-              <a:buNone/>
-            </a:pPr>
-            <a:r>
-              <a:rPr lang="en-US" sz="1600" dirty="0">
-                <a:solidFill>
-                  <a:srgbClr val="3A2E1F"/>
-                </a:solidFill>
-                <a:latin typeface="EBGaramond" pitchFamily="34" charset="0"/>
-                <a:ea typeface="EBGaramond" pitchFamily="34" charset="-122"/>
-                <a:cs typeface="EBGaramond" pitchFamily="34" charset="-120"/>
-              </a:rPr>
-              <a:t>The job succeeded. The bytes never did.</a:t>
-            </a:r>
-            <a:endParaRPr lang="en-US" sz="1600" dirty="0"/>
-          </a:p>
-          <a:p>
-            <a:pPr algn="l" marL="342900" indent="-342900">
-              <a:buSzPct val="100000"/>
-              <a:buChar char="•"/>
-            </a:pPr>
-            <a:r>
-              <a:rPr lang="en-US" sz="1600" dirty="0">
-                <a:solidFill>
-                  <a:srgbClr val="3A2E1F"/>
-                </a:solidFill>
-                <a:latin typeface="EBGaramond" pitchFamily="34" charset="0"/>
-                <a:ea typeface="EBGaramond" pitchFamily="34" charset="-122"/>
-                <a:cs typeface="EBGaramond" pitchFamily="34" charset="-120"/>
-              </a:rPr>
-              <a:t>A schema left out of the dump</a:t>
-            </a:r>
-            <a:pPr algn="l" indent="0" marL="0">
-              <a:buNone/>
-            </a:pPr>
-            <a:r>
-              <a:rPr lang="en-US" sz="1600" dirty="0">
-                <a:solidFill>
-                  <a:srgbClr val="3A2E1F"/>
-                </a:solidFill>
-                <a:latin typeface="EBGaramond" pitchFamily="34" charset="0"/>
-                <a:ea typeface="EBGaramond" pitchFamily="34" charset="-122"/>
-                <a:cs typeface="EBGaramond" pitchFamily="34" charset="-120"/>
-              </a:rPr>
-              <a:t> </a:t>
-            </a:r>
-            <a:pPr algn="l" indent="0" marL="0">
-              <a:buNone/>
-            </a:pPr>
-            <a:r>
-              <a:rPr lang="en-US" sz="1600" dirty="0">
-                <a:solidFill>
-                  <a:srgbClr val="3A2E1F"/>
-                </a:solidFill>
-                <a:latin typeface="EBGaramond" pitchFamily="34" charset="0"/>
-                <a:ea typeface="EBGaramond" pitchFamily="34" charset="-122"/>
-                <a:cs typeface="EBGaramond" pitchFamily="34" charset="-120"/>
-              </a:rPr>
-              <a:t>Rows come back. The database does not.</a:t>
-            </a:r>
-            <a:endParaRPr lang="en-US" sz="1600" dirty="0"/>
-          </a:p>
-          <a:p>
-            <a:pPr algn="l" marL="342900" indent="-342900">
-              <a:buSzPct val="100000"/>
-              <a:buChar char="•"/>
-            </a:pPr>
-            <a:r>
-              <a:rPr lang="en-US" sz="1600" dirty="0">
-                <a:solidFill>
-                  <a:srgbClr val="3A2E1F"/>
-                </a:solidFill>
-                <a:latin typeface="EBGaramond" pitchFamily="34" charset="0"/>
-                <a:ea typeface="EBGaramond" pitchFamily="34" charset="-122"/>
-                <a:cs typeface="EBGaramond" pitchFamily="34" charset="-120"/>
-              </a:rPr>
-              <a:t>A dependency that is down too</a:t>
-            </a:r>
-            <a:pPr algn="l" indent="0" marL="0">
-              <a:buNone/>
-            </a:pPr>
-            <a:r>
-              <a:rPr lang="en-US" sz="1600" dirty="0">
-                <a:solidFill>
-                  <a:srgbClr val="3A2E1F"/>
-                </a:solidFill>
-                <a:latin typeface="EBGaramond" pitchFamily="34" charset="0"/>
-                <a:ea typeface="EBGaramond" pitchFamily="34" charset="-122"/>
-                <a:cs typeface="EBGaramond" pitchFamily="34" charset="-120"/>
-              </a:rPr>
-              <a:t> </a:t>
-            </a:r>
-            <a:pPr algn="l" indent="0" marL="0">
-              <a:buNone/>
-            </a:pPr>
-            <a:r>
-              <a:rPr lang="en-US" sz="1600" dirty="0">
-                <a:solidFill>
-                  <a:srgbClr val="3A2E1F"/>
-                </a:solidFill>
-                <a:latin typeface="EBGaramond" pitchFamily="34" charset="0"/>
-                <a:ea typeface="EBGaramond" pitchFamily="34" charset="-122"/>
-                <a:cs typeface="EBGaramond" pitchFamily="34" charset="-120"/>
-              </a:rPr>
-              <a:t>The restore needs what the outage took.</a:t>
-            </a:r>
-            <a:endParaRPr lang="en-US" sz="1600" dirty="0"/>
-          </a:p>
-          <a:p>
-            <a:pPr algn="l" marL="342900" indent="-342900">
-              <a:buSzPct val="100000"/>
-              <a:buChar char="•"/>
-            </a:pPr>
-            <a:r>
-              <a:rPr lang="en-US" sz="1600" dirty="0">
-                <a:solidFill>
-                  <a:srgbClr val="3A2E1F"/>
-                </a:solidFill>
-                <a:latin typeface="EBGaramond" pitchFamily="34" charset="0"/>
-                <a:ea typeface="EBGaramond" pitchFamily="34" charset="-122"/>
-                <a:cs typeface="EBGaramond" pitchFamily="34" charset="-120"/>
-              </a:rPr>
-              <a:t>Credentials nobody on shift has</a:t>
-            </a:r>
-            <a:pPr algn="l" indent="0" marL="0">
-              <a:buNone/>
-            </a:pPr>
-            <a:r>
-              <a:rPr lang="en-US" sz="1600" dirty="0">
-                <a:solidFill>
-                  <a:srgbClr val="3A2E1F"/>
-                </a:solidFill>
-                <a:latin typeface="EBGaramond" pitchFamily="34" charset="0"/>
-                <a:ea typeface="EBGaramond" pitchFamily="34" charset="-122"/>
-                <a:cs typeface="EBGaramond" pitchFamily="34" charset="-120"/>
-              </a:rPr>
-              <a:t> </a:t>
-            </a:r>
-            <a:pPr algn="l" indent="0" marL="0">
-              <a:buNone/>
-            </a:pPr>
-            <a:r>
-              <a:rPr lang="en-US" sz="1600" dirty="0">
-                <a:solidFill>
-                  <a:srgbClr val="3A2E1F"/>
-                </a:solidFill>
-                <a:latin typeface="EBGaramond" pitchFamily="34" charset="0"/>
-                <a:ea typeface="EBGaramond" pitchFamily="34" charset="-122"/>
-                <a:cs typeface="EBGaramond" pitchFamily="34" charset="-120"/>
-              </a:rPr>
-              <a:t>The path exists. Nobody can walk it.</a:t>
-            </a:r>
-            <a:endParaRPr lang="en-US" sz="1600" dirty="0"/>
-          </a:p>
-        </p:txBody>
-      </p:sp>
-      <p:sp>
-        <p:nvSpPr>
-          <p:cNvPr id="6" name="Shape 4"/>
+          <p:cNvPr id="5" name="Shape 3"/>
           <p:cNvSpPr/>
           <p:nvPr/>
         </p:nvSpPr>
@@ -1901,10 +1699,14 @@
             <a:prstDash val="solid"/>
           </a:ln>
         </p:spPr>
-      </p:sp>
-      <p:sp>
-        <p:nvSpPr>
-          <p:cNvPr id="7" name="Shape 5"/>
+        <p:txBody>
+          <a:bodyPr/>
+          <a:p/>
+        </p:txBody>
+      </p:sp>
+      <p:sp>
+        <p:nvSpPr>
+          <p:cNvPr id="6" name="Shape 4"/>
           <p:cNvSpPr/>
           <p:nvPr/>
         </p:nvSpPr>
@@ -1924,10 +1726,14 @@
             <a:prstDash val="solid"/>
           </a:ln>
         </p:spPr>
-      </p:sp>
-      <p:sp>
-        <p:nvSpPr>
-          <p:cNvPr id="8" name="Text 6"/>
+        <p:txBody>
+          <a:bodyPr/>
+          <a:p/>
+        </p:txBody>
+      </p:sp>
+      <p:sp>
+        <p:nvSpPr>
+          <p:cNvPr id="7" name="Text 5"/>
           <p:cNvSpPr/>
           <p:nvPr/>
         </p:nvSpPr>
@@ -1943,7 +1749,7 @@
           <a:ln/>
         </p:spPr>
         <p:txBody>
-          <a:bodyPr wrap="square" lIns="0" tIns="0" rIns="0" bIns="0" rtlCol="0" anchor="t"/>
+          <a:bodyPr wrap="none" lIns="0" tIns="0" rIns="0" bIns="0" rtlCol="0" anchor="t"/>
           <a:lstStyle/>
           <a:p>
             <a:pPr algn="ctr" indent="0" marL="0">
@@ -1969,7 +1775,7 @@
       </p:sp>
       <p:sp>
         <p:nvSpPr>
-          <p:cNvPr id="9" name="Text 7"/>
+          <p:cNvPr id="8" name="Text 6"/>
           <p:cNvSpPr/>
           <p:nvPr/>
         </p:nvSpPr>
@@ -1985,7 +1791,7 @@
           <a:ln/>
         </p:spPr>
         <p:txBody>
-          <a:bodyPr wrap="square" lIns="0" tIns="0" rIns="0" bIns="0" rtlCol="0" anchor="t"/>
+          <a:bodyPr wrap="none" lIns="0" tIns="0" rIns="0" bIns="0" rtlCol="0" anchor="t"/>
           <a:lstStyle/>
           <a:p>
             <a:pPr algn="ctr" indent="0" marL="0">
@@ -2014,7 +1820,7 @@
       </p:sp>
       <p:sp>
         <p:nvSpPr>
-          <p:cNvPr id="10" name="Shape 8"/>
+          <p:cNvPr id="9" name="Shape 7"/>
           <p:cNvSpPr/>
           <p:nvPr/>
         </p:nvSpPr>
@@ -2034,10 +1840,14 @@
             <a:prstDash val="solid"/>
           </a:ln>
         </p:spPr>
-      </p:sp>
-      <p:sp>
-        <p:nvSpPr>
-          <p:cNvPr id="11" name="Shape 9"/>
+        <p:txBody>
+          <a:bodyPr/>
+          <a:p/>
+        </p:txBody>
+      </p:sp>
+      <p:sp>
+        <p:nvSpPr>
+          <p:cNvPr id="10" name="Shape 8"/>
           <p:cNvSpPr/>
           <p:nvPr/>
         </p:nvSpPr>
@@ -2057,10 +1867,14 @@
             <a:prstDash val="solid"/>
           </a:ln>
         </p:spPr>
-      </p:sp>
-      <p:sp>
-        <p:nvSpPr>
-          <p:cNvPr id="12" name="Text 10"/>
+        <p:txBody>
+          <a:bodyPr/>
+          <a:p/>
+        </p:txBody>
+      </p:sp>
+      <p:sp>
+        <p:nvSpPr>
+          <p:cNvPr id="11" name="Text 9"/>
           <p:cNvSpPr/>
           <p:nvPr/>
         </p:nvSpPr>
@@ -2076,7 +1890,7 @@
           <a:ln/>
         </p:spPr>
         <p:txBody>
-          <a:bodyPr wrap="square" lIns="0" tIns="0" rIns="0" bIns="0" rtlCol="0" anchor="t"/>
+          <a:bodyPr wrap="none" lIns="0" tIns="0" rIns="0" bIns="0" rtlCol="0" anchor="t"/>
           <a:lstStyle/>
           <a:p>
             <a:pPr algn="ctr" indent="0" marL="0">
@@ -2102,7 +1916,7 @@
       </p:sp>
       <p:sp>
         <p:nvSpPr>
-          <p:cNvPr id="13" name="Text 11"/>
+          <p:cNvPr id="12" name="Text 10"/>
           <p:cNvSpPr/>
           <p:nvPr/>
         </p:nvSpPr>
@@ -2118,7 +1932,7 @@
           <a:ln/>
         </p:spPr>
         <p:txBody>
-          <a:bodyPr wrap="square" lIns="0" tIns="0" rIns="0" bIns="0" rtlCol="0" anchor="t"/>
+          <a:bodyPr wrap="none" lIns="0" tIns="0" rIns="0" bIns="0" rtlCol="0" anchor="t"/>
           <a:lstStyle/>
           <a:p>
             <a:pPr algn="ctr" indent="0" marL="0">
@@ -2147,7 +1961,7 @@
       </p:sp>
       <p:sp>
         <p:nvSpPr>
-          <p:cNvPr id="14" name="Shape 12"/>
+          <p:cNvPr id="13" name="Shape 11"/>
           <p:cNvSpPr/>
           <p:nvPr/>
         </p:nvSpPr>
@@ -2167,10 +1981,14 @@
             <a:prstDash val="solid"/>
           </a:ln>
         </p:spPr>
-      </p:sp>
-      <p:sp>
-        <p:nvSpPr>
-          <p:cNvPr id="15" name="Shape 13"/>
+        <p:txBody>
+          <a:bodyPr/>
+          <a:p/>
+        </p:txBody>
+      </p:sp>
+      <p:sp>
+        <p:nvSpPr>
+          <p:cNvPr id="14" name="Shape 12"/>
           <p:cNvSpPr/>
           <p:nvPr/>
         </p:nvSpPr>
@@ -2190,10 +2008,14 @@
             <a:prstDash val="solid"/>
           </a:ln>
         </p:spPr>
-      </p:sp>
-      <p:sp>
-        <p:nvSpPr>
-          <p:cNvPr id="16" name="Text 14"/>
+        <p:txBody>
+          <a:bodyPr/>
+          <a:p/>
+        </p:txBody>
+      </p:sp>
+      <p:sp>
+        <p:nvSpPr>
+          <p:cNvPr id="15" name="Text 13"/>
           <p:cNvSpPr/>
           <p:nvPr/>
         </p:nvSpPr>
@@ -2209,7 +2031,7 @@
           <a:ln/>
         </p:spPr>
         <p:txBody>
-          <a:bodyPr wrap="square" lIns="0" tIns="0" rIns="0" bIns="0" rtlCol="0" anchor="t"/>
+          <a:bodyPr wrap="none" lIns="0" tIns="0" rIns="0" bIns="0" rtlCol="0" anchor="t"/>
           <a:lstStyle/>
           <a:p>
             <a:pPr algn="ctr" indent="0" marL="0">
@@ -2235,7 +2057,7 @@
       </p:sp>
       <p:sp>
         <p:nvSpPr>
-          <p:cNvPr id="17" name="Text 15"/>
+          <p:cNvPr id="16" name="Text 14"/>
           <p:cNvSpPr/>
           <p:nvPr/>
         </p:nvSpPr>
@@ -2251,7 +2073,7 @@
           <a:ln/>
         </p:spPr>
         <p:txBody>
-          <a:bodyPr wrap="square" lIns="0" tIns="0" rIns="0" bIns="0" rtlCol="0" anchor="t"/>
+          <a:bodyPr wrap="none" lIns="0" tIns="0" rIns="0" bIns="0" rtlCol="0" anchor="t"/>
           <a:lstStyle/>
           <a:p>
             <a:pPr algn="ctr" indent="0" marL="0">
@@ -2280,7 +2102,7 @@
       </p:sp>
       <p:sp>
         <p:nvSpPr>
-          <p:cNvPr id="18" name="Shape 16"/>
+          <p:cNvPr id="17" name="Shape 15"/>
           <p:cNvSpPr/>
           <p:nvPr/>
         </p:nvSpPr>
@@ -2300,10 +2122,14 @@
             <a:prstDash val="solid"/>
           </a:ln>
         </p:spPr>
-      </p:sp>
-      <p:sp>
-        <p:nvSpPr>
-          <p:cNvPr id="19" name="Shape 17"/>
+        <p:txBody>
+          <a:bodyPr/>
+          <a:p/>
+        </p:txBody>
+      </p:sp>
+      <p:sp>
+        <p:nvSpPr>
+          <p:cNvPr id="18" name="Shape 16"/>
           <p:cNvSpPr/>
           <p:nvPr/>
         </p:nvSpPr>
@@ -2323,10 +2149,14 @@
             <a:prstDash val="solid"/>
           </a:ln>
         </p:spPr>
-      </p:sp>
-      <p:sp>
-        <p:nvSpPr>
-          <p:cNvPr id="20" name="Text 18"/>
+        <p:txBody>
+          <a:bodyPr/>
+          <a:p/>
+        </p:txBody>
+      </p:sp>
+      <p:sp>
+        <p:nvSpPr>
+          <p:cNvPr id="19" name="Text 17"/>
           <p:cNvSpPr/>
           <p:nvPr/>
         </p:nvSpPr>
@@ -2342,7 +2172,7 @@
           <a:ln/>
         </p:spPr>
         <p:txBody>
-          <a:bodyPr wrap="square" lIns="0" tIns="0" rIns="0" bIns="0" rtlCol="0" anchor="t"/>
+          <a:bodyPr wrap="none" lIns="0" tIns="0" rIns="0" bIns="0" rtlCol="0" anchor="t"/>
           <a:lstStyle/>
           <a:p>
             <a:pPr algn="ctr" indent="0" marL="0">
@@ -2368,7 +2198,7 @@
       </p:sp>
       <p:sp>
         <p:nvSpPr>
-          <p:cNvPr id="21" name="Text 19"/>
+          <p:cNvPr id="20" name="Text 18"/>
           <p:cNvSpPr/>
           <p:nvPr/>
         </p:nvSpPr>
@@ -2384,7 +2214,7 @@
           <a:ln/>
         </p:spPr>
         <p:txBody>
-          <a:bodyPr wrap="square" lIns="0" tIns="0" rIns="0" bIns="0" rtlCol="0" anchor="t"/>
+          <a:bodyPr wrap="none" lIns="0" tIns="0" rIns="0" bIns="0" rtlCol="0" anchor="t"/>
           <a:lstStyle/>
           <a:p>
             <a:pPr algn="ctr" indent="0" marL="0">
@@ -2413,7 +2243,7 @@
       </p:sp>
       <p:sp>
         <p:nvSpPr>
-          <p:cNvPr id="22" name="Text 20"/>
+          <p:cNvPr id="21" name="Text 19"/>
           <p:cNvSpPr/>
           <p:nvPr/>
         </p:nvSpPr>
@@ -2429,7 +2259,7 @@
           <a:ln/>
         </p:spPr>
         <p:txBody>
-          <a:bodyPr wrap="square" lIns="0" tIns="0" rIns="0" bIns="0" rtlCol="0" anchor="t"/>
+          <a:bodyPr wrap="none" lIns="0" tIns="0" rIns="0" bIns="0" rtlCol="0" anchor="t"/>
           <a:lstStyle/>
           <a:p>
             <a:pPr algn="ctr" indent="0" marL="0">
@@ -2458,7 +2288,7 @@
       </p:sp>
       <p:sp>
         <p:nvSpPr>
-          <p:cNvPr id="23" name="Text 21"/>
+          <p:cNvPr id="22" name="Text 20"/>
           <p:cNvSpPr/>
           <p:nvPr/>
         </p:nvSpPr>
@@ -2474,7 +2304,7 @@
           <a:ln/>
         </p:spPr>
         <p:txBody>
-          <a:bodyPr wrap="square" lIns="0" tIns="0" rIns="0" bIns="0" rtlCol="0" anchor="t"/>
+          <a:bodyPr wrap="none" lIns="0" tIns="0" rIns="0" bIns="0" rtlCol="0" anchor="t"/>
           <a:lstStyle/>
           <a:p>
             <a:pPr algn="r" indent="0" marL="0">
@@ -2548,7 +2378,7 @@
           <a:ln/>
         </p:spPr>
         <p:txBody>
-          <a:bodyPr wrap="square" lIns="0" tIns="0" rIns="0" bIns="0" rtlCol="0" anchor="t"/>
+          <a:bodyPr wrap="none" lIns="0" tIns="0" rIns="0" bIns="0" rtlCol="0" anchor="t"/>
           <a:lstStyle/>
           <a:p>
             <a:pPr algn="ctr" indent="0" marL="0">
@@ -2590,7 +2420,7 @@
           <a:ln/>
         </p:spPr>
         <p:txBody>
-          <a:bodyPr wrap="square" lIns="0" tIns="0" rIns="0" bIns="0" rtlCol="0" anchor="t"/>
+          <a:bodyPr wrap="none" lIns="0" tIns="0" rIns="0" bIns="0" rtlCol="0" anchor="t"/>
           <a:lstStyle/>
           <a:p>
             <a:pPr algn="ctr" indent="0" marL="0">
@@ -2665,7 +2495,7 @@
           <a:ln/>
         </p:spPr>
         <p:txBody>
-          <a:bodyPr wrap="square" lIns="0" tIns="0" rIns="0" bIns="0" rtlCol="0" anchor="t"/>
+          <a:bodyPr wrap="none" lIns="0" tIns="0" rIns="0" bIns="0" rtlCol="0" anchor="t"/>
           <a:lstStyle/>
           <a:p>
             <a:pPr algn="ctr" indent="0" marL="0">
@@ -2737,7 +2567,7 @@
           <a:ln/>
         </p:spPr>
         <p:txBody>
-          <a:bodyPr wrap="square" lIns="0" tIns="0" rIns="0" bIns="0" rtlCol="0" anchor="t"/>
+          <a:bodyPr wrap="none" lIns="0" tIns="0" rIns="0" bIns="0" rtlCol="0" anchor="t"/>
           <a:lstStyle/>
           <a:p>
             <a:pPr algn="ctr" indent="0" marL="0">
@@ -2779,7 +2609,7 @@
           <a:ln/>
         </p:spPr>
         <p:txBody>
-          <a:bodyPr wrap="square" lIns="0" tIns="0" rIns="0" bIns="0" rtlCol="0" anchor="t"/>
+          <a:bodyPr wrap="none" lIns="0" tIns="0" rIns="0" bIns="0" rtlCol="0" anchor="t"/>
           <a:lstStyle/>
           <a:p>
             <a:pPr algn="ctr" indent="0" marL="0">
@@ -2854,7 +2684,7 @@
           <a:ln/>
         </p:spPr>
         <p:txBody>
-          <a:bodyPr wrap="square" lIns="0" tIns="0" rIns="0" bIns="0" rtlCol="0" anchor="t"/>
+          <a:bodyPr wrap="none" lIns="0" tIns="0" rIns="0" bIns="0" rtlCol="0" anchor="t"/>
           <a:lstStyle/>
           <a:p>
             <a:pPr algn="ctr" indent="0" marL="0">
@@ -2926,7 +2756,9 @@
           <a:ln/>
         </p:spPr>
         <p:txBody>
-          <a:bodyPr wrap="square" lIns="0" tIns="0" rIns="0" bIns="0" rtlCol="0" anchor="t"/>
+          <a:bodyPr wrap="square" lIns="0" tIns="0" rIns="0" bIns="0" rtlCol="0" anchor="t">
+            <a:normAutofit/>
+          </a:bodyPr>
           <a:lstStyle/>
           <a:p>
             <a:pPr algn="ctr" indent="0" marL="0">
@@ -2968,7 +2800,9 @@
           <a:ln/>
         </p:spPr>
         <p:txBody>
-          <a:bodyPr wrap="square" lIns="0" tIns="0" rIns="0" bIns="0" rtlCol="0" anchor="t"/>
+          <a:bodyPr wrap="square" lIns="0" tIns="0" rIns="0" bIns="0" rtlCol="0" anchor="t">
+            <a:normAutofit/>
+          </a:bodyPr>
           <a:lstStyle/>
           <a:p>
             <a:pPr algn="ctr" indent="0" marL="0">
@@ -3013,7 +2847,7 @@
           <a:ln/>
         </p:spPr>
         <p:txBody>
-          <a:bodyPr wrap="square" lIns="0" tIns="0" rIns="0" bIns="0" rtlCol="0" anchor="t"/>
+          <a:bodyPr wrap="none" lIns="0" tIns="0" rIns="0" bIns="0" rtlCol="0" anchor="t"/>
           <a:lstStyle/>
           <a:p>
             <a:pPr algn="ctr" indent="0" marL="0">
@@ -3058,7 +2892,7 @@
           <a:ln/>
         </p:spPr>
         <p:txBody>
-          <a:bodyPr wrap="square" lIns="0" tIns="0" rIns="0" bIns="0" rtlCol="0" anchor="t"/>
+          <a:bodyPr wrap="none" lIns="0" tIns="0" rIns="0" bIns="0" rtlCol="0" anchor="t"/>
           <a:lstStyle/>
           <a:p>
             <a:pPr algn="r" indent="0" marL="0">
@@ -3132,7 +2966,7 @@
           <a:ln/>
         </p:spPr>
         <p:txBody>
-          <a:bodyPr wrap="square" lIns="0" tIns="0" rIns="0" bIns="0" rtlCol="0" anchor="t"/>
+          <a:bodyPr wrap="none" lIns="0" tIns="0" rIns="0" bIns="0" rtlCol="0" anchor="t"/>
           <a:lstStyle/>
           <a:p>
             <a:pPr algn="ctr" indent="0" marL="0">
@@ -3174,7 +3008,7 @@
           <a:ln/>
         </p:spPr>
         <p:txBody>
-          <a:bodyPr wrap="square" lIns="0" tIns="0" rIns="0" bIns="0" rtlCol="0" anchor="t"/>
+          <a:bodyPr wrap="none" lIns="0" tIns="0" rIns="0" bIns="0" rtlCol="0" anchor="t"/>
           <a:lstStyle/>
           <a:p>
             <a:pPr algn="ctr" indent="0" marL="0">
@@ -3234,324 +3068,6 @@
       <p:sp>
         <p:nvSpPr>
           <p:cNvPr id="5" name="Text 3"/>
-          <p:cNvSpPr/>
-          <p:nvPr/>
-        </p:nvSpPr>
-        <p:spPr>
-          <a:xfrm>
-            <a:off x="1049472" y="2105223"/>
-            <a:ext cx="10090008" cy="3081734"/>
-          </a:xfrm>
-          <a:prstGeom prst="rect">
-            <a:avLst/>
-          </a:prstGeom>
-          <a:noFill/>
-          <a:ln/>
-        </p:spPr>
-        <p:txBody>
-          <a:bodyPr wrap="square" lIns="0" tIns="0" rIns="0" bIns="0" rtlCol="0" anchor="t"/>
-          <a:lstStyle/>
-          <a:p>
-            <a:pPr algn="l" marL="342900" indent="-342900">
-              <a:buSzPct val="100000"/>
-              <a:buChar char="•"/>
-            </a:pPr>
-            <a:r>
-              <a:rPr lang="en-US" sz="1600" dirty="0">
-                <a:solidFill>
-                  <a:srgbClr val="3A2E1F"/>
-                </a:solidFill>
-                <a:latin typeface="EBGaramond" pitchFamily="34" charset="0"/>
-                <a:ea typeface="EBGaramond" pitchFamily="34" charset="-122"/>
-                <a:cs typeface="EBGaramond" pitchFamily="34" charset="-120"/>
-              </a:rPr>
-              <a:t>I</a:t>
-            </a:r>
-            <a:pPr algn="l" indent="0" marL="0">
-              <a:buNone/>
-            </a:pPr>
-            <a:r>
-              <a:rPr lang="en-US" sz="1600" dirty="0">
-                <a:solidFill>
-                  <a:srgbClr val="3A2E1F"/>
-                </a:solidFill>
-                <a:latin typeface="EBGaramond" pitchFamily="34" charset="0"/>
-                <a:ea typeface="EBGaramond" pitchFamily="34" charset="-122"/>
-                <a:cs typeface="EBGaramond" pitchFamily="34" charset="-120"/>
-              </a:rPr>
-              <a:t> </a:t>
-            </a:r>
-            <a:pPr algn="l" indent="0" marL="0">
-              <a:buNone/>
-            </a:pPr>
-            <a:r>
-              <a:rPr lang="en-US" sz="1600" dirty="0">
-                <a:solidFill>
-                  <a:srgbClr val="3A2E1F"/>
-                </a:solidFill>
-                <a:latin typeface="EBGaramond" pitchFamily="34" charset="0"/>
-                <a:ea typeface="EBGaramond" pitchFamily="34" charset="-122"/>
-                <a:cs typeface="EBGaramond" pitchFamily="34" charset="-120"/>
-              </a:rPr>
-              <a:t>DECLARE</a:t>
-            </a:r>
-            <a:pPr algn="l" indent="0" marL="0">
-              <a:buNone/>
-            </a:pPr>
-            <a:r>
-              <a:rPr lang="en-US" sz="1600" dirty="0">
-                <a:solidFill>
-                  <a:srgbClr val="3A2E1F"/>
-                </a:solidFill>
-                <a:latin typeface="EBGaramond" pitchFamily="34" charset="0"/>
-                <a:ea typeface="EBGaramond" pitchFamily="34" charset="-122"/>
-                <a:cs typeface="EBGaramond" pitchFamily="34" charset="-120"/>
-              </a:rPr>
-              <a:t> </a:t>
-            </a:r>
-            <a:pPr algn="l" indent="0" marL="0">
-              <a:buNone/>
-            </a:pPr>
-            <a:r>
-              <a:rPr lang="en-US" sz="1600" dirty="0">
-                <a:solidFill>
-                  <a:srgbClr val="6B5D46"/>
-                </a:solidFill>
-                <a:latin typeface="EBGaramond" pitchFamily="34" charset="0"/>
-                <a:ea typeface="EBGaramond" pitchFamily="34" charset="-122"/>
-                <a:cs typeface="EBGaramond" pitchFamily="34" charset="-120"/>
-              </a:rPr>
-              <a:t>The restore you claim you can do.</a:t>
-            </a:r>
-            <a:endParaRPr lang="en-US" sz="1600" dirty="0"/>
-          </a:p>
-          <a:p>
-            <a:pPr algn="l" marL="342900" indent="-342900">
-              <a:buSzPct val="100000"/>
-              <a:buChar char="•"/>
-            </a:pPr>
-            <a:r>
-              <a:rPr lang="en-US" sz="1600" dirty="0">
-                <a:solidFill>
-                  <a:srgbClr val="3A2E1F"/>
-                </a:solidFill>
-                <a:latin typeface="EBGaramond" pitchFamily="34" charset="0"/>
-                <a:ea typeface="EBGaramond" pitchFamily="34" charset="-122"/>
-                <a:cs typeface="EBGaramond" pitchFamily="34" charset="-120"/>
-              </a:rPr>
-              <a:t>II</a:t>
-            </a:r>
-            <a:pPr algn="l" indent="0" marL="0">
-              <a:buNone/>
-            </a:pPr>
-            <a:r>
-              <a:rPr lang="en-US" sz="1600" dirty="0">
-                <a:solidFill>
-                  <a:srgbClr val="3A2E1F"/>
-                </a:solidFill>
-                <a:latin typeface="EBGaramond" pitchFamily="34" charset="0"/>
-                <a:ea typeface="EBGaramond" pitchFamily="34" charset="-122"/>
-                <a:cs typeface="EBGaramond" pitchFamily="34" charset="-120"/>
-              </a:rPr>
-              <a:t> </a:t>
-            </a:r>
-            <a:pPr algn="l" indent="0" marL="0">
-              <a:buNone/>
-            </a:pPr>
-            <a:r>
-              <a:rPr lang="en-US" sz="1600" dirty="0">
-                <a:solidFill>
-                  <a:srgbClr val="3A2E1F"/>
-                </a:solidFill>
-                <a:latin typeface="EBGaramond" pitchFamily="34" charset="0"/>
-                <a:ea typeface="EBGaramond" pitchFamily="34" charset="-122"/>
-                <a:cs typeface="EBGaramond" pitchFamily="34" charset="-120"/>
-              </a:rPr>
-              <a:t>RUN</a:t>
-            </a:r>
-            <a:pPr algn="l" indent="0" marL="0">
-              <a:buNone/>
-            </a:pPr>
-            <a:r>
-              <a:rPr lang="en-US" sz="1600" dirty="0">
-                <a:solidFill>
-                  <a:srgbClr val="3A2E1F"/>
-                </a:solidFill>
-                <a:latin typeface="EBGaramond" pitchFamily="34" charset="0"/>
-                <a:ea typeface="EBGaramond" pitchFamily="34" charset="-122"/>
-                <a:cs typeface="EBGaramond" pitchFamily="34" charset="-120"/>
-              </a:rPr>
-              <a:t> </a:t>
-            </a:r>
-            <a:pPr algn="l" indent="0" marL="0">
-              <a:buNone/>
-            </a:pPr>
-            <a:r>
-              <a:rPr lang="en-US" sz="1600" dirty="0">
-                <a:solidFill>
-                  <a:srgbClr val="6B5D46"/>
-                </a:solidFill>
-                <a:latin typeface="EBGaramond" pitchFamily="34" charset="0"/>
-                <a:ea typeface="EBGaramond" pitchFamily="34" charset="-122"/>
-                <a:cs typeface="EBGaramond" pitchFamily="34" charset="-120"/>
-              </a:rPr>
-              <a:t>Timed, by the shift that would really do it.</a:t>
-            </a:r>
-            <a:endParaRPr lang="en-US" sz="1600" dirty="0"/>
-          </a:p>
-          <a:p>
-            <a:pPr algn="l" marL="342900" indent="-342900">
-              <a:buSzPct val="100000"/>
-              <a:buChar char="•"/>
-            </a:pPr>
-            <a:r>
-              <a:rPr lang="en-US" sz="1600" dirty="0">
-                <a:solidFill>
-                  <a:srgbClr val="3A2E1F"/>
-                </a:solidFill>
-                <a:latin typeface="EBGaramond" pitchFamily="34" charset="0"/>
-                <a:ea typeface="EBGaramond" pitchFamily="34" charset="-122"/>
-                <a:cs typeface="EBGaramond" pitchFamily="34" charset="-120"/>
-              </a:rPr>
-              <a:t>III</a:t>
-            </a:r>
-            <a:pPr algn="l" indent="0" marL="0">
-              <a:buNone/>
-            </a:pPr>
-            <a:r>
-              <a:rPr lang="en-US" sz="1600" dirty="0">
-                <a:solidFill>
-                  <a:srgbClr val="3A2E1F"/>
-                </a:solidFill>
-                <a:latin typeface="EBGaramond" pitchFamily="34" charset="0"/>
-                <a:ea typeface="EBGaramond" pitchFamily="34" charset="-122"/>
-                <a:cs typeface="EBGaramond" pitchFamily="34" charset="-120"/>
-              </a:rPr>
-              <a:t> </a:t>
-            </a:r>
-            <a:pPr algn="l" indent="0" marL="0">
-              <a:buNone/>
-            </a:pPr>
-            <a:r>
-              <a:rPr lang="en-US" sz="1600" dirty="0">
-                <a:solidFill>
-                  <a:srgbClr val="3A2E1F"/>
-                </a:solidFill>
-                <a:latin typeface="EBGaramond" pitchFamily="34" charset="0"/>
-                <a:ea typeface="EBGaramond" pitchFamily="34" charset="-122"/>
-                <a:cs typeface="EBGaramond" pitchFamily="34" charset="-120"/>
-              </a:rPr>
-              <a:t>RECORD</a:t>
-            </a:r>
-            <a:pPr algn="l" indent="0" marL="0">
-              <a:buNone/>
-            </a:pPr>
-            <a:r>
-              <a:rPr lang="en-US" sz="1600" dirty="0">
-                <a:solidFill>
-                  <a:srgbClr val="3A2E1F"/>
-                </a:solidFill>
-                <a:latin typeface="EBGaramond" pitchFamily="34" charset="0"/>
-                <a:ea typeface="EBGaramond" pitchFamily="34" charset="-122"/>
-                <a:cs typeface="EBGaramond" pitchFamily="34" charset="-120"/>
-              </a:rPr>
-              <a:t> </a:t>
-            </a:r>
-            <a:pPr algn="l" indent="0" marL="0">
-              <a:buNone/>
-            </a:pPr>
-            <a:r>
-              <a:rPr lang="en-US" sz="1600" dirty="0">
-                <a:solidFill>
-                  <a:srgbClr val="6B5D46"/>
-                </a:solidFill>
-                <a:latin typeface="EBGaramond" pitchFamily="34" charset="0"/>
-                <a:ea typeface="EBGaramond" pitchFamily="34" charset="-122"/>
-                <a:cs typeface="EBGaramond" pitchFamily="34" charset="-120"/>
-              </a:rPr>
-              <a:t>What the runbook said, and what happened.</a:t>
-            </a:r>
-            <a:endParaRPr lang="en-US" sz="1600" dirty="0"/>
-          </a:p>
-          <a:p>
-            <a:pPr algn="l" marL="342900" indent="-342900">
-              <a:buSzPct val="100000"/>
-              <a:buChar char="•"/>
-            </a:pPr>
-            <a:r>
-              <a:rPr lang="en-US" sz="1600" dirty="0">
-                <a:solidFill>
-                  <a:srgbClr val="3A2E1F"/>
-                </a:solidFill>
-                <a:latin typeface="EBGaramond" pitchFamily="34" charset="0"/>
-                <a:ea typeface="EBGaramond" pitchFamily="34" charset="-122"/>
-                <a:cs typeface="EBGaramond" pitchFamily="34" charset="-120"/>
-              </a:rPr>
-              <a:t>IV</a:t>
-            </a:r>
-            <a:pPr algn="l" indent="0" marL="0">
-              <a:buNone/>
-            </a:pPr>
-            <a:r>
-              <a:rPr lang="en-US" sz="1600" dirty="0">
-                <a:solidFill>
-                  <a:srgbClr val="3A2E1F"/>
-                </a:solidFill>
-                <a:latin typeface="EBGaramond" pitchFamily="34" charset="0"/>
-                <a:ea typeface="EBGaramond" pitchFamily="34" charset="-122"/>
-                <a:cs typeface="EBGaramond" pitchFamily="34" charset="-120"/>
-              </a:rPr>
-              <a:t> </a:t>
-            </a:r>
-            <a:pPr algn="l" indent="0" marL="0">
-              <a:buNone/>
-            </a:pPr>
-            <a:r>
-              <a:rPr lang="en-US" sz="1600" dirty="0">
-                <a:solidFill>
-                  <a:srgbClr val="3A2E1F"/>
-                </a:solidFill>
-                <a:latin typeface="EBGaramond" pitchFamily="34" charset="0"/>
-                <a:ea typeface="EBGaramond" pitchFamily="34" charset="-122"/>
-                <a:cs typeface="EBGaramond" pitchFamily="34" charset="-120"/>
-              </a:rPr>
-              <a:t>CORRECT</a:t>
-            </a:r>
-            <a:pPr algn="l" indent="0" marL="0">
-              <a:buNone/>
-            </a:pPr>
-            <a:r>
-              <a:rPr lang="en-US" sz="1600" dirty="0">
-                <a:solidFill>
-                  <a:srgbClr val="3A2E1F"/>
-                </a:solidFill>
-                <a:latin typeface="EBGaramond" pitchFamily="34" charset="0"/>
-                <a:ea typeface="EBGaramond" pitchFamily="34" charset="-122"/>
-                <a:cs typeface="EBGaramond" pitchFamily="34" charset="-120"/>
-              </a:rPr>
-              <a:t> </a:t>
-            </a:r>
-            <a:pPr algn="l" indent="0" marL="0">
-              <a:buNone/>
-            </a:pPr>
-            <a:r>
-              <a:rPr lang="en-US" sz="1600" dirty="0">
-                <a:solidFill>
-                  <a:srgbClr val="6B5D46"/>
-                </a:solidFill>
-                <a:latin typeface="EBGaramond" pitchFamily="34" charset="0"/>
-                <a:ea typeface="EBGaramond" pitchFamily="34" charset="-122"/>
-                <a:cs typeface="EBGaramond" pitchFamily="34" charset="-120"/>
-              </a:rPr>
-              <a:t>Edit the runbook before the drill is closed.</a:t>
-            </a:r>
-            <a:endParaRPr lang="en-US" sz="1600" dirty="0"/>
-          </a:p>
-        </p:txBody>
-      </p:sp>
-      <p:sp>
-        <p:nvSpPr>
-          <p:cNvPr id="6" name="Text 4"/>
           <p:cNvSpPr/>
           <p:nvPr/>
         </p:nvSpPr>
@@ -3583,7 +3099,7 @@
       </p:sp>
       <p:sp>
         <p:nvSpPr>
-          <p:cNvPr id="7" name="Text 5"/>
+          <p:cNvPr id="6" name="Text 4"/>
           <p:cNvSpPr/>
           <p:nvPr/>
         </p:nvSpPr>
@@ -3617,7 +3133,7 @@
       </p:sp>
       <p:sp>
         <p:nvSpPr>
-          <p:cNvPr id="8" name="Text 6"/>
+          <p:cNvPr id="7" name="Text 5"/>
           <p:cNvSpPr/>
           <p:nvPr/>
         </p:nvSpPr>
@@ -3633,7 +3149,7 @@
           <a:ln/>
         </p:spPr>
         <p:txBody>
-          <a:bodyPr wrap="square" lIns="0" tIns="0" rIns="0" bIns="0" rtlCol="0" anchor="t"/>
+          <a:bodyPr wrap="none" lIns="0" tIns="0" rIns="0" bIns="0" rtlCol="0" anchor="t"/>
           <a:lstStyle/>
           <a:p>
             <a:pPr algn="ctr" indent="0" marL="0">
@@ -3659,7 +3175,7 @@
       </p:sp>
       <p:sp>
         <p:nvSpPr>
-          <p:cNvPr id="9" name="Text 7"/>
+          <p:cNvPr id="8" name="Text 6"/>
           <p:cNvSpPr/>
           <p:nvPr/>
         </p:nvSpPr>
@@ -3675,7 +3191,7 @@
           <a:ln/>
         </p:spPr>
         <p:txBody>
-          <a:bodyPr wrap="square" lIns="0" tIns="0" rIns="0" bIns="0" rtlCol="0" anchor="t"/>
+          <a:bodyPr wrap="none" lIns="0" tIns="0" rIns="0" bIns="0" rtlCol="0" anchor="t"/>
           <a:lstStyle/>
           <a:p>
             <a:pPr algn="ctr" indent="0" marL="0">
@@ -3704,7 +3220,7 @@
       </p:sp>
       <p:sp>
         <p:nvSpPr>
-          <p:cNvPr id="10" name="Text 8"/>
+          <p:cNvPr id="9" name="Text 7"/>
           <p:cNvSpPr/>
           <p:nvPr/>
         </p:nvSpPr>
@@ -3720,7 +3236,9 @@
           <a:ln/>
         </p:spPr>
         <p:txBody>
-          <a:bodyPr wrap="square" lIns="0" tIns="0" rIns="0" bIns="0" rtlCol="0" anchor="t"/>
+          <a:bodyPr wrap="square" lIns="0" tIns="0" rIns="0" bIns="0" rtlCol="0" anchor="t">
+            <a:normAutofit/>
+          </a:bodyPr>
           <a:lstStyle/>
           <a:p>
             <a:pPr algn="ctr" indent="0" marL="0">
@@ -3749,7 +3267,7 @@
       </p:sp>
       <p:pic>
         <p:nvPicPr>
-          <p:cNvPr id="11" name="Image 0" descr="preencoded.png">    </p:cNvPr>
+          <p:cNvPr id="10" name="Image 0" descr="preencoded.png">    </p:cNvPr>
           <p:cNvPicPr>
             <a:picLocks noChangeAspect="1"/>
           </p:cNvPicPr>
@@ -3779,7 +3297,7 @@
       </p:pic>
       <p:sp>
         <p:nvSpPr>
-          <p:cNvPr id="12" name="Text 9"/>
+          <p:cNvPr id="11" name="Text 8"/>
           <p:cNvSpPr/>
           <p:nvPr/>
         </p:nvSpPr>
@@ -3811,7 +3329,7 @@
       </p:sp>
       <p:sp>
         <p:nvSpPr>
-          <p:cNvPr id="13" name="Text 10"/>
+          <p:cNvPr id="12" name="Text 9"/>
           <p:cNvSpPr/>
           <p:nvPr/>
         </p:nvSpPr>
@@ -3845,7 +3363,7 @@
       </p:sp>
       <p:sp>
         <p:nvSpPr>
-          <p:cNvPr id="14" name="Text 11"/>
+          <p:cNvPr id="13" name="Text 10"/>
           <p:cNvSpPr/>
           <p:nvPr/>
         </p:nvSpPr>
@@ -3861,7 +3379,7 @@
           <a:ln/>
         </p:spPr>
         <p:txBody>
-          <a:bodyPr wrap="square" lIns="0" tIns="0" rIns="0" bIns="0" rtlCol="0" anchor="t"/>
+          <a:bodyPr wrap="none" lIns="0" tIns="0" rIns="0" bIns="0" rtlCol="0" anchor="t"/>
           <a:lstStyle/>
           <a:p>
             <a:pPr algn="ctr" indent="0" marL="0">
@@ -3887,7 +3405,7 @@
       </p:sp>
       <p:sp>
         <p:nvSpPr>
-          <p:cNvPr id="15" name="Text 12"/>
+          <p:cNvPr id="14" name="Text 11"/>
           <p:cNvSpPr/>
           <p:nvPr/>
         </p:nvSpPr>
@@ -3903,7 +3421,7 @@
           <a:ln/>
         </p:spPr>
         <p:txBody>
-          <a:bodyPr wrap="square" lIns="0" tIns="0" rIns="0" bIns="0" rtlCol="0" anchor="t"/>
+          <a:bodyPr wrap="none" lIns="0" tIns="0" rIns="0" bIns="0" rtlCol="0" anchor="t"/>
           <a:lstStyle/>
           <a:p>
             <a:pPr algn="ctr" indent="0" marL="0">
@@ -3932,7 +3450,7 @@
       </p:sp>
       <p:sp>
         <p:nvSpPr>
-          <p:cNvPr id="16" name="Text 13"/>
+          <p:cNvPr id="15" name="Text 12"/>
           <p:cNvSpPr/>
           <p:nvPr/>
         </p:nvSpPr>
@@ -3948,7 +3466,9 @@
           <a:ln/>
         </p:spPr>
         <p:txBody>
-          <a:bodyPr wrap="square" lIns="0" tIns="0" rIns="0" bIns="0" rtlCol="0" anchor="t"/>
+          <a:bodyPr wrap="square" lIns="0" tIns="0" rIns="0" bIns="0" rtlCol="0" anchor="t">
+            <a:normAutofit/>
+          </a:bodyPr>
           <a:lstStyle/>
           <a:p>
             <a:pPr algn="ctr" indent="0" marL="0">
@@ -3977,7 +3497,7 @@
       </p:sp>
       <p:pic>
         <p:nvPicPr>
-          <p:cNvPr id="17" name="Image 1" descr="preencoded.png">    </p:cNvPr>
+          <p:cNvPr id="16" name="Image 1" descr="preencoded.png">    </p:cNvPr>
           <p:cNvPicPr>
             <a:picLocks noChangeAspect="1"/>
           </p:cNvPicPr>
@@ -4007,7 +3527,7 @@
       </p:pic>
       <p:sp>
         <p:nvSpPr>
-          <p:cNvPr id="18" name="Text 14"/>
+          <p:cNvPr id="17" name="Text 13"/>
           <p:cNvSpPr/>
           <p:nvPr/>
         </p:nvSpPr>
@@ -4039,7 +3559,7 @@
       </p:sp>
       <p:sp>
         <p:nvSpPr>
-          <p:cNvPr id="19" name="Text 15"/>
+          <p:cNvPr id="18" name="Text 14"/>
           <p:cNvSpPr/>
           <p:nvPr/>
         </p:nvSpPr>
@@ -4073,7 +3593,7 @@
       </p:sp>
       <p:sp>
         <p:nvSpPr>
-          <p:cNvPr id="20" name="Text 16"/>
+          <p:cNvPr id="19" name="Text 15"/>
           <p:cNvSpPr/>
           <p:nvPr/>
         </p:nvSpPr>
@@ -4089,7 +3609,7 @@
           <a:ln/>
         </p:spPr>
         <p:txBody>
-          <a:bodyPr wrap="square" lIns="0" tIns="0" rIns="0" bIns="0" rtlCol="0" anchor="t"/>
+          <a:bodyPr wrap="none" lIns="0" tIns="0" rIns="0" bIns="0" rtlCol="0" anchor="t"/>
           <a:lstStyle/>
           <a:p>
             <a:pPr algn="ctr" indent="0" marL="0">
@@ -4115,7 +3635,7 @@
       </p:sp>
       <p:sp>
         <p:nvSpPr>
-          <p:cNvPr id="21" name="Text 17"/>
+          <p:cNvPr id="20" name="Text 16"/>
           <p:cNvSpPr/>
           <p:nvPr/>
         </p:nvSpPr>
@@ -4131,7 +3651,7 @@
           <a:ln/>
         </p:spPr>
         <p:txBody>
-          <a:bodyPr wrap="square" lIns="0" tIns="0" rIns="0" bIns="0" rtlCol="0" anchor="t"/>
+          <a:bodyPr wrap="none" lIns="0" tIns="0" rIns="0" bIns="0" rtlCol="0" anchor="t"/>
           <a:lstStyle/>
           <a:p>
             <a:pPr algn="ctr" indent="0" marL="0">
@@ -4160,7 +3680,7 @@
       </p:sp>
       <p:sp>
         <p:nvSpPr>
-          <p:cNvPr id="22" name="Text 18"/>
+          <p:cNvPr id="21" name="Text 17"/>
           <p:cNvSpPr/>
           <p:nvPr/>
         </p:nvSpPr>
@@ -4176,7 +3696,9 @@
           <a:ln/>
         </p:spPr>
         <p:txBody>
-          <a:bodyPr wrap="square" lIns="0" tIns="0" rIns="0" bIns="0" rtlCol="0" anchor="t"/>
+          <a:bodyPr wrap="square" lIns="0" tIns="0" rIns="0" bIns="0" rtlCol="0" anchor="t">
+            <a:normAutofit/>
+          </a:bodyPr>
           <a:lstStyle/>
           <a:p>
             <a:pPr algn="ctr" indent="0" marL="0">
@@ -4205,7 +3727,7 @@
       </p:sp>
       <p:pic>
         <p:nvPicPr>
-          <p:cNvPr id="23" name="Image 2" descr="preencoded.png">    </p:cNvPr>
+          <p:cNvPr id="22" name="Image 2" descr="preencoded.png">    </p:cNvPr>
           <p:cNvPicPr>
             <a:picLocks noChangeAspect="1"/>
           </p:cNvPicPr>
@@ -4235,7 +3757,7 @@
       </p:pic>
       <p:sp>
         <p:nvSpPr>
-          <p:cNvPr id="24" name="Text 19"/>
+          <p:cNvPr id="23" name="Text 18"/>
           <p:cNvSpPr/>
           <p:nvPr/>
         </p:nvSpPr>
@@ -4269,7 +3791,7 @@
       </p:sp>
       <p:sp>
         <p:nvSpPr>
-          <p:cNvPr id="25" name="Text 20"/>
+          <p:cNvPr id="24" name="Text 19"/>
           <p:cNvSpPr/>
           <p:nvPr/>
         </p:nvSpPr>
@@ -4303,7 +3825,7 @@
       </p:sp>
       <p:sp>
         <p:nvSpPr>
-          <p:cNvPr id="26" name="Text 21"/>
+          <p:cNvPr id="25" name="Text 20"/>
           <p:cNvSpPr/>
           <p:nvPr/>
         </p:nvSpPr>
@@ -4319,7 +3841,7 @@
           <a:ln/>
         </p:spPr>
         <p:txBody>
-          <a:bodyPr wrap="square" lIns="0" tIns="0" rIns="0" bIns="0" rtlCol="0" anchor="t"/>
+          <a:bodyPr wrap="none" lIns="0" tIns="0" rIns="0" bIns="0" rtlCol="0" anchor="t"/>
           <a:lstStyle/>
           <a:p>
             <a:pPr algn="ctr" indent="0" marL="0">
@@ -4345,7 +3867,7 @@
       </p:sp>
       <p:sp>
         <p:nvSpPr>
-          <p:cNvPr id="27" name="Text 22"/>
+          <p:cNvPr id="26" name="Text 21"/>
           <p:cNvSpPr/>
           <p:nvPr/>
         </p:nvSpPr>
@@ -4361,7 +3883,7 @@
           <a:ln/>
         </p:spPr>
         <p:txBody>
-          <a:bodyPr wrap="square" lIns="0" tIns="0" rIns="0" bIns="0" rtlCol="0" anchor="t"/>
+          <a:bodyPr wrap="none" lIns="0" tIns="0" rIns="0" bIns="0" rtlCol="0" anchor="t"/>
           <a:lstStyle/>
           <a:p>
             <a:pPr algn="ctr" indent="0" marL="0">
@@ -4390,7 +3912,7 @@
       </p:sp>
       <p:sp>
         <p:nvSpPr>
-          <p:cNvPr id="28" name="Text 23"/>
+          <p:cNvPr id="27" name="Text 22"/>
           <p:cNvSpPr/>
           <p:nvPr/>
         </p:nvSpPr>
@@ -4406,7 +3928,9 @@
           <a:ln/>
         </p:spPr>
         <p:txBody>
-          <a:bodyPr wrap="square" lIns="0" tIns="0" rIns="0" bIns="0" rtlCol="0" anchor="t"/>
+          <a:bodyPr wrap="square" lIns="0" tIns="0" rIns="0" bIns="0" rtlCol="0" anchor="t">
+            <a:normAutofit/>
+          </a:bodyPr>
           <a:lstStyle/>
           <a:p>
             <a:pPr algn="ctr" indent="0" marL="0">
@@ -4435,7 +3959,7 @@
       </p:sp>
       <p:sp>
         <p:nvSpPr>
-          <p:cNvPr id="29" name="Text 24"/>
+          <p:cNvPr id="28" name="Text 23"/>
           <p:cNvSpPr/>
           <p:nvPr/>
         </p:nvSpPr>
@@ -4451,7 +3975,7 @@
           <a:ln/>
         </p:spPr>
         <p:txBody>
-          <a:bodyPr wrap="square" lIns="0" tIns="0" rIns="0" bIns="0" rtlCol="0" anchor="t"/>
+          <a:bodyPr wrap="none" lIns="0" tIns="0" rIns="0" bIns="0" rtlCol="0" anchor="t"/>
           <a:lstStyle/>
           <a:p>
             <a:pPr algn="ctr" indent="0" marL="0">
@@ -4480,7 +4004,7 @@
       </p:sp>
       <p:sp>
         <p:nvSpPr>
-          <p:cNvPr id="30" name="Text 25"/>
+          <p:cNvPr id="29" name="Text 24"/>
           <p:cNvSpPr/>
           <p:nvPr/>
         </p:nvSpPr>
@@ -4496,7 +4020,7 @@
           <a:ln/>
         </p:spPr>
         <p:txBody>
-          <a:bodyPr wrap="square" lIns="0" tIns="0" rIns="0" bIns="0" rtlCol="0" anchor="t"/>
+          <a:bodyPr wrap="none" lIns="0" tIns="0" rIns="0" bIns="0" rtlCol="0" anchor="t"/>
           <a:lstStyle/>
           <a:p>
             <a:pPr algn="r" indent="0" marL="0">
@@ -4570,7 +4094,7 @@
           <a:ln/>
         </p:spPr>
         <p:txBody>
-          <a:bodyPr wrap="square" lIns="0" tIns="0" rIns="0" bIns="0" rtlCol="0" anchor="t"/>
+          <a:bodyPr wrap="none" lIns="0" tIns="0" rIns="0" bIns="0" rtlCol="0" anchor="t"/>
           <a:lstStyle/>
           <a:p>
             <a:pPr algn="ctr" indent="0" marL="0">
@@ -4612,7 +4136,7 @@
           <a:ln/>
         </p:spPr>
         <p:txBody>
-          <a:bodyPr wrap="square" lIns="0" tIns="0" rIns="0" bIns="0" rtlCol="0" anchor="t"/>
+          <a:bodyPr wrap="none" lIns="0" tIns="0" rIns="0" bIns="0" rtlCol="0" anchor="t"/>
           <a:lstStyle/>
           <a:p>
             <a:pPr algn="ctr" indent="0" marL="0">
@@ -4677,25 +4201,27 @@
         </p:nvSpPr>
         <p:spPr>
           <a:xfrm>
-            <a:off x="1049472" y="2003822"/>
-            <a:ext cx="10090008" cy="3855442"/>
-          </a:xfrm>
-          <a:prstGeom prst="rect">
-            <a:avLst/>
-          </a:prstGeom>
-          <a:noFill/>
-          <a:ln/>
-        </p:spPr>
-        <p:txBody>
-          <a:bodyPr wrap="square" lIns="0" tIns="0" rIns="0" bIns="0" rtlCol="0" anchor="t"/>
-          <a:lstStyle/>
-          <a:p>
-            <a:pPr algn="ctr" marL="342900" indent="-342900">
-              <a:buSzPct val="100000"/>
-              <a:buChar char="•"/>
-            </a:pPr>
-            <a:r>
-              <a:rPr lang="en-US" sz="1600" dirty="0">
+            <a:off x="948572" y="2003822"/>
+            <a:ext cx="10291808" cy="253802"/>
+          </a:xfrm>
+          <a:prstGeom prst="rect">
+            <a:avLst/>
+          </a:prstGeom>
+          <a:noFill/>
+          <a:ln/>
+        </p:spPr>
+        <p:txBody>
+          <a:bodyPr wrap="none" lIns="0" tIns="0" rIns="0" bIns="0" rtlCol="0" anchor="t"/>
+          <a:lstStyle/>
+          <a:p>
+            <a:pPr algn="ctr" indent="0" marL="0">
+              <a:lnSpc>
+                <a:spcPts val="2000"/>
+              </a:lnSpc>
+              <a:buNone/>
+            </a:pPr>
+            <a:r>
+              <a:rPr lang="en-US" sz="1333" b="1" dirty="0">
                 <a:solidFill>
                   <a:srgbClr val="6B5D46"/>
                 </a:solidFill>
@@ -4705,53 +4231,261 @@
               </a:rPr>
               <a:t>I</a:t>
             </a:r>
-            <a:pPr algn="ctr" indent="0" marL="0">
-              <a:buNone/>
-            </a:pPr>
-            <a:r>
-              <a:rPr lang="en-US" sz="1600" dirty="0">
+            <a:endParaRPr lang="en-US" sz="1333" dirty="0"/>
+          </a:p>
+        </p:txBody>
+      </p:sp>
+      <p:sp>
+        <p:nvSpPr>
+          <p:cNvPr id="6" name="Text 4"/>
+          <p:cNvSpPr/>
+          <p:nvPr/>
+        </p:nvSpPr>
+        <p:spPr>
+          <a:xfrm>
+            <a:off x="948572" y="2325291"/>
+            <a:ext cx="10291808" cy="434181"/>
+          </a:xfrm>
+          <a:prstGeom prst="rect">
+            <a:avLst/>
+          </a:prstGeom>
+          <a:noFill/>
+          <a:ln/>
+        </p:spPr>
+        <p:txBody>
+          <a:bodyPr wrap="none" lIns="0" tIns="0" rIns="0" bIns="0" rtlCol="0" anchor="t"/>
+          <a:lstStyle/>
+          <a:p>
+            <a:pPr algn="ctr" indent="0" marL="0">
+              <a:lnSpc>
+                <a:spcPts val="3420"/>
+              </a:lnSpc>
+              <a:spcBef>
+                <a:spcPts val="533"/>
+              </a:spcBef>
+              <a:buNone/>
+            </a:pPr>
+            <a:r>
+              <a:rPr lang="en-US" sz="2533" dirty="0">
                 <a:solidFill>
                   <a:srgbClr val="3A2E1F"/>
+                </a:solidFill>
+                <a:latin typeface="PlayfairDisplay" pitchFamily="34" charset="0"/>
+                <a:ea typeface="PlayfairDisplay" pitchFamily="34" charset="-122"/>
+                <a:cs typeface="PlayfairDisplay" pitchFamily="34" charset="-120"/>
+              </a:rPr>
+              <a:t>Does the drill go on the calendar?</a:t>
+            </a:r>
+            <a:endParaRPr lang="en-US" sz="2533" dirty="0"/>
+          </a:p>
+        </p:txBody>
+      </p:sp>
+      <p:sp>
+        <p:nvSpPr>
+          <p:cNvPr id="7" name="Text 5"/>
+          <p:cNvSpPr/>
+          <p:nvPr/>
+        </p:nvSpPr>
+        <p:spPr>
+          <a:xfrm>
+            <a:off x="2122844" y="2827139"/>
+            <a:ext cx="7943066" cy="304800"/>
+          </a:xfrm>
+          <a:prstGeom prst="rect">
+            <a:avLst/>
+          </a:prstGeom>
+          <a:noFill/>
+          <a:ln/>
+        </p:spPr>
+        <p:txBody>
+          <a:bodyPr wrap="none" lIns="0" tIns="0" rIns="0" bIns="0" rtlCol="0" anchor="t"/>
+          <a:lstStyle/>
+          <a:p>
+            <a:pPr algn="ctr" indent="0" marL="0">
+              <a:lnSpc>
+                <a:spcPts val="2400"/>
+              </a:lnSpc>
+              <a:spcBef>
+                <a:spcPts val="533"/>
+              </a:spcBef>
+              <a:buNone/>
+            </a:pPr>
+            <a:r>
+              <a:rPr lang="en-US" sz="1600" i="1" dirty="0">
+                <a:solidFill>
+                  <a:srgbClr val="6B5D46"/>
                 </a:solidFill>
                 <a:latin typeface="EBGaramond" pitchFamily="34" charset="0"/>
                 <a:ea typeface="EBGaramond" pitchFamily="34" charset="-122"/>
                 <a:cs typeface="EBGaramond" pitchFamily="34" charset="-120"/>
               </a:rPr>
-              <a:t> </a:t>
-            </a:r>
-            <a:pPr algn="ctr" indent="0" marL="0">
-              <a:buNone/>
-            </a:pPr>
-            <a:r>
-              <a:rPr lang="en-US" sz="1600" dirty="0">
-                <a:solidFill>
-                  <a:srgbClr val="3A2E1F"/>
+              <a:t>A date and an owner, or it stays an intention.</a:t>
+            </a:r>
+            <a:endParaRPr lang="en-US" sz="1600" dirty="0"/>
+          </a:p>
+        </p:txBody>
+      </p:sp>
+      <p:sp>
+        <p:nvSpPr>
+          <p:cNvPr id="8" name="Text 6"/>
+          <p:cNvSpPr/>
+          <p:nvPr/>
+        </p:nvSpPr>
+        <p:spPr>
+          <a:xfrm>
+            <a:off x="948572" y="3367484"/>
+            <a:ext cx="10291808" cy="253802"/>
+          </a:xfrm>
+          <a:prstGeom prst="rect">
+            <a:avLst/>
+          </a:prstGeom>
+          <a:noFill/>
+          <a:ln/>
+        </p:spPr>
+        <p:txBody>
+          <a:bodyPr wrap="none" lIns="0" tIns="0" rIns="0" bIns="0" rtlCol="0" anchor="t"/>
+          <a:lstStyle/>
+          <a:p>
+            <a:pPr algn="ctr" indent="0" marL="0">
+              <a:lnSpc>
+                <a:spcPts val="2000"/>
+              </a:lnSpc>
+              <a:buNone/>
+            </a:pPr>
+            <a:r>
+              <a:rPr lang="en-US" sz="1333" b="1" dirty="0">
+                <a:solidFill>
+                  <a:srgbClr val="6B5D46"/>
                 </a:solidFill>
                 <a:latin typeface="EBGaramond" pitchFamily="34" charset="0"/>
                 <a:ea typeface="EBGaramond" pitchFamily="34" charset="-122"/>
                 <a:cs typeface="EBGaramond" pitchFamily="34" charset="-120"/>
               </a:rPr>
-              <a:t>Does the drill go on the calendar?</a:t>
-            </a:r>
-            <a:pPr algn="ctr" indent="0" marL="0">
-              <a:buNone/>
-            </a:pPr>
-            <a:r>
-              <a:rPr lang="en-US" sz="1600" dirty="0">
+              <a:t>II</a:t>
+            </a:r>
+            <a:endParaRPr lang="en-US" sz="1333" dirty="0"/>
+          </a:p>
+        </p:txBody>
+      </p:sp>
+      <p:sp>
+        <p:nvSpPr>
+          <p:cNvPr id="9" name="Text 7"/>
+          <p:cNvSpPr/>
+          <p:nvPr/>
+        </p:nvSpPr>
+        <p:spPr>
+          <a:xfrm>
+            <a:off x="948572" y="3688953"/>
+            <a:ext cx="10291808" cy="434181"/>
+          </a:xfrm>
+          <a:prstGeom prst="rect">
+            <a:avLst/>
+          </a:prstGeom>
+          <a:noFill/>
+          <a:ln/>
+        </p:spPr>
+        <p:txBody>
+          <a:bodyPr wrap="none" lIns="0" tIns="0" rIns="0" bIns="0" rtlCol="0" anchor="t"/>
+          <a:lstStyle/>
+          <a:p>
+            <a:pPr algn="ctr" indent="0" marL="0">
+              <a:lnSpc>
+                <a:spcPts val="3420"/>
+              </a:lnSpc>
+              <a:spcBef>
+                <a:spcPts val="533"/>
+              </a:spcBef>
+              <a:buNone/>
+            </a:pPr>
+            <a:r>
+              <a:rPr lang="en-US" sz="2533" dirty="0">
                 <a:solidFill>
                   <a:srgbClr val="3A2E1F"/>
+                </a:solidFill>
+                <a:latin typeface="PlayfairDisplay" pitchFamily="34" charset="0"/>
+                <a:ea typeface="PlayfairDisplay" pitchFamily="34" charset="-122"/>
+                <a:cs typeface="PlayfairDisplay" pitchFamily="34" charset="-120"/>
+              </a:rPr>
+              <a:t>What stops while the drill runs?</a:t>
+            </a:r>
+            <a:endParaRPr lang="en-US" sz="2533" dirty="0"/>
+          </a:p>
+        </p:txBody>
+      </p:sp>
+      <p:sp>
+        <p:nvSpPr>
+          <p:cNvPr id="10" name="Text 8"/>
+          <p:cNvSpPr/>
+          <p:nvPr/>
+        </p:nvSpPr>
+        <p:spPr>
+          <a:xfrm>
+            <a:off x="2122844" y="4190802"/>
+            <a:ext cx="7943066" cy="304800"/>
+          </a:xfrm>
+          <a:prstGeom prst="rect">
+            <a:avLst/>
+          </a:prstGeom>
+          <a:noFill/>
+          <a:ln/>
+        </p:spPr>
+        <p:txBody>
+          <a:bodyPr wrap="none" lIns="0" tIns="0" rIns="0" bIns="0" rtlCol="0" anchor="t"/>
+          <a:lstStyle/>
+          <a:p>
+            <a:pPr algn="ctr" indent="0" marL="0">
+              <a:lnSpc>
+                <a:spcPts val="2400"/>
+              </a:lnSpc>
+              <a:spcBef>
+                <a:spcPts val="533"/>
+              </a:spcBef>
+              <a:buNone/>
+            </a:pPr>
+            <a:r>
+              <a:rPr lang="en-US" sz="1600" i="1" dirty="0">
+                <a:solidFill>
+                  <a:srgbClr val="6B5D46"/>
                 </a:solidFill>
                 <a:latin typeface="EBGaramond" pitchFamily="34" charset="0"/>
                 <a:ea typeface="EBGaramond" pitchFamily="34" charset="-122"/>
                 <a:cs typeface="EBGaramond" pitchFamily="34" charset="-120"/>
               </a:rPr>
-              <a:t> </a:t>
-            </a:r>
-            <a:pPr algn="ctr" indent="0" marL="0">
-              <a:buNone/>
-            </a:pPr>
-            <a:r>
-              <a:rPr lang="en-US" sz="1600" dirty="0">
+              <a:t>Name the service that goes quiet, and who is told before it does.</a:t>
+            </a:r>
+            <a:endParaRPr lang="en-US" sz="1600" dirty="0"/>
+          </a:p>
+        </p:txBody>
+      </p:sp>
+      <p:sp>
+        <p:nvSpPr>
+          <p:cNvPr id="11" name="Text 9"/>
+          <p:cNvSpPr/>
+          <p:nvPr/>
+        </p:nvSpPr>
+        <p:spPr>
+          <a:xfrm>
+            <a:off x="948572" y="4731147"/>
+            <a:ext cx="10291808" cy="253802"/>
+          </a:xfrm>
+          <a:prstGeom prst="rect">
+            <a:avLst/>
+          </a:prstGeom>
+          <a:noFill/>
+          <a:ln/>
+        </p:spPr>
+        <p:txBody>
+          <a:bodyPr wrap="none" lIns="0" tIns="0" rIns="0" bIns="0" rtlCol="0" anchor="t"/>
+          <a:lstStyle/>
+          <a:p>
+            <a:pPr algn="ctr" indent="0" marL="0">
+              <a:lnSpc>
+                <a:spcPts val="2000"/>
+              </a:lnSpc>
+              <a:buNone/>
+            </a:pPr>
+            <a:r>
+              <a:rPr lang="en-US" sz="1333" b="1" dirty="0">
                 <a:solidFill>
                   <a:srgbClr val="6B5D46"/>
                 </a:solidFill>
@@ -4759,17 +4493,89 @@
                 <a:ea typeface="EBGaramond" pitchFamily="34" charset="-122"/>
                 <a:cs typeface="EBGaramond" pitchFamily="34" charset="-120"/>
               </a:rPr>
-              <a:t>A date and an owner, or it stays an intention.</a:t>
-            </a:r>
-            <a:endParaRPr lang="en-US" sz="1600" dirty="0"/>
-          </a:p>
-          <a:p>
-            <a:pPr algn="ctr" marL="342900" indent="-342900">
-              <a:buSzPct val="100000"/>
-              <a:buChar char="•"/>
-            </a:pPr>
-            <a:r>
-              <a:rPr lang="en-US" sz="1600" dirty="0">
+              <a:t>III</a:t>
+            </a:r>
+            <a:endParaRPr lang="en-US" sz="1333" dirty="0"/>
+          </a:p>
+        </p:txBody>
+      </p:sp>
+      <p:sp>
+        <p:nvSpPr>
+          <p:cNvPr id="12" name="Text 10"/>
+          <p:cNvSpPr/>
+          <p:nvPr/>
+        </p:nvSpPr>
+        <p:spPr>
+          <a:xfrm>
+            <a:off x="948572" y="5052616"/>
+            <a:ext cx="10291808" cy="434181"/>
+          </a:xfrm>
+          <a:prstGeom prst="rect">
+            <a:avLst/>
+          </a:prstGeom>
+          <a:noFill/>
+          <a:ln/>
+        </p:spPr>
+        <p:txBody>
+          <a:bodyPr wrap="none" lIns="0" tIns="0" rIns="0" bIns="0" rtlCol="0" anchor="t"/>
+          <a:lstStyle/>
+          <a:p>
+            <a:pPr algn="ctr" indent="0" marL="0">
+              <a:lnSpc>
+                <a:spcPts val="3420"/>
+              </a:lnSpc>
+              <a:spcBef>
+                <a:spcPts val="533"/>
+              </a:spcBef>
+              <a:buNone/>
+            </a:pPr>
+            <a:r>
+              <a:rPr lang="en-US" sz="2533" dirty="0">
+                <a:solidFill>
+                  <a:srgbClr val="3A2E1F"/>
+                </a:solidFill>
+                <a:latin typeface="PlayfairDisplay" pitchFamily="34" charset="0"/>
+                <a:ea typeface="PlayfairDisplay" pitchFamily="34" charset="-122"/>
+                <a:cs typeface="PlayfairDisplay" pitchFamily="34" charset="-120"/>
+              </a:rPr>
+              <a:t>Who signs the numbers we publish?</a:t>
+            </a:r>
+            <a:endParaRPr lang="en-US" sz="2533" dirty="0"/>
+          </a:p>
+        </p:txBody>
+      </p:sp>
+      <p:sp>
+        <p:nvSpPr>
+          <p:cNvPr id="13" name="Text 11"/>
+          <p:cNvSpPr/>
+          <p:nvPr/>
+        </p:nvSpPr>
+        <p:spPr>
+          <a:xfrm>
+            <a:off x="2122844" y="5554464"/>
+            <a:ext cx="7943066" cy="304800"/>
+          </a:xfrm>
+          <a:prstGeom prst="rect">
+            <a:avLst/>
+          </a:prstGeom>
+          <a:noFill/>
+          <a:ln/>
+        </p:spPr>
+        <p:txBody>
+          <a:bodyPr wrap="none" lIns="0" tIns="0" rIns="0" bIns="0" rtlCol="0" anchor="t"/>
+          <a:lstStyle/>
+          <a:p>
+            <a:pPr algn="ctr" indent="0" marL="0">
+              <a:lnSpc>
+                <a:spcPts val="2400"/>
+              </a:lnSpc>
+              <a:spcBef>
+                <a:spcPts val="533"/>
+              </a:spcBef>
+              <a:buNone/>
+            </a:pPr>
+            <a:r>
+              <a:rPr lang="en-US" sz="1600" i="1" dirty="0">
                 <a:solidFill>
                   <a:srgbClr val="6B5D46"/>
                 </a:solidFill>
@@ -4777,541 +4583,15 @@
                 <a:ea typeface="EBGaramond" pitchFamily="34" charset="-122"/>
                 <a:cs typeface="EBGaramond" pitchFamily="34" charset="-120"/>
               </a:rPr>
-              <a:t>II</a:t>
-            </a:r>
-            <a:pPr algn="ctr" indent="0" marL="0">
-              <a:buNone/>
-            </a:pPr>
-            <a:r>
-              <a:rPr lang="en-US" sz="1600" dirty="0">
-                <a:solidFill>
-                  <a:srgbClr val="3A2E1F"/>
-                </a:solidFill>
-                <a:latin typeface="EBGaramond" pitchFamily="34" charset="0"/>
-                <a:ea typeface="EBGaramond" pitchFamily="34" charset="-122"/>
-                <a:cs typeface="EBGaramond" pitchFamily="34" charset="-120"/>
-              </a:rPr>
-              <a:t> </a:t>
-            </a:r>
-            <a:pPr algn="ctr" indent="0" marL="0">
-              <a:buNone/>
-            </a:pPr>
-            <a:r>
-              <a:rPr lang="en-US" sz="1600" dirty="0">
-                <a:solidFill>
-                  <a:srgbClr val="3A2E1F"/>
-                </a:solidFill>
-                <a:latin typeface="EBGaramond" pitchFamily="34" charset="0"/>
-                <a:ea typeface="EBGaramond" pitchFamily="34" charset="-122"/>
-                <a:cs typeface="EBGaramond" pitchFamily="34" charset="-120"/>
-              </a:rPr>
-              <a:t>What stops while the drill runs?</a:t>
-            </a:r>
-            <a:pPr algn="ctr" indent="0" marL="0">
-              <a:buNone/>
-            </a:pPr>
-            <a:r>
-              <a:rPr lang="en-US" sz="1600" dirty="0">
-                <a:solidFill>
-                  <a:srgbClr val="3A2E1F"/>
-                </a:solidFill>
-                <a:latin typeface="EBGaramond" pitchFamily="34" charset="0"/>
-                <a:ea typeface="EBGaramond" pitchFamily="34" charset="-122"/>
-                <a:cs typeface="EBGaramond" pitchFamily="34" charset="-120"/>
-              </a:rPr>
-              <a:t> </a:t>
-            </a:r>
-            <a:pPr algn="ctr" indent="0" marL="0">
-              <a:buNone/>
-            </a:pPr>
-            <a:r>
-              <a:rPr lang="en-US" sz="1600" dirty="0">
-                <a:solidFill>
-                  <a:srgbClr val="6B5D46"/>
-                </a:solidFill>
-                <a:latin typeface="EBGaramond" pitchFamily="34" charset="0"/>
-                <a:ea typeface="EBGaramond" pitchFamily="34" charset="-122"/>
-                <a:cs typeface="EBGaramond" pitchFamily="34" charset="-120"/>
-              </a:rPr>
-              <a:t>Name the service that goes quiet, and who is told before it does.</a:t>
+              <a:t>The signature belongs to whoever watched them measured.</a:t>
             </a:r>
             <a:endParaRPr lang="en-US" sz="1600" dirty="0"/>
           </a:p>
-          <a:p>
-            <a:pPr algn="ctr" marL="342900" indent="-342900">
-              <a:buSzPct val="100000"/>
-              <a:buChar char="•"/>
-            </a:pPr>
-            <a:r>
-              <a:rPr lang="en-US" sz="1600" dirty="0">
-                <a:solidFill>
-                  <a:srgbClr val="6B5D46"/>
-                </a:solidFill>
-                <a:latin typeface="EBGaramond" pitchFamily="34" charset="0"/>
-                <a:ea typeface="EBGaramond" pitchFamily="34" charset="-122"/>
-                <a:cs typeface="EBGaramond" pitchFamily="34" charset="-120"/>
-              </a:rPr>
-              <a:t>III</a:t>
-            </a:r>
-            <a:pPr algn="ctr" indent="0" marL="0">
-              <a:buNone/>
-            </a:pPr>
-            <a:r>
-              <a:rPr lang="en-US" sz="1600" dirty="0">
-                <a:solidFill>
-                  <a:srgbClr val="3A2E1F"/>
-                </a:solidFill>
-                <a:latin typeface="EBGaramond" pitchFamily="34" charset="0"/>
-                <a:ea typeface="EBGaramond" pitchFamily="34" charset="-122"/>
-                <a:cs typeface="EBGaramond" pitchFamily="34" charset="-120"/>
-              </a:rPr>
-              <a:t> </a:t>
-            </a:r>
-            <a:pPr algn="ctr" indent="0" marL="0">
-              <a:buNone/>
-            </a:pPr>
-            <a:r>
-              <a:rPr lang="en-US" sz="1600" dirty="0">
-                <a:solidFill>
-                  <a:srgbClr val="3A2E1F"/>
-                </a:solidFill>
-                <a:latin typeface="EBGaramond" pitchFamily="34" charset="0"/>
-                <a:ea typeface="EBGaramond" pitchFamily="34" charset="-122"/>
-                <a:cs typeface="EBGaramond" pitchFamily="34" charset="-120"/>
-              </a:rPr>
-              <a:t>Who signs the numbers we publish?</a:t>
-            </a:r>
-            <a:pPr algn="ctr" indent="0" marL="0">
-              <a:buNone/>
-            </a:pPr>
-            <a:r>
-              <a:rPr lang="en-US" sz="1600" dirty="0">
-                <a:solidFill>
-                  <a:srgbClr val="3A2E1F"/>
-                </a:solidFill>
-                <a:latin typeface="EBGaramond" pitchFamily="34" charset="0"/>
-                <a:ea typeface="EBGaramond" pitchFamily="34" charset="-122"/>
-                <a:cs typeface="EBGaramond" pitchFamily="34" charset="-120"/>
-              </a:rPr>
-              <a:t> </a:t>
-            </a:r>
-            <a:pPr algn="ctr" indent="0" marL="0">
-              <a:buNone/>
-            </a:pPr>
-            <a:r>
-              <a:rPr lang="en-US" sz="1600" dirty="0">
-                <a:solidFill>
-                  <a:srgbClr val="6B5D46"/>
-                </a:solidFill>
-                <a:latin typeface="EBGaramond" pitchFamily="34" charset="0"/>
-                <a:ea typeface="EBGaramond" pitchFamily="34" charset="-122"/>
-                <a:cs typeface="EBGaramond" pitchFamily="34" charset="-120"/>
-              </a:rPr>
-              <a:t>The signature belongs to whoever watched them measured.</a:t>
-            </a:r>
-            <a:endParaRPr lang="en-US" sz="1600" dirty="0"/>
-          </a:p>
-        </p:txBody>
-      </p:sp>
-      <p:sp>
-        <p:nvSpPr>
-          <p:cNvPr id="6" name="Text 4"/>
-          <p:cNvSpPr/>
-          <p:nvPr/>
-        </p:nvSpPr>
-        <p:spPr>
-          <a:xfrm>
-            <a:off x="948572" y="2003822"/>
-            <a:ext cx="10291808" cy="253802"/>
-          </a:xfrm>
-          <a:prstGeom prst="rect">
-            <a:avLst/>
-          </a:prstGeom>
-          <a:noFill/>
-          <a:ln/>
-        </p:spPr>
-        <p:txBody>
-          <a:bodyPr wrap="square" lIns="0" tIns="0" rIns="0" bIns="0" rtlCol="0" anchor="t"/>
-          <a:lstStyle/>
-          <a:p>
-            <a:pPr algn="ctr" indent="0" marL="0">
-              <a:lnSpc>
-                <a:spcPts val="2000"/>
-              </a:lnSpc>
-              <a:buNone/>
-            </a:pPr>
-            <a:r>
-              <a:rPr lang="en-US" sz="1333" b="1" dirty="0">
-                <a:solidFill>
-                  <a:srgbClr val="6B5D46"/>
-                </a:solidFill>
-                <a:latin typeface="EBGaramond" pitchFamily="34" charset="0"/>
-                <a:ea typeface="EBGaramond" pitchFamily="34" charset="-122"/>
-                <a:cs typeface="EBGaramond" pitchFamily="34" charset="-120"/>
-              </a:rPr>
-              <a:t>I</a:t>
-            </a:r>
-            <a:endParaRPr lang="en-US" sz="1333" dirty="0"/>
-          </a:p>
-        </p:txBody>
-      </p:sp>
-      <p:sp>
-        <p:nvSpPr>
-          <p:cNvPr id="7" name="Text 5"/>
-          <p:cNvSpPr/>
-          <p:nvPr/>
-        </p:nvSpPr>
-        <p:spPr>
-          <a:xfrm>
-            <a:off x="948572" y="2325291"/>
-            <a:ext cx="10291808" cy="434181"/>
-          </a:xfrm>
-          <a:prstGeom prst="rect">
-            <a:avLst/>
-          </a:prstGeom>
-          <a:noFill/>
-          <a:ln/>
-        </p:spPr>
-        <p:txBody>
-          <a:bodyPr wrap="square" lIns="0" tIns="0" rIns="0" bIns="0" rtlCol="0" anchor="t"/>
-          <a:lstStyle/>
-          <a:p>
-            <a:pPr algn="ctr" indent="0" marL="0">
-              <a:lnSpc>
-                <a:spcPts val="3420"/>
-              </a:lnSpc>
-              <a:spcBef>
-                <a:spcPts val="533"/>
-              </a:spcBef>
-              <a:buNone/>
-            </a:pPr>
-            <a:r>
-              <a:rPr lang="en-US" sz="2533" dirty="0">
-                <a:solidFill>
-                  <a:srgbClr val="3A2E1F"/>
-                </a:solidFill>
-                <a:latin typeface="PlayfairDisplay" pitchFamily="34" charset="0"/>
-                <a:ea typeface="PlayfairDisplay" pitchFamily="34" charset="-122"/>
-                <a:cs typeface="PlayfairDisplay" pitchFamily="34" charset="-120"/>
-              </a:rPr>
-              <a:t>Does the drill go on the calendar?</a:t>
-            </a:r>
-            <a:endParaRPr lang="en-US" sz="2533" dirty="0"/>
-          </a:p>
-        </p:txBody>
-      </p:sp>
-      <p:sp>
-        <p:nvSpPr>
-          <p:cNvPr id="8" name="Text 6"/>
-          <p:cNvSpPr/>
-          <p:nvPr/>
-        </p:nvSpPr>
-        <p:spPr>
-          <a:xfrm>
-            <a:off x="2122844" y="2827139"/>
-            <a:ext cx="7943066" cy="304800"/>
-          </a:xfrm>
-          <a:prstGeom prst="rect">
-            <a:avLst/>
-          </a:prstGeom>
-          <a:noFill/>
-          <a:ln/>
-        </p:spPr>
-        <p:txBody>
-          <a:bodyPr wrap="square" lIns="0" tIns="0" rIns="0" bIns="0" rtlCol="0" anchor="t"/>
-          <a:lstStyle/>
-          <a:p>
-            <a:pPr algn="ctr" indent="0" marL="0">
-              <a:lnSpc>
-                <a:spcPts val="2400"/>
-              </a:lnSpc>
-              <a:spcBef>
-                <a:spcPts val="533"/>
-              </a:spcBef>
-              <a:buNone/>
-            </a:pPr>
-            <a:r>
-              <a:rPr lang="en-US" sz="1600" i="1" dirty="0">
-                <a:solidFill>
-                  <a:srgbClr val="6B5D46"/>
-                </a:solidFill>
-                <a:latin typeface="EBGaramond" pitchFamily="34" charset="0"/>
-                <a:ea typeface="EBGaramond" pitchFamily="34" charset="-122"/>
-                <a:cs typeface="EBGaramond" pitchFamily="34" charset="-120"/>
-              </a:rPr>
-              <a:t>A date and an owner, or it stays an intention.</a:t>
-            </a:r>
-            <a:endParaRPr lang="en-US" sz="1600" dirty="0"/>
-          </a:p>
-        </p:txBody>
-      </p:sp>
-      <p:sp>
-        <p:nvSpPr>
-          <p:cNvPr id="9" name="Text 7"/>
-          <p:cNvSpPr/>
-          <p:nvPr/>
-        </p:nvSpPr>
-        <p:spPr>
-          <a:xfrm>
-            <a:off x="948572" y="3367484"/>
-            <a:ext cx="10291808" cy="253802"/>
-          </a:xfrm>
-          <a:prstGeom prst="rect">
-            <a:avLst/>
-          </a:prstGeom>
-          <a:noFill/>
-          <a:ln/>
-        </p:spPr>
-        <p:txBody>
-          <a:bodyPr wrap="square" lIns="0" tIns="0" rIns="0" bIns="0" rtlCol="0" anchor="t"/>
-          <a:lstStyle/>
-          <a:p>
-            <a:pPr algn="ctr" indent="0" marL="0">
-              <a:lnSpc>
-                <a:spcPts val="2000"/>
-              </a:lnSpc>
-              <a:buNone/>
-            </a:pPr>
-            <a:r>
-              <a:rPr lang="en-US" sz="1333" b="1" dirty="0">
-                <a:solidFill>
-                  <a:srgbClr val="6B5D46"/>
-                </a:solidFill>
-                <a:latin typeface="EBGaramond" pitchFamily="34" charset="0"/>
-                <a:ea typeface="EBGaramond" pitchFamily="34" charset="-122"/>
-                <a:cs typeface="EBGaramond" pitchFamily="34" charset="-120"/>
-              </a:rPr>
-              <a:t>II</a:t>
-            </a:r>
-            <a:endParaRPr lang="en-US" sz="1333" dirty="0"/>
-          </a:p>
-        </p:txBody>
-      </p:sp>
-      <p:sp>
-        <p:nvSpPr>
-          <p:cNvPr id="10" name="Text 8"/>
-          <p:cNvSpPr/>
-          <p:nvPr/>
-        </p:nvSpPr>
-        <p:spPr>
-          <a:xfrm>
-            <a:off x="948572" y="3688953"/>
-            <a:ext cx="10291808" cy="434181"/>
-          </a:xfrm>
-          <a:prstGeom prst="rect">
-            <a:avLst/>
-          </a:prstGeom>
-          <a:noFill/>
-          <a:ln/>
-        </p:spPr>
-        <p:txBody>
-          <a:bodyPr wrap="square" lIns="0" tIns="0" rIns="0" bIns="0" rtlCol="0" anchor="t"/>
-          <a:lstStyle/>
-          <a:p>
-            <a:pPr algn="ctr" indent="0" marL="0">
-              <a:lnSpc>
-                <a:spcPts val="3420"/>
-              </a:lnSpc>
-              <a:spcBef>
-                <a:spcPts val="533"/>
-              </a:spcBef>
-              <a:buNone/>
-            </a:pPr>
-            <a:r>
-              <a:rPr lang="en-US" sz="2533" dirty="0">
-                <a:solidFill>
-                  <a:srgbClr val="3A2E1F"/>
-                </a:solidFill>
-                <a:latin typeface="PlayfairDisplay" pitchFamily="34" charset="0"/>
-                <a:ea typeface="PlayfairDisplay" pitchFamily="34" charset="-122"/>
-                <a:cs typeface="PlayfairDisplay" pitchFamily="34" charset="-120"/>
-              </a:rPr>
-              <a:t>What stops while the drill runs?</a:t>
-            </a:r>
-            <a:endParaRPr lang="en-US" sz="2533" dirty="0"/>
-          </a:p>
-        </p:txBody>
-      </p:sp>
-      <p:sp>
-        <p:nvSpPr>
-          <p:cNvPr id="11" name="Text 9"/>
-          <p:cNvSpPr/>
-          <p:nvPr/>
-        </p:nvSpPr>
-        <p:spPr>
-          <a:xfrm>
-            <a:off x="2122844" y="4190802"/>
-            <a:ext cx="7943066" cy="304800"/>
-          </a:xfrm>
-          <a:prstGeom prst="rect">
-            <a:avLst/>
-          </a:prstGeom>
-          <a:noFill/>
-          <a:ln/>
-        </p:spPr>
-        <p:txBody>
-          <a:bodyPr wrap="square" lIns="0" tIns="0" rIns="0" bIns="0" rtlCol="0" anchor="t"/>
-          <a:lstStyle/>
-          <a:p>
-            <a:pPr algn="ctr" indent="0" marL="0">
-              <a:lnSpc>
-                <a:spcPts val="2400"/>
-              </a:lnSpc>
-              <a:spcBef>
-                <a:spcPts val="533"/>
-              </a:spcBef>
-              <a:buNone/>
-            </a:pPr>
-            <a:r>
-              <a:rPr lang="en-US" sz="1600" i="1" dirty="0">
-                <a:solidFill>
-                  <a:srgbClr val="6B5D46"/>
-                </a:solidFill>
-                <a:latin typeface="EBGaramond" pitchFamily="34" charset="0"/>
-                <a:ea typeface="EBGaramond" pitchFamily="34" charset="-122"/>
-                <a:cs typeface="EBGaramond" pitchFamily="34" charset="-120"/>
-              </a:rPr>
-              <a:t>Name the service that goes quiet, and who is told before it does.</a:t>
-            </a:r>
-            <a:endParaRPr lang="en-US" sz="1600" dirty="0"/>
-          </a:p>
-        </p:txBody>
-      </p:sp>
-      <p:sp>
-        <p:nvSpPr>
-          <p:cNvPr id="12" name="Text 10"/>
-          <p:cNvSpPr/>
-          <p:nvPr/>
-        </p:nvSpPr>
-        <p:spPr>
-          <a:xfrm>
-            <a:off x="948572" y="4731147"/>
-            <a:ext cx="10291808" cy="253802"/>
-          </a:xfrm>
-          <a:prstGeom prst="rect">
-            <a:avLst/>
-          </a:prstGeom>
-          <a:noFill/>
-          <a:ln/>
-        </p:spPr>
-        <p:txBody>
-          <a:bodyPr wrap="square" lIns="0" tIns="0" rIns="0" bIns="0" rtlCol="0" anchor="t"/>
-          <a:lstStyle/>
-          <a:p>
-            <a:pPr algn="ctr" indent="0" marL="0">
-              <a:lnSpc>
-                <a:spcPts val="2000"/>
-              </a:lnSpc>
-              <a:buNone/>
-            </a:pPr>
-            <a:r>
-              <a:rPr lang="en-US" sz="1333" b="1" dirty="0">
-                <a:solidFill>
-                  <a:srgbClr val="6B5D46"/>
-                </a:solidFill>
-                <a:latin typeface="EBGaramond" pitchFamily="34" charset="0"/>
-                <a:ea typeface="EBGaramond" pitchFamily="34" charset="-122"/>
-                <a:cs typeface="EBGaramond" pitchFamily="34" charset="-120"/>
-              </a:rPr>
-              <a:t>III</a:t>
-            </a:r>
-            <a:endParaRPr lang="en-US" sz="1333" dirty="0"/>
-          </a:p>
-        </p:txBody>
-      </p:sp>
-      <p:sp>
-        <p:nvSpPr>
-          <p:cNvPr id="13" name="Text 11"/>
-          <p:cNvSpPr/>
-          <p:nvPr/>
-        </p:nvSpPr>
-        <p:spPr>
-          <a:xfrm>
-            <a:off x="948572" y="5052616"/>
-            <a:ext cx="10291808" cy="434181"/>
-          </a:xfrm>
-          <a:prstGeom prst="rect">
-            <a:avLst/>
-          </a:prstGeom>
-          <a:noFill/>
-          <a:ln/>
-        </p:spPr>
-        <p:txBody>
-          <a:bodyPr wrap="square" lIns="0" tIns="0" rIns="0" bIns="0" rtlCol="0" anchor="t"/>
-          <a:lstStyle/>
-          <a:p>
-            <a:pPr algn="ctr" indent="0" marL="0">
-              <a:lnSpc>
-                <a:spcPts val="3420"/>
-              </a:lnSpc>
-              <a:spcBef>
-                <a:spcPts val="533"/>
-              </a:spcBef>
-              <a:buNone/>
-            </a:pPr>
-            <a:r>
-              <a:rPr lang="en-US" sz="2533" dirty="0">
-                <a:solidFill>
-                  <a:srgbClr val="3A2E1F"/>
-                </a:solidFill>
-                <a:latin typeface="PlayfairDisplay" pitchFamily="34" charset="0"/>
-                <a:ea typeface="PlayfairDisplay" pitchFamily="34" charset="-122"/>
-                <a:cs typeface="PlayfairDisplay" pitchFamily="34" charset="-120"/>
-              </a:rPr>
-              <a:t>Who signs the numbers we publish?</a:t>
-            </a:r>
-            <a:endParaRPr lang="en-US" sz="2533" dirty="0"/>
-          </a:p>
         </p:txBody>
       </p:sp>
       <p:sp>
         <p:nvSpPr>
           <p:cNvPr id="14" name="Text 12"/>
-          <p:cNvSpPr/>
-          <p:nvPr/>
-        </p:nvSpPr>
-        <p:spPr>
-          <a:xfrm>
-            <a:off x="2122844" y="5554464"/>
-            <a:ext cx="7943066" cy="304800"/>
-          </a:xfrm>
-          <a:prstGeom prst="rect">
-            <a:avLst/>
-          </a:prstGeom>
-          <a:noFill/>
-          <a:ln/>
-        </p:spPr>
-        <p:txBody>
-          <a:bodyPr wrap="square" lIns="0" tIns="0" rIns="0" bIns="0" rtlCol="0" anchor="t"/>
-          <a:lstStyle/>
-          <a:p>
-            <a:pPr algn="ctr" indent="0" marL="0">
-              <a:lnSpc>
-                <a:spcPts val="2400"/>
-              </a:lnSpc>
-              <a:spcBef>
-                <a:spcPts val="533"/>
-              </a:spcBef>
-              <a:buNone/>
-            </a:pPr>
-            <a:r>
-              <a:rPr lang="en-US" sz="1600" i="1" dirty="0">
-                <a:solidFill>
-                  <a:srgbClr val="6B5D46"/>
-                </a:solidFill>
-                <a:latin typeface="EBGaramond" pitchFamily="34" charset="0"/>
-                <a:ea typeface="EBGaramond" pitchFamily="34" charset="-122"/>
-                <a:cs typeface="EBGaramond" pitchFamily="34" charset="-120"/>
-              </a:rPr>
-              <a:t>The signature belongs to whoever watched them measured.</a:t>
-            </a:r>
-            <a:endParaRPr lang="en-US" sz="1600" dirty="0"/>
-          </a:p>
-        </p:txBody>
-      </p:sp>
-      <p:sp>
-        <p:nvSpPr>
-          <p:cNvPr id="15" name="Text 13"/>
           <p:cNvSpPr/>
           <p:nvPr/>
         </p:nvSpPr>
@@ -5327,7 +4607,7 @@
           <a:ln/>
         </p:spPr>
         <p:txBody>
-          <a:bodyPr wrap="square" lIns="0" tIns="0" rIns="0" bIns="0" rtlCol="0" anchor="t"/>
+          <a:bodyPr wrap="none" lIns="0" tIns="0" rIns="0" bIns="0" rtlCol="0" anchor="t"/>
           <a:lstStyle/>
           <a:p>
             <a:pPr algn="r" indent="0" marL="0">

--- a/decks/backup-restore/backup-restore.pptx
+++ b/decks/backup-restore/backup-restore.pptx
@@ -1321,9 +1321,7 @@
           <a:ln/>
         </p:spPr>
         <p:txBody>
-          <a:bodyPr wrap="square" lIns="0" tIns="0" rIns="0" bIns="0" rtlCol="0" anchor="t">
-            <a:normAutofit/>
-          </a:bodyPr>
+          <a:bodyPr wrap="none" lIns="0" tIns="0" rIns="0" bIns="0" rtlCol="0" anchor="t"/>
           <a:lstStyle/>
           <a:p>
             <a:pPr algn="ctr" indent="0" marL="0">
